--- a/presentation_draft.pptx
+++ b/presentation_draft.pptx
@@ -4,6 +4,9 @@
   <p:sldMasterIdLst>
     <p:sldMasterId id="2147483648" r:id="rId1"/>
   </p:sldMasterIdLst>
+  <p:notesMasterIdLst>
+    <p:notesMasterId r:id="rId19"/>
+  </p:notesMasterIdLst>
   <p:sldIdLst>
     <p:sldId id="256" r:id="rId2"/>
     <p:sldId id="257" r:id="rId3"/>
@@ -23,10 +26,7 @@
     <p:sldId id="271" r:id="rId17"/>
     <p:sldId id="272" r:id="rId18"/>
   </p:sldIdLst>
-  <p:notesMasterIdLst>
-    <p:notesMasterId r:id="rId19"/>
-  </p:notesMasterIdLst>
-  <p:sldSz cx="9144000" cy="5143500"/>
+  <p:sldSz cx="9144000" cy="5143500" type="screen16x9"/>
   <p:notesSz cx="5143500" cy="9144000"/>
   <p:defaultTextStyle>
     <a:lvl1pPr marL="0" algn="l" defTabSz="914400" rtl="0" eaLnBrk="1" latinLnBrk="0" hangingPunct="1">
@@ -120,6 +120,11 @@
       </a:defRPr>
     </a:lvl9pPr>
   </p:defaultTextStyle>
+  <p:extLst>
+    <p:ext uri="{EFAFB233-063F-42B5-8137-9DF3F51BA10A}">
+      <p15:sldGuideLst xmlns:p15="http://schemas.microsoft.com/office/powerpoint/2012/main"/>
+    </p:ext>
+  </p:extLst>
 </p:presentation>
 </file>
 
@@ -145,234 +150,10 @@
           <a:chExt cx="0" cy="0"/>
         </a:xfrm>
       </p:grpSpPr>
-      <p:sp>
-        <p:nvSpPr>
-          <p:cNvPr id="2" name="Header Placeholder 1"/>
-          <p:cNvSpPr>
-            <a:spLocks noGrp="1"/>
-          </p:cNvSpPr>
-          <p:nvPr>
-            <p:ph type="hdr" sz="quarter"/>
-          </p:nvPr>
-        </p:nvSpPr>
-        <p:spPr>
-          <a:xfrm>
-            <a:off x="0" y="0"/>
-            <a:ext cx="2971800" cy="458788"/>
-          </a:xfrm>
-          <a:prstGeom prst="rect">
-            <a:avLst/>
-          </a:prstGeom>
-        </p:spPr>
-        <p:txBody>
-          <a:bodyPr vert="horz" lIns="91440" tIns="45720" rIns="91440" bIns="45720" rtlCol="0"/>
-          <a:lstStyle>
-            <a:lvl1pPr algn="l">
-              <a:defRPr sz="1200"/>
-            </a:lvl1pPr>
-          </a:lstStyle>
-          <a:p>
-            <a:endParaRPr lang="en-US"/>
-          </a:p>
-        </p:txBody>
-      </p:sp>
-      <p:sp>
-        <p:nvSpPr>
-          <p:cNvPr id="3" name="Date Placeholder 2"/>
-          <p:cNvSpPr>
-            <a:spLocks noGrp="1"/>
-          </p:cNvSpPr>
-          <p:nvPr>
-            <p:ph type="dt" idx="1"/>
-          </p:nvPr>
-        </p:nvSpPr>
-        <p:spPr>
-          <a:xfrm>
-            <a:off x="3884613" y="0"/>
-            <a:ext cx="2971800" cy="458788"/>
-          </a:xfrm>
-          <a:prstGeom prst="rect">
-            <a:avLst/>
-          </a:prstGeom>
-        </p:spPr>
-        <p:txBody>
-          <a:bodyPr vert="horz" lIns="91440" tIns="45720" rIns="91440" bIns="45720" rtlCol="0"/>
-          <a:lstStyle>
-            <a:lvl1pPr algn="r">
-              <a:defRPr sz="1200"/>
-            </a:lvl1pPr>
-          </a:lstStyle>
-          <a:p>
-            <a:fld id="{5282F153-3F37-0F45-9E97-73ACFA13230C}" type="datetimeFigureOut">
-              <a:rPr lang="en-US"/>
-              <a:t>7/23/19</a:t>
-            </a:fld>
-            <a:endParaRPr lang="en-US"/>
-          </a:p>
-        </p:txBody>
-      </p:sp>
-      <p:sp>
-        <p:nvSpPr>
-          <p:cNvPr id="4" name="Slide Image Placeholder 3"/>
-          <p:cNvSpPr>
-            <a:spLocks noGrp="1" noRot="1" noChangeAspect="1"/>
-          </p:cNvSpPr>
-          <p:nvPr>
-            <p:ph type="sldImg" idx="2"/>
-          </p:nvPr>
-        </p:nvSpPr>
-        <p:spPr>
-          <a:xfrm>
-            <a:off x="685800" y="1143000"/>
-            <a:ext cx="5486400" cy="3086100"/>
-          </a:xfrm>
-          <a:prstGeom prst="rect">
-            <a:avLst/>
-          </a:prstGeom>
-          <a:noFill/>
-          <a:ln w="12700">
-            <a:solidFill>
-              <a:prstClr val="black"/>
-            </a:solidFill>
-          </a:ln>
-        </p:spPr>
-        <p:txBody>
-          <a:bodyPr vert="horz" lIns="91440" tIns="45720" rIns="91440" bIns="45720" rtlCol="0" anchor="ctr"/>
-          <a:lstStyle/>
-          <a:p>
-            <a:endParaRPr lang="en-US"/>
-          </a:p>
-        </p:txBody>
-      </p:sp>
-      <p:sp>
-        <p:nvSpPr>
-          <p:cNvPr id="5" name="Notes Placeholder 4"/>
-          <p:cNvSpPr>
-            <a:spLocks noGrp="1"/>
-          </p:cNvSpPr>
-          <p:nvPr>
-            <p:ph type="body" sz="quarter" idx="3"/>
-          </p:nvPr>
-        </p:nvSpPr>
-        <p:spPr>
-          <a:xfrm>
-            <a:off x="685800" y="4400550"/>
-            <a:ext cx="5486400" cy="3600450"/>
-          </a:xfrm>
-          <a:prstGeom prst="rect">
-            <a:avLst/>
-          </a:prstGeom>
-        </p:spPr>
-        <p:txBody>
-          <a:bodyPr vert="horz" lIns="91440" tIns="45720" rIns="91440" bIns="45720" rtlCol="0"/>
-          <a:lstStyle/>
-          <a:p>
-            <a:pPr lvl="0"/>
-            <a:r>
-              <a:rPr lang="en-US"/>
-              <a:t>Click to edit Master text styles</a:t>
-            </a:r>
-          </a:p>
-          <a:p>
-            <a:pPr lvl="1"/>
-            <a:r>
-              <a:rPr lang="en-US"/>
-              <a:t>Second level</a:t>
-            </a:r>
-          </a:p>
-          <a:p>
-            <a:pPr lvl="2"/>
-            <a:r>
-              <a:rPr lang="en-US"/>
-              <a:t>Third level</a:t>
-            </a:r>
-          </a:p>
-          <a:p>
-            <a:pPr lvl="3"/>
-            <a:r>
-              <a:rPr lang="en-US"/>
-              <a:t>Fourth level</a:t>
-            </a:r>
-          </a:p>
-          <a:p>
-            <a:pPr lvl="4"/>
-            <a:r>
-              <a:rPr lang="en-US"/>
-              <a:t>Fifth level</a:t>
-            </a:r>
-          </a:p>
-        </p:txBody>
-      </p:sp>
-      <p:sp>
-        <p:nvSpPr>
-          <p:cNvPr id="6" name="Footer Placeholder 5"/>
-          <p:cNvSpPr>
-            <a:spLocks noGrp="1"/>
-          </p:cNvSpPr>
-          <p:nvPr>
-            <p:ph type="ftr" sz="quarter" idx="4"/>
-          </p:nvPr>
-        </p:nvSpPr>
-        <p:spPr>
-          <a:xfrm>
-            <a:off x="0" y="8685213"/>
-            <a:ext cx="2971800" cy="458787"/>
-          </a:xfrm>
-          <a:prstGeom prst="rect">
-            <a:avLst/>
-          </a:prstGeom>
-        </p:spPr>
-        <p:txBody>
-          <a:bodyPr vert="horz" lIns="91440" tIns="45720" rIns="91440" bIns="45720" rtlCol="0" anchor="b"/>
-          <a:lstStyle>
-            <a:lvl1pPr algn="l">
-              <a:defRPr sz="1200"/>
-            </a:lvl1pPr>
-          </a:lstStyle>
-          <a:p>
-            <a:endParaRPr lang="en-US"/>
-          </a:p>
-        </p:txBody>
-      </p:sp>
-      <p:sp>
-        <p:nvSpPr>
-          <p:cNvPr id="7" name="Slide Number Placeholder 6"/>
-          <p:cNvSpPr>
-            <a:spLocks noGrp="1"/>
-          </p:cNvSpPr>
-          <p:nvPr>
-            <p:ph type="sldNum" sz="quarter" idx="5"/>
-          </p:nvPr>
-        </p:nvSpPr>
-        <p:spPr>
-          <a:xfrm>
-            <a:off x="3884613" y="8685213"/>
-            <a:ext cx="2971800" cy="458787"/>
-          </a:xfrm>
-          <a:prstGeom prst="rect">
-            <a:avLst/>
-          </a:prstGeom>
-        </p:spPr>
-        <p:txBody>
-          <a:bodyPr vert="horz" lIns="91440" tIns="45720" rIns="91440" bIns="45720" rtlCol="0" anchor="b"/>
-          <a:lstStyle>
-            <a:lvl1pPr algn="r">
-              <a:defRPr sz="1200"/>
-            </a:lvl1pPr>
-          </a:lstStyle>
-          <a:p>
-            <a:fld id="{CE5E9CC1-C706-0F49-92D6-E571CC5EEA8F}" type="slidenum">
-              <a:rPr lang="en-US"/>
-              <a:t>‹#›</a:t>
-            </a:fld>
-            <a:endParaRPr lang="en-US"/>
-          </a:p>
-        </p:txBody>
-      </p:sp>
     </p:spTree>
     <p:extLst>
       <p:ext uri="{BB962C8B-B14F-4D97-AF65-F5344CB8AC3E}">
-        <p14:creationId xmlns:p14="http://schemas.microsoft.com/office/powerpoint/2010/main" val="1024086991"/>
+        <p14:creationId xmlns:p14="http://schemas.microsoft.com/office/powerpoint/2010/main" val="304019143"/>
       </p:ext>
     </p:extLst>
   </p:cSld>
@@ -516,10 +297,6 @@
           <a:bodyPr/>
           <a:lstStyle/>
           <a:p>
-            <a:r>
-              <a:rPr lang="en-US" dirty="0"/>
-              <a:t/>
-            </a:r>
             <a:endParaRPr lang="en-US" dirty="0"/>
           </a:p>
         </p:txBody>
@@ -604,10 +381,6 @@
           <a:bodyPr/>
           <a:lstStyle/>
           <a:p>
-            <a:r>
-              <a:rPr lang="en-US" dirty="0"/>
-              <a:t/>
-            </a:r>
             <a:endParaRPr lang="en-US" dirty="0"/>
           </a:p>
         </p:txBody>
@@ -692,10 +465,6 @@
           <a:bodyPr/>
           <a:lstStyle/>
           <a:p>
-            <a:r>
-              <a:rPr lang="en-US" dirty="0"/>
-              <a:t/>
-            </a:r>
             <a:endParaRPr lang="en-US" dirty="0"/>
           </a:p>
         </p:txBody>
@@ -780,10 +549,6 @@
           <a:bodyPr/>
           <a:lstStyle/>
           <a:p>
-            <a:r>
-              <a:rPr lang="en-US" dirty="0"/>
-              <a:t/>
-            </a:r>
             <a:endParaRPr lang="en-US" dirty="0"/>
           </a:p>
         </p:txBody>
@@ -868,10 +633,6 @@
           <a:bodyPr/>
           <a:lstStyle/>
           <a:p>
-            <a:r>
-              <a:rPr lang="en-US" dirty="0"/>
-              <a:t/>
-            </a:r>
             <a:endParaRPr lang="en-US" dirty="0"/>
           </a:p>
         </p:txBody>
@@ -956,10 +717,6 @@
           <a:bodyPr/>
           <a:lstStyle/>
           <a:p>
-            <a:r>
-              <a:rPr lang="en-US" dirty="0"/>
-              <a:t/>
-            </a:r>
             <a:endParaRPr lang="en-US" dirty="0"/>
           </a:p>
         </p:txBody>
@@ -1044,10 +801,6 @@
           <a:bodyPr/>
           <a:lstStyle/>
           <a:p>
-            <a:r>
-              <a:rPr lang="en-US" dirty="0"/>
-              <a:t/>
-            </a:r>
             <a:endParaRPr lang="en-US" dirty="0"/>
           </a:p>
         </p:txBody>
@@ -1132,10 +885,6 @@
           <a:bodyPr/>
           <a:lstStyle/>
           <a:p>
-            <a:r>
-              <a:rPr lang="en-US" dirty="0"/>
-              <a:t/>
-            </a:r>
             <a:endParaRPr lang="en-US" dirty="0"/>
           </a:p>
         </p:txBody>
@@ -1220,10 +969,6 @@
           <a:bodyPr/>
           <a:lstStyle/>
           <a:p>
-            <a:r>
-              <a:rPr lang="en-US" dirty="0"/>
-              <a:t/>
-            </a:r>
             <a:endParaRPr lang="en-US" dirty="0"/>
           </a:p>
         </p:txBody>
@@ -1308,10 +1053,6 @@
           <a:bodyPr/>
           <a:lstStyle/>
           <a:p>
-            <a:r>
-              <a:rPr lang="en-US" dirty="0"/>
-              <a:t/>
-            </a:r>
             <a:endParaRPr lang="en-US" dirty="0"/>
           </a:p>
         </p:txBody>
@@ -1396,10 +1137,6 @@
           <a:bodyPr/>
           <a:lstStyle/>
           <a:p>
-            <a:r>
-              <a:rPr lang="en-US" dirty="0"/>
-              <a:t/>
-            </a:r>
             <a:endParaRPr lang="en-US" dirty="0"/>
           </a:p>
         </p:txBody>
@@ -1484,10 +1221,6 @@
           <a:bodyPr/>
           <a:lstStyle/>
           <a:p>
-            <a:r>
-              <a:rPr lang="en-US" dirty="0"/>
-              <a:t/>
-            </a:r>
             <a:endParaRPr lang="en-US" dirty="0"/>
           </a:p>
         </p:txBody>
@@ -1572,10 +1305,6 @@
           <a:bodyPr/>
           <a:lstStyle/>
           <a:p>
-            <a:r>
-              <a:rPr lang="en-US" dirty="0"/>
-              <a:t/>
-            </a:r>
             <a:endParaRPr lang="en-US" dirty="0"/>
           </a:p>
         </p:txBody>
@@ -1660,10 +1389,6 @@
           <a:bodyPr/>
           <a:lstStyle/>
           <a:p>
-            <a:r>
-              <a:rPr lang="en-US" dirty="0"/>
-              <a:t/>
-            </a:r>
             <a:endParaRPr lang="en-US" dirty="0"/>
           </a:p>
         </p:txBody>
@@ -1748,10 +1473,6 @@
           <a:bodyPr/>
           <a:lstStyle/>
           <a:p>
-            <a:r>
-              <a:rPr lang="en-US" dirty="0"/>
-              <a:t/>
-            </a:r>
             <a:endParaRPr lang="en-US" dirty="0"/>
           </a:p>
         </p:txBody>
@@ -1836,10 +1557,6 @@
           <a:bodyPr/>
           <a:lstStyle/>
           <a:p>
-            <a:r>
-              <a:rPr lang="en-US" dirty="0"/>
-              <a:t/>
-            </a:r>
             <a:endParaRPr lang="en-US" dirty="0"/>
           </a:p>
         </p:txBody>
@@ -1924,10 +1641,6 @@
           <a:bodyPr/>
           <a:lstStyle/>
           <a:p>
-            <a:r>
-              <a:rPr lang="en-US" dirty="0"/>
-              <a:t/>
-            </a:r>
             <a:endParaRPr lang="en-US" dirty="0"/>
           </a:p>
         </p:txBody>
@@ -2001,6 +1714,11 @@
 <file path=ppt/slideMasters/slideMaster1.xml><?xml version="1.0" encoding="utf-8"?>
 <p:sldMaster xmlns:a="http://schemas.openxmlformats.org/drawingml/2006/main" xmlns:r="http://schemas.openxmlformats.org/officeDocument/2006/relationships" xmlns:p="http://schemas.openxmlformats.org/presentationml/2006/main">
   <p:cSld>
+    <p:bg>
+      <p:bgRef idx="1001">
+        <a:schemeClr val="bg1"/>
+      </p:bgRef>
+    </p:bg>
     <p:spTree>
       <p:nvGrpSpPr>
         <p:cNvPr id="1" name=""/>
@@ -2283,6 +2001,7 @@
         <a:solidFill>
           <a:srgbClr val="1A2E4A"/>
         </a:solidFill>
+        <a:effectLst/>
       </p:bgPr>
     </p:bg>
     <p:spTree>
@@ -2301,14 +2020,14 @@
       </p:grpSpPr>
       <p:pic>
         <p:nvPicPr>
-          <p:cNvPr id="2" name="Image 0" descr="/home/claude/assets/logo_unimore.png">    </p:cNvPr>
+          <p:cNvPr id="2" name="Image 0" descr="/home/claude/assets/logo_unimore.png"/>
           <p:cNvPicPr>
             <a:picLocks noChangeAspect="1"/>
           </p:cNvPicPr>
           <p:nvPr/>
         </p:nvPicPr>
         <p:blipFill>
-          <a:blip r:embed="rId1"/>
+          <a:blip r:embed="rId3"/>
           <a:stretch>
             <a:fillRect/>
           </a:stretch>
@@ -2367,7 +2086,7 @@
           <a:bodyPr wrap="square" rtlCol="0" anchor="ctr"/>
           <a:lstStyle/>
           <a:p>
-            <a:pPr algn="ctr" indent="0" marL="0">
+            <a:pPr marL="0" indent="0" algn="ctr">
               <a:buNone/>
             </a:pPr>
             <a:r>
@@ -2406,7 +2125,7 @@
           <a:bodyPr wrap="square" rtlCol="0" anchor="ctr"/>
           <a:lstStyle/>
           <a:p>
-            <a:pPr algn="ctr" indent="0" marL="0">
+            <a:pPr marL="0" indent="0" algn="ctr">
               <a:buNone/>
             </a:pPr>
             <a:r>
@@ -2445,7 +2164,7 @@
           <a:bodyPr wrap="square" rtlCol="0" anchor="ctr"/>
           <a:lstStyle/>
           <a:p>
-            <a:pPr algn="ctr" indent="0" marL="0">
+            <a:pPr marL="0" indent="0" algn="ctr">
               <a:buNone/>
             </a:pPr>
             <a:r>
@@ -2462,7 +2181,7 @@
             <a:endParaRPr lang="en-US" sz="3000" dirty="0"/>
           </a:p>
           <a:p>
-            <a:pPr algn="ctr" indent="0" marL="0">
+            <a:pPr marL="0" indent="0" algn="ctr">
               <a:buNone/>
             </a:pPr>
             <a:r>
@@ -2524,7 +2243,7 @@
           <a:bodyPr wrap="square" rtlCol="0" anchor="ctr"/>
           <a:lstStyle/>
           <a:p>
-            <a:pPr algn="l" indent="0" marL="0">
+            <a:pPr marL="0" indent="0" algn="l">
               <a:buNone/>
             </a:pPr>
             <a:r>
@@ -2538,9 +2257,6 @@
               </a:rPr>
               <a:t>Tesi di Laurea di:  </a:t>
             </a:r>
-            <a:pPr algn="l" indent="0" marL="0">
-              <a:buNone/>
-            </a:pPr>
             <a:r>
               <a:rPr lang="en-US" sz="1200" b="1" dirty="0">
                 <a:solidFill>
@@ -2577,7 +2293,7 @@
           <a:bodyPr wrap="square" rtlCol="0" anchor="ctr"/>
           <a:lstStyle/>
           <a:p>
-            <a:pPr indent="0" marL="0">
+            <a:pPr marL="0" indent="0">
               <a:buNone/>
             </a:pPr>
             <a:r>
@@ -2591,9 +2307,6 @@
               </a:rPr>
               <a:t>Relatore:  </a:t>
             </a:r>
-            <a:pPr indent="0" marL="0">
-              <a:buNone/>
-            </a:pPr>
             <a:r>
               <a:rPr lang="en-US" sz="1100" b="1" dirty="0">
                 <a:solidFill>
@@ -2630,7 +2343,7 @@
           <a:bodyPr wrap="square" rtlCol="0" anchor="ctr"/>
           <a:lstStyle/>
           <a:p>
-            <a:pPr indent="0" marL="0">
+            <a:pPr marL="0" indent="0">
               <a:buNone/>
             </a:pPr>
             <a:r>
@@ -2644,9 +2357,6 @@
               </a:rPr>
               <a:t>Correlatori:  </a:t>
             </a:r>
-            <a:pPr indent="0" marL="0">
-              <a:buNone/>
-            </a:pPr>
             <a:r>
               <a:rPr lang="en-US" sz="1100" b="1" dirty="0">
                 <a:solidFill>
@@ -2683,7 +2393,7 @@
           <a:bodyPr wrap="square" rtlCol="0" anchor="ctr"/>
           <a:lstStyle/>
           <a:p>
-            <a:pPr algn="ctr" indent="0" marL="0">
+            <a:pPr marL="0" indent="0" algn="ctr">
               <a:buNone/>
             </a:pPr>
             <a:r>
@@ -2717,6 +2427,7 @@
         <a:solidFill>
           <a:srgbClr val="FFFFFF"/>
         </a:solidFill>
+        <a:effectLst/>
       </p:bgPr>
     </p:bg>
     <p:spTree>
@@ -2754,7 +2465,7 @@
           <a:bodyPr wrap="square" rtlCol="0" anchor="ctr"/>
           <a:lstStyle/>
           <a:p>
-            <a:pPr algn="l" indent="0" marL="0">
+            <a:pPr marL="0" indent="0" algn="l">
               <a:buNone/>
             </a:pPr>
             <a:r>
@@ -2793,7 +2504,7 @@
           <a:bodyPr wrap="square" rtlCol="0" anchor="ctr"/>
           <a:lstStyle/>
           <a:p>
-            <a:pPr algn="r" indent="0" marL="0">
+            <a:pPr marL="0" indent="0" algn="r">
               <a:buNone/>
             </a:pPr>
             <a:r>
@@ -2857,7 +2568,7 @@
           <a:bodyPr wrap="square" lIns="0" tIns="0" rIns="0" bIns="0" rtlCol="0" anchor="ctr"/>
           <a:lstStyle/>
           <a:p>
-            <a:pPr algn="l" indent="0" marL="0">
+            <a:pPr marL="0" indent="0" algn="l">
               <a:buNone/>
             </a:pPr>
             <a:r>
@@ -2919,7 +2630,7 @@
           <a:bodyPr wrap="square" rtlCol="0" anchor="ctr"/>
           <a:lstStyle/>
           <a:p>
-            <a:pPr indent="0" marL="0">
+            <a:pPr marL="0" indent="0">
               <a:buNone/>
             </a:pPr>
             <a:r>
@@ -3008,7 +2719,7 @@
           <a:bodyPr wrap="square" rtlCol="0" anchor="ctr"/>
           <a:lstStyle/>
           <a:p>
-            <a:pPr indent="0" marL="0">
+            <a:pPr marL="0" indent="0">
               <a:buNone/>
             </a:pPr>
             <a:r>
@@ -3203,7 +2914,7 @@
           <a:bodyPr wrap="square" rtlCol="0" anchor="ctr"/>
           <a:lstStyle/>
           <a:p>
-            <a:pPr indent="0" marL="0">
+            <a:pPr marL="0" indent="0">
               <a:buNone/>
             </a:pPr>
             <a:r>
@@ -3343,6 +3054,7 @@
         <a:solidFill>
           <a:srgbClr val="FFFFFF"/>
         </a:solidFill>
+        <a:effectLst/>
       </p:bgPr>
     </p:bg>
     <p:spTree>
@@ -3380,7 +3092,7 @@
           <a:bodyPr wrap="square" rtlCol="0" anchor="ctr"/>
           <a:lstStyle/>
           <a:p>
-            <a:pPr algn="l" indent="0" marL="0">
+            <a:pPr marL="0" indent="0" algn="l">
               <a:buNone/>
             </a:pPr>
             <a:r>
@@ -3419,7 +3131,7 @@
           <a:bodyPr wrap="square" rtlCol="0" anchor="ctr"/>
           <a:lstStyle/>
           <a:p>
-            <a:pPr algn="r" indent="0" marL="0">
+            <a:pPr marL="0" indent="0" algn="r">
               <a:buNone/>
             </a:pPr>
             <a:r>
@@ -3483,7 +3195,7 @@
           <a:bodyPr wrap="square" lIns="0" tIns="0" rIns="0" bIns="0" rtlCol="0" anchor="ctr"/>
           <a:lstStyle/>
           <a:p>
-            <a:pPr algn="l" indent="0" marL="0">
+            <a:pPr marL="0" indent="0" algn="l">
               <a:buNone/>
             </a:pPr>
             <a:r>
@@ -3611,15 +3323,15 @@
       </p:sp>
       <p:pic>
         <p:nvPicPr>
-          <p:cNvPr id="8" name="Image 0" descr="/home/claude/assets/experimental_process_white.png">    </p:cNvPr>
+          <p:cNvPr id="8" name="Image 0" descr="/home/claude/assets/experimental_process_white.png"/>
           <p:cNvPicPr>
             <a:picLocks noChangeAspect="1"/>
           </p:cNvPicPr>
           <p:nvPr/>
         </p:nvPicPr>
         <p:blipFill>
-          <a:blip r:embed="rId1"/>
-          <a:srcRect l="0" r="0" t="0" b="0"/>
+          <a:blip r:embed="rId3"/>
+          <a:srcRect/>
           <a:stretch/>
         </p:blipFill>
         <p:spPr>
@@ -3678,7 +3390,7 @@
           <a:bodyPr wrap="square" rtlCol="0" anchor="ctr"/>
           <a:lstStyle/>
           <a:p>
-            <a:pPr indent="0" marL="0">
+            <a:pPr marL="0" indent="0">
               <a:buNone/>
             </a:pPr>
             <a:r>
@@ -3712,6 +3424,7 @@
         <a:solidFill>
           <a:srgbClr val="FFFFFF"/>
         </a:solidFill>
+        <a:effectLst/>
       </p:bgPr>
     </p:bg>
     <p:spTree>
@@ -3749,7 +3462,7 @@
           <a:bodyPr wrap="square" rtlCol="0" anchor="ctr"/>
           <a:lstStyle/>
           <a:p>
-            <a:pPr algn="l" indent="0" marL="0">
+            <a:pPr marL="0" indent="0" algn="l">
               <a:buNone/>
             </a:pPr>
             <a:r>
@@ -3788,7 +3501,7 @@
           <a:bodyPr wrap="square" rtlCol="0" anchor="ctr"/>
           <a:lstStyle/>
           <a:p>
-            <a:pPr algn="r" indent="0" marL="0">
+            <a:pPr marL="0" indent="0" algn="r">
               <a:buNone/>
             </a:pPr>
             <a:r>
@@ -3852,7 +3565,7 @@
           <a:bodyPr wrap="square" lIns="0" tIns="0" rIns="0" bIns="0" rtlCol="0" anchor="ctr"/>
           <a:lstStyle/>
           <a:p>
-            <a:pPr algn="l" indent="0" marL="0">
+            <a:pPr marL="0" indent="0" algn="l">
               <a:buNone/>
             </a:pPr>
             <a:r>
@@ -3939,7 +3652,7 @@
           <a:bodyPr wrap="square" rtlCol="0" anchor="ctr"/>
           <a:lstStyle/>
           <a:p>
-            <a:pPr indent="0" marL="0">
+            <a:pPr marL="0" indent="0">
               <a:buNone/>
             </a:pPr>
             <a:r>
@@ -3953,9 +3666,6 @@
               </a:rPr>
               <a:t>Config: </a:t>
             </a:r>
-            <a:pPr indent="0" marL="0">
-              <a:buNone/>
-            </a:pPr>
             <a:r>
               <a:rPr lang="en-US" sz="1200" dirty="0">
                 <a:solidFill>
@@ -3973,15 +3683,15 @@
       </p:sp>
       <p:pic>
         <p:nvPicPr>
-          <p:cNvPr id="9" name="Image 0" descr="/home/claude/assets/relative_sorted_1e6_loss_reward.png">    </p:cNvPr>
+          <p:cNvPr id="9" name="Image 0" descr="/home/claude/assets/relative_sorted_1e6_loss_reward.png"/>
           <p:cNvPicPr>
             <a:picLocks noChangeAspect="1"/>
           </p:cNvPicPr>
           <p:nvPr/>
         </p:nvPicPr>
         <p:blipFill>
-          <a:blip r:embed="rId1"/>
-          <a:srcRect l="0" r="0" t="0" b="0"/>
+          <a:blip r:embed="rId3"/>
+          <a:srcRect/>
           <a:stretch/>
         </p:blipFill>
         <p:spPr>
@@ -4015,7 +3725,7 @@
           <a:bodyPr wrap="square" rtlCol="0" anchor="ctr"/>
           <a:lstStyle/>
           <a:p>
-            <a:pPr algn="ctr" indent="0" marL="0">
+            <a:pPr marL="0" indent="0" algn="ctr">
               <a:buNone/>
             </a:pPr>
             <a:r>
@@ -4035,15 +3745,15 @@
       </p:sp>
       <p:pic>
         <p:nvPicPr>
-          <p:cNvPr id="11" name="Image 1" descr="/home/claude/assets/relative_sorted_1e6_train_loss.png">    </p:cNvPr>
+          <p:cNvPr id="11" name="Image 1" descr="/home/claude/assets/relative_sorted_1e6_train_loss.png"/>
           <p:cNvPicPr>
             <a:picLocks noChangeAspect="1"/>
           </p:cNvPicPr>
           <p:nvPr/>
         </p:nvPicPr>
         <p:blipFill>
-          <a:blip r:embed="rId2"/>
-          <a:srcRect l="0" r="0" t="0" b="0"/>
+          <a:blip r:embed="rId4"/>
+          <a:srcRect/>
           <a:stretch/>
         </p:blipFill>
         <p:spPr>
@@ -4077,7 +3787,7 @@
           <a:bodyPr wrap="square" rtlCol="0" anchor="ctr"/>
           <a:lstStyle/>
           <a:p>
-            <a:pPr algn="ctr" indent="0" marL="0">
+            <a:pPr marL="0" indent="0" algn="ctr">
               <a:buNone/>
             </a:pPr>
             <a:r>
@@ -4141,7 +3851,7 @@
           <a:bodyPr wrap="square" rtlCol="0" anchor="ctr"/>
           <a:lstStyle/>
           <a:p>
-            <a:pPr indent="0" marL="0">
+            <a:pPr marL="0" indent="0">
               <a:buNone/>
             </a:pPr>
             <a:r>
@@ -4175,6 +3885,7 @@
         <a:solidFill>
           <a:srgbClr val="FFFFFF"/>
         </a:solidFill>
+        <a:effectLst/>
       </p:bgPr>
     </p:bg>
     <p:spTree>
@@ -4212,7 +3923,7 @@
           <a:bodyPr wrap="square" rtlCol="0" anchor="ctr"/>
           <a:lstStyle/>
           <a:p>
-            <a:pPr algn="l" indent="0" marL="0">
+            <a:pPr marL="0" indent="0" algn="l">
               <a:buNone/>
             </a:pPr>
             <a:r>
@@ -4251,7 +3962,7 @@
           <a:bodyPr wrap="square" rtlCol="0" anchor="ctr"/>
           <a:lstStyle/>
           <a:p>
-            <a:pPr algn="r" indent="0" marL="0">
+            <a:pPr marL="0" indent="0" algn="r">
               <a:buNone/>
             </a:pPr>
             <a:r>
@@ -4315,7 +4026,7 @@
           <a:bodyPr wrap="square" lIns="0" tIns="0" rIns="0" bIns="0" rtlCol="0" anchor="ctr"/>
           <a:lstStyle/>
           <a:p>
-            <a:pPr algn="l" indent="0" marL="0">
+            <a:pPr marL="0" indent="0" algn="l">
               <a:buNone/>
             </a:pPr>
             <a:r>
@@ -4377,7 +4088,7 @@
           <a:bodyPr wrap="square" rtlCol="0" anchor="ctr"/>
           <a:lstStyle/>
           <a:p>
-            <a:pPr indent="0" marL="0">
+            <a:pPr marL="0" indent="0">
               <a:buNone/>
             </a:pPr>
             <a:r>
@@ -4441,7 +4152,7 @@
           <a:bodyPr wrap="square" rtlCol="0" anchor="ctr"/>
           <a:lstStyle/>
           <a:p>
-            <a:pPr indent="0" marL="0">
+            <a:pPr marL="0" indent="0">
               <a:buNone/>
             </a:pPr>
             <a:r>
@@ -4569,7 +4280,7 @@
           <a:bodyPr wrap="square" rtlCol="0" anchor="ctr"/>
           <a:lstStyle/>
           <a:p>
-            <a:pPr indent="0" marL="0">
+            <a:pPr marL="0" indent="0">
               <a:buNone/>
             </a:pPr>
             <a:r>
@@ -4688,6 +4399,7 @@
         <a:solidFill>
           <a:srgbClr val="FFFFFF"/>
         </a:solidFill>
+        <a:effectLst/>
       </p:bgPr>
     </p:bg>
     <p:spTree>
@@ -4725,7 +4437,7 @@
           <a:bodyPr wrap="square" rtlCol="0" anchor="ctr"/>
           <a:lstStyle/>
           <a:p>
-            <a:pPr algn="l" indent="0" marL="0">
+            <a:pPr marL="0" indent="0" algn="l">
               <a:buNone/>
             </a:pPr>
             <a:r>
@@ -4764,7 +4476,7 @@
           <a:bodyPr wrap="square" rtlCol="0" anchor="ctr"/>
           <a:lstStyle/>
           <a:p>
-            <a:pPr algn="r" indent="0" marL="0">
+            <a:pPr marL="0" indent="0" algn="r">
               <a:buNone/>
             </a:pPr>
             <a:r>
@@ -4828,7 +4540,7 @@
           <a:bodyPr wrap="square" lIns="0" tIns="0" rIns="0" bIns="0" rtlCol="0" anchor="ctr"/>
           <a:lstStyle/>
           <a:p>
-            <a:pPr algn="l" indent="0" marL="0">
+            <a:pPr marL="0" indent="0" algn="l">
               <a:buNone/>
             </a:pPr>
             <a:r>
@@ -4915,7 +4627,7 @@
           <a:bodyPr wrap="square" rtlCol="0" anchor="ctr"/>
           <a:lstStyle/>
           <a:p>
-            <a:pPr indent="0" marL="0">
+            <a:pPr marL="0" indent="0">
               <a:buNone/>
             </a:pPr>
             <a:r>
@@ -4929,9 +4641,6 @@
               </a:rPr>
               <a:t>Config: </a:t>
             </a:r>
-            <a:pPr indent="0" marL="0">
-              <a:buNone/>
-            </a:pPr>
             <a:r>
               <a:rPr lang="en-US" sz="1200" dirty="0">
                 <a:solidFill>
@@ -4949,15 +4658,15 @@
       </p:sp>
       <p:pic>
         <p:nvPicPr>
-          <p:cNvPr id="9" name="Image 0" descr="/home/claude/assets/absolute_ag_notsorted_1e6_reward.png">    </p:cNvPr>
+          <p:cNvPr id="9" name="Image 0" descr="/home/claude/assets/absolute_ag_notsorted_1e6_reward.png"/>
           <p:cNvPicPr>
             <a:picLocks noChangeAspect="1"/>
           </p:cNvPicPr>
           <p:nvPr/>
         </p:nvPicPr>
         <p:blipFill>
-          <a:blip r:embed="rId1"/>
-          <a:srcRect l="0" r="0" t="0" b="0"/>
+          <a:blip r:embed="rId3"/>
+          <a:srcRect/>
           <a:stretch/>
         </p:blipFill>
         <p:spPr>
@@ -4991,7 +4700,7 @@
           <a:bodyPr wrap="square" rtlCol="0" anchor="ctr"/>
           <a:lstStyle/>
           <a:p>
-            <a:pPr algn="ctr" indent="0" marL="0">
+            <a:pPr marL="0" indent="0" algn="ctr">
               <a:buNone/>
             </a:pPr>
             <a:r>
@@ -5011,15 +4720,15 @@
       </p:sp>
       <p:pic>
         <p:nvPicPr>
-          <p:cNvPr id="11" name="Image 1" descr="/home/claude/assets/absolute_ag_notsorted_1e6_loss.png">    </p:cNvPr>
+          <p:cNvPr id="11" name="Image 1" descr="/home/claude/assets/absolute_ag_notsorted_1e6_loss.png"/>
           <p:cNvPicPr>
             <a:picLocks noChangeAspect="1"/>
           </p:cNvPicPr>
           <p:nvPr/>
         </p:nvPicPr>
         <p:blipFill>
-          <a:blip r:embed="rId2"/>
-          <a:srcRect l="0" r="0" t="0" b="0"/>
+          <a:blip r:embed="rId4"/>
+          <a:srcRect/>
           <a:stretch/>
         </p:blipFill>
         <p:spPr>
@@ -5053,7 +4762,7 @@
           <a:bodyPr wrap="square" rtlCol="0" anchor="ctr"/>
           <a:lstStyle/>
           <a:p>
-            <a:pPr algn="ctr" indent="0" marL="0">
+            <a:pPr marL="0" indent="0" algn="ctr">
               <a:buNone/>
             </a:pPr>
             <a:r>
@@ -5117,7 +4826,7 @@
           <a:bodyPr wrap="square" rtlCol="0" anchor="ctr"/>
           <a:lstStyle/>
           <a:p>
-            <a:pPr indent="0" marL="0">
+            <a:pPr marL="0" indent="0">
               <a:buNone/>
             </a:pPr>
             <a:r>
@@ -5151,6 +4860,7 @@
         <a:solidFill>
           <a:srgbClr val="FFFFFF"/>
         </a:solidFill>
+        <a:effectLst/>
       </p:bgPr>
     </p:bg>
     <p:spTree>
@@ -5188,7 +4898,7 @@
           <a:bodyPr wrap="square" rtlCol="0" anchor="ctr"/>
           <a:lstStyle/>
           <a:p>
-            <a:pPr algn="l" indent="0" marL="0">
+            <a:pPr marL="0" indent="0" algn="l">
               <a:buNone/>
             </a:pPr>
             <a:r>
@@ -5227,7 +4937,7 @@
           <a:bodyPr wrap="square" rtlCol="0" anchor="ctr"/>
           <a:lstStyle/>
           <a:p>
-            <a:pPr algn="r" indent="0" marL="0">
+            <a:pPr marL="0" indent="0" algn="r">
               <a:buNone/>
             </a:pPr>
             <a:r>
@@ -5291,7 +5001,7 @@
           <a:bodyPr wrap="square" lIns="0" tIns="0" rIns="0" bIns="0" rtlCol="0" anchor="ctr"/>
           <a:lstStyle/>
           <a:p>
-            <a:pPr algn="l" indent="0" marL="0">
+            <a:pPr marL="0" indent="0" algn="l">
               <a:buNone/>
             </a:pPr>
             <a:r>
@@ -5353,7 +5063,7 @@
           <a:bodyPr wrap="square" rtlCol="0" anchor="ctr"/>
           <a:lstStyle/>
           <a:p>
-            <a:pPr indent="0" marL="0">
+            <a:pPr marL="0" indent="0">
               <a:buNone/>
             </a:pPr>
             <a:r>
@@ -5394,12 +5104,48 @@
             <a:tbl>
               <a:tblPr/>
               <a:tblGrid>
-                <a:gridCol w="1417320"/>
-                <a:gridCol w="1417320"/>
-                <a:gridCol w="1417320"/>
-                <a:gridCol w="1417320"/>
-                <a:gridCol w="1417320"/>
-                <a:gridCol w="1417320"/>
+                <a:gridCol w="1417320">
+                  <a:extLst>
+                    <a:ext uri="{9D8B030D-6E8A-4147-A177-3AD203B41FA5}">
+                      <a16:colId xmlns:a16="http://schemas.microsoft.com/office/drawing/2014/main" val="20000"/>
+                    </a:ext>
+                  </a:extLst>
+                </a:gridCol>
+                <a:gridCol w="1417320">
+                  <a:extLst>
+                    <a:ext uri="{9D8B030D-6E8A-4147-A177-3AD203B41FA5}">
+                      <a16:colId xmlns:a16="http://schemas.microsoft.com/office/drawing/2014/main" val="20001"/>
+                    </a:ext>
+                  </a:extLst>
+                </a:gridCol>
+                <a:gridCol w="1417320">
+                  <a:extLst>
+                    <a:ext uri="{9D8B030D-6E8A-4147-A177-3AD203B41FA5}">
+                      <a16:colId xmlns:a16="http://schemas.microsoft.com/office/drawing/2014/main" val="20002"/>
+                    </a:ext>
+                  </a:extLst>
+                </a:gridCol>
+                <a:gridCol w="1417320">
+                  <a:extLst>
+                    <a:ext uri="{9D8B030D-6E8A-4147-A177-3AD203B41FA5}">
+                      <a16:colId xmlns:a16="http://schemas.microsoft.com/office/drawing/2014/main" val="20003"/>
+                    </a:ext>
+                  </a:extLst>
+                </a:gridCol>
+                <a:gridCol w="1417320">
+                  <a:extLst>
+                    <a:ext uri="{9D8B030D-6E8A-4147-A177-3AD203B41FA5}">
+                      <a16:colId xmlns:a16="http://schemas.microsoft.com/office/drawing/2014/main" val="20004"/>
+                    </a:ext>
+                  </a:extLst>
+                </a:gridCol>
+                <a:gridCol w="1417320">
+                  <a:extLst>
+                    <a:ext uri="{9D8B030D-6E8A-4147-A177-3AD203B41FA5}">
+                      <a16:colId xmlns:a16="http://schemas.microsoft.com/office/drawing/2014/main" val="20005"/>
+                    </a:ext>
+                  </a:extLst>
+                </a:gridCol>
               </a:tblGrid>
               <a:tr h="640080">
                 <a:tc>
@@ -5407,7 +5153,7 @@
                     <a:bodyPr/>
                     <a:lstStyle/>
                     <a:p>
-                      <a:pPr algn="ctr" indent="0" marL="0">
+                      <a:pPr marL="0" indent="0" algn="ctr">
                         <a:buNone/>
                       </a:pPr>
                       <a:r>
@@ -5428,7 +5174,7 @@
                       </a:endParaRPr>
                     </a:p>
                   </a:txBody>
-                  <a:tcPr marL="91440" marR="91440" marT="45720" marB="45720">
+                  <a:tcPr>
                     <a:lnL w="12700" cap="flat" cmpd="sng" algn="ctr">
                       <a:solidFill>
                         <a:srgbClr val="D0D8E4"/>
@@ -5475,7 +5221,7 @@
                     <a:bodyPr/>
                     <a:lstStyle/>
                     <a:p>
-                      <a:pPr algn="ctr" indent="0" marL="0">
+                      <a:pPr marL="0" indent="0" algn="ctr">
                         <a:buNone/>
                       </a:pPr>
                       <a:r>
@@ -5496,7 +5242,7 @@
                       </a:endParaRPr>
                     </a:p>
                   </a:txBody>
-                  <a:tcPr marL="91440" marR="91440" marT="45720" marB="45720">
+                  <a:tcPr>
                     <a:lnL w="12700" cap="flat" cmpd="sng" algn="ctr">
                       <a:solidFill>
                         <a:srgbClr val="D0D8E4"/>
@@ -5543,7 +5289,7 @@
                     <a:bodyPr/>
                     <a:lstStyle/>
                     <a:p>
-                      <a:pPr algn="ctr" indent="0" marL="0">
+                      <a:pPr marL="0" indent="0" algn="ctr">
                         <a:buNone/>
                       </a:pPr>
                       <a:r>
@@ -5564,7 +5310,7 @@
                       </a:endParaRPr>
                     </a:p>
                   </a:txBody>
-                  <a:tcPr marL="91440" marR="91440" marT="45720" marB="45720">
+                  <a:tcPr>
                     <a:lnL w="12700" cap="flat" cmpd="sng" algn="ctr">
                       <a:solidFill>
                         <a:srgbClr val="D0D8E4"/>
@@ -5611,7 +5357,7 @@
                     <a:bodyPr/>
                     <a:lstStyle/>
                     <a:p>
-                      <a:pPr algn="ctr" indent="0" marL="0">
+                      <a:pPr marL="0" indent="0" algn="ctr">
                         <a:buNone/>
                       </a:pPr>
                       <a:r>
@@ -5632,7 +5378,7 @@
                       </a:endParaRPr>
                     </a:p>
                   </a:txBody>
-                  <a:tcPr marL="91440" marR="91440" marT="45720" marB="45720">
+                  <a:tcPr>
                     <a:lnL w="12700" cap="flat" cmpd="sng" algn="ctr">
                       <a:solidFill>
                         <a:srgbClr val="D0D8E4"/>
@@ -5679,7 +5425,7 @@
                     <a:bodyPr/>
                     <a:lstStyle/>
                     <a:p>
-                      <a:pPr algn="ctr" indent="0" marL="0">
+                      <a:pPr marL="0" indent="0" algn="ctr">
                         <a:buNone/>
                       </a:pPr>
                       <a:r>
@@ -5700,7 +5446,7 @@
                       </a:endParaRPr>
                     </a:p>
                   </a:txBody>
-                  <a:tcPr marL="91440" marR="91440" marT="45720" marB="45720">
+                  <a:tcPr>
                     <a:lnL w="12700" cap="flat" cmpd="sng" algn="ctr">
                       <a:solidFill>
                         <a:srgbClr val="D0D8E4"/>
@@ -5747,7 +5493,7 @@
                     <a:bodyPr/>
                     <a:lstStyle/>
                     <a:p>
-                      <a:pPr algn="ctr" indent="0" marL="0">
+                      <a:pPr marL="0" indent="0" algn="ctr">
                         <a:buNone/>
                       </a:pPr>
                       <a:r>
@@ -5768,7 +5514,7 @@
                       </a:endParaRPr>
                     </a:p>
                   </a:txBody>
-                  <a:tcPr marL="91440" marR="91440" marT="45720" marB="45720">
+                  <a:tcPr>
                     <a:lnL w="12700" cap="flat" cmpd="sng" algn="ctr">
                       <a:solidFill>
                         <a:srgbClr val="D0D8E4"/>
@@ -5810,6 +5556,11 @@
                     </a:solidFill>
                   </a:tcPr>
                 </a:tc>
+                <a:extLst>
+                  <a:ext uri="{0D108BD9-81ED-4DB2-BD59-A6C34878D82A}">
+                    <a16:rowId xmlns:a16="http://schemas.microsoft.com/office/drawing/2014/main" val="10000"/>
+                  </a:ext>
+                </a:extLst>
               </a:tr>
               <a:tr h="640080">
                 <a:tc>
@@ -5817,7 +5568,7 @@
                     <a:bodyPr/>
                     <a:lstStyle/>
                     <a:p>
-                      <a:pPr algn="ctr" indent="0" marL="0">
+                      <a:pPr marL="0" indent="0" algn="ctr">
                         <a:buNone/>
                       </a:pPr>
                       <a:r>
@@ -5838,7 +5589,7 @@
                       </a:endParaRPr>
                     </a:p>
                   </a:txBody>
-                  <a:tcPr marL="91440" marR="91440" marT="45720" marB="45720">
+                  <a:tcPr>
                     <a:lnL w="12700" cap="flat" cmpd="sng" algn="ctr">
                       <a:solidFill>
                         <a:srgbClr val="D0D8E4"/>
@@ -5885,7 +5636,7 @@
                     <a:bodyPr/>
                     <a:lstStyle/>
                     <a:p>
-                      <a:pPr algn="ctr" indent="0" marL="0">
+                      <a:pPr marL="0" indent="0" algn="ctr">
                         <a:buNone/>
                       </a:pPr>
                       <a:r>
@@ -5906,7 +5657,7 @@
                       </a:endParaRPr>
                     </a:p>
                   </a:txBody>
-                  <a:tcPr marL="91440" marR="91440" marT="45720" marB="45720">
+                  <a:tcPr>
                     <a:lnL w="12700" cap="flat" cmpd="sng" algn="ctr">
                       <a:solidFill>
                         <a:srgbClr val="D0D8E4"/>
@@ -5953,7 +5704,7 @@
                     <a:bodyPr/>
                     <a:lstStyle/>
                     <a:p>
-                      <a:pPr algn="ctr" indent="0" marL="0">
+                      <a:pPr marL="0" indent="0" algn="ctr">
                         <a:buNone/>
                       </a:pPr>
                       <a:r>
@@ -5974,7 +5725,7 @@
                       </a:endParaRPr>
                     </a:p>
                   </a:txBody>
-                  <a:tcPr marL="91440" marR="91440" marT="45720" marB="45720">
+                  <a:tcPr>
                     <a:lnL w="12700" cap="flat" cmpd="sng" algn="ctr">
                       <a:solidFill>
                         <a:srgbClr val="D0D8E4"/>
@@ -6021,7 +5772,7 @@
                     <a:bodyPr/>
                     <a:lstStyle/>
                     <a:p>
-                      <a:pPr algn="ctr" indent="0" marL="0">
+                      <a:pPr marL="0" indent="0" algn="ctr">
                         <a:buNone/>
                       </a:pPr>
                       <a:r>
@@ -6042,7 +5793,7 @@
                       </a:endParaRPr>
                     </a:p>
                   </a:txBody>
-                  <a:tcPr marL="91440" marR="91440" marT="45720" marB="45720">
+                  <a:tcPr>
                     <a:lnL w="12700" cap="flat" cmpd="sng" algn="ctr">
                       <a:solidFill>
                         <a:srgbClr val="D0D8E4"/>
@@ -6089,7 +5840,7 @@
                     <a:bodyPr/>
                     <a:lstStyle/>
                     <a:p>
-                      <a:pPr algn="ctr" indent="0" marL="0">
+                      <a:pPr marL="0" indent="0" algn="ctr">
                         <a:buNone/>
                       </a:pPr>
                       <a:r>
@@ -6110,7 +5861,7 @@
                       </a:endParaRPr>
                     </a:p>
                   </a:txBody>
-                  <a:tcPr marL="91440" marR="91440" marT="45720" marB="45720">
+                  <a:tcPr>
                     <a:lnL w="12700" cap="flat" cmpd="sng" algn="ctr">
                       <a:solidFill>
                         <a:srgbClr val="D0D8E4"/>
@@ -6157,7 +5908,7 @@
                     <a:bodyPr/>
                     <a:lstStyle/>
                     <a:p>
-                      <a:pPr algn="ctr" indent="0" marL="0">
+                      <a:pPr marL="0" indent="0" algn="ctr">
                         <a:buNone/>
                       </a:pPr>
                       <a:r>
@@ -6178,7 +5929,7 @@
                       </a:endParaRPr>
                     </a:p>
                   </a:txBody>
-                  <a:tcPr marL="91440" marR="91440" marT="45720" marB="45720">
+                  <a:tcPr>
                     <a:lnL w="12700" cap="flat" cmpd="sng" algn="ctr">
                       <a:solidFill>
                         <a:srgbClr val="D0D8E4"/>
@@ -6220,6 +5971,11 @@
                     </a:solidFill>
                   </a:tcPr>
                 </a:tc>
+                <a:extLst>
+                  <a:ext uri="{0D108BD9-81ED-4DB2-BD59-A6C34878D82A}">
+                    <a16:rowId xmlns:a16="http://schemas.microsoft.com/office/drawing/2014/main" val="10001"/>
+                  </a:ext>
+                </a:extLst>
               </a:tr>
               <a:tr h="640080">
                 <a:tc>
@@ -6227,7 +5983,7 @@
                     <a:bodyPr/>
                     <a:lstStyle/>
                     <a:p>
-                      <a:pPr algn="ctr" indent="0" marL="0">
+                      <a:pPr marL="0" indent="0" algn="ctr">
                         <a:buNone/>
                       </a:pPr>
                       <a:r>
@@ -6248,7 +6004,7 @@
                       </a:endParaRPr>
                     </a:p>
                   </a:txBody>
-                  <a:tcPr marL="91440" marR="91440" marT="45720" marB="45720">
+                  <a:tcPr>
                     <a:lnL w="12700" cap="flat" cmpd="sng" algn="ctr">
                       <a:solidFill>
                         <a:srgbClr val="D0D8E4"/>
@@ -6295,7 +6051,7 @@
                     <a:bodyPr/>
                     <a:lstStyle/>
                     <a:p>
-                      <a:pPr algn="ctr" indent="0" marL="0">
+                      <a:pPr marL="0" indent="0" algn="ctr">
                         <a:buNone/>
                       </a:pPr>
                       <a:r>
@@ -6316,7 +6072,7 @@
                       </a:endParaRPr>
                     </a:p>
                   </a:txBody>
-                  <a:tcPr marL="91440" marR="91440" marT="45720" marB="45720">
+                  <a:tcPr>
                     <a:lnL w="12700" cap="flat" cmpd="sng" algn="ctr">
                       <a:solidFill>
                         <a:srgbClr val="D0D8E4"/>
@@ -6363,7 +6119,7 @@
                     <a:bodyPr/>
                     <a:lstStyle/>
                     <a:p>
-                      <a:pPr algn="ctr" indent="0" marL="0">
+                      <a:pPr marL="0" indent="0" algn="ctr">
                         <a:buNone/>
                       </a:pPr>
                       <a:r>
@@ -6384,7 +6140,7 @@
                       </a:endParaRPr>
                     </a:p>
                   </a:txBody>
-                  <a:tcPr marL="91440" marR="91440" marT="45720" marB="45720">
+                  <a:tcPr>
                     <a:lnL w="12700" cap="flat" cmpd="sng" algn="ctr">
                       <a:solidFill>
                         <a:srgbClr val="D0D8E4"/>
@@ -6431,7 +6187,7 @@
                     <a:bodyPr/>
                     <a:lstStyle/>
                     <a:p>
-                      <a:pPr algn="ctr" indent="0" marL="0">
+                      <a:pPr marL="0" indent="0" algn="ctr">
                         <a:buNone/>
                       </a:pPr>
                       <a:r>
@@ -6452,7 +6208,7 @@
                       </a:endParaRPr>
                     </a:p>
                   </a:txBody>
-                  <a:tcPr marL="91440" marR="91440" marT="45720" marB="45720">
+                  <a:tcPr>
                     <a:lnL w="12700" cap="flat" cmpd="sng" algn="ctr">
                       <a:solidFill>
                         <a:srgbClr val="D0D8E4"/>
@@ -6499,7 +6255,7 @@
                     <a:bodyPr/>
                     <a:lstStyle/>
                     <a:p>
-                      <a:pPr algn="ctr" indent="0" marL="0">
+                      <a:pPr marL="0" indent="0" algn="ctr">
                         <a:buNone/>
                       </a:pPr>
                       <a:r>
@@ -6520,7 +6276,7 @@
                       </a:endParaRPr>
                     </a:p>
                   </a:txBody>
-                  <a:tcPr marL="91440" marR="91440" marT="45720" marB="45720">
+                  <a:tcPr>
                     <a:lnL w="12700" cap="flat" cmpd="sng" algn="ctr">
                       <a:solidFill>
                         <a:srgbClr val="D0D8E4"/>
@@ -6567,7 +6323,7 @@
                     <a:bodyPr/>
                     <a:lstStyle/>
                     <a:p>
-                      <a:pPr algn="ctr" indent="0" marL="0">
+                      <a:pPr marL="0" indent="0" algn="ctr">
                         <a:buNone/>
                       </a:pPr>
                       <a:r>
@@ -6588,7 +6344,7 @@
                       </a:endParaRPr>
                     </a:p>
                   </a:txBody>
-                  <a:tcPr marL="91440" marR="91440" marT="45720" marB="45720">
+                  <a:tcPr>
                     <a:lnL w="12700" cap="flat" cmpd="sng" algn="ctr">
                       <a:solidFill>
                         <a:srgbClr val="D0D8E4"/>
@@ -6630,6 +6386,11 @@
                     </a:solidFill>
                   </a:tcPr>
                 </a:tc>
+                <a:extLst>
+                  <a:ext uri="{0D108BD9-81ED-4DB2-BD59-A6C34878D82A}">
+                    <a16:rowId xmlns:a16="http://schemas.microsoft.com/office/drawing/2014/main" val="10002"/>
+                  </a:ext>
+                </a:extLst>
               </a:tr>
               <a:tr h="640080">
                 <a:tc>
@@ -6637,7 +6398,7 @@
                     <a:bodyPr/>
                     <a:lstStyle/>
                     <a:p>
-                      <a:pPr algn="ctr" indent="0" marL="0">
+                      <a:pPr marL="0" indent="0" algn="ctr">
                         <a:buNone/>
                       </a:pPr>
                       <a:r>
@@ -6658,7 +6419,7 @@
                       </a:endParaRPr>
                     </a:p>
                   </a:txBody>
-                  <a:tcPr marL="91440" marR="91440" marT="45720" marB="45720">
+                  <a:tcPr>
                     <a:lnL w="12700" cap="flat" cmpd="sng" algn="ctr">
                       <a:solidFill>
                         <a:srgbClr val="D0D8E4"/>
@@ -6705,7 +6466,7 @@
                     <a:bodyPr/>
                     <a:lstStyle/>
                     <a:p>
-                      <a:pPr algn="ctr" indent="0" marL="0">
+                      <a:pPr marL="0" indent="0" algn="ctr">
                         <a:buNone/>
                       </a:pPr>
                       <a:r>
@@ -6726,7 +6487,7 @@
                       </a:endParaRPr>
                     </a:p>
                   </a:txBody>
-                  <a:tcPr marL="91440" marR="91440" marT="45720" marB="45720">
+                  <a:tcPr>
                     <a:lnL w="12700" cap="flat" cmpd="sng" algn="ctr">
                       <a:solidFill>
                         <a:srgbClr val="D0D8E4"/>
@@ -6773,7 +6534,7 @@
                     <a:bodyPr/>
                     <a:lstStyle/>
                     <a:p>
-                      <a:pPr algn="ctr" indent="0" marL="0">
+                      <a:pPr marL="0" indent="0" algn="ctr">
                         <a:buNone/>
                       </a:pPr>
                       <a:r>
@@ -6794,7 +6555,7 @@
                       </a:endParaRPr>
                     </a:p>
                   </a:txBody>
-                  <a:tcPr marL="91440" marR="91440" marT="45720" marB="45720">
+                  <a:tcPr>
                     <a:lnL w="12700" cap="flat" cmpd="sng" algn="ctr">
                       <a:solidFill>
                         <a:srgbClr val="D0D8E4"/>
@@ -6841,7 +6602,7 @@
                     <a:bodyPr/>
                     <a:lstStyle/>
                     <a:p>
-                      <a:pPr algn="ctr" indent="0" marL="0">
+                      <a:pPr marL="0" indent="0" algn="ctr">
                         <a:buNone/>
                       </a:pPr>
                       <a:r>
@@ -6862,7 +6623,7 @@
                       </a:endParaRPr>
                     </a:p>
                   </a:txBody>
-                  <a:tcPr marL="91440" marR="91440" marT="45720" marB="45720">
+                  <a:tcPr>
                     <a:lnL w="12700" cap="flat" cmpd="sng" algn="ctr">
                       <a:solidFill>
                         <a:srgbClr val="D0D8E4"/>
@@ -6909,7 +6670,7 @@
                     <a:bodyPr/>
                     <a:lstStyle/>
                     <a:p>
-                      <a:pPr algn="ctr" indent="0" marL="0">
+                      <a:pPr marL="0" indent="0" algn="ctr">
                         <a:buNone/>
                       </a:pPr>
                       <a:r>
@@ -6930,7 +6691,7 @@
                       </a:endParaRPr>
                     </a:p>
                   </a:txBody>
-                  <a:tcPr marL="91440" marR="91440" marT="45720" marB="45720">
+                  <a:tcPr>
                     <a:lnL w="12700" cap="flat" cmpd="sng" algn="ctr">
                       <a:solidFill>
                         <a:srgbClr val="D0D8E4"/>
@@ -6977,7 +6738,7 @@
                     <a:bodyPr/>
                     <a:lstStyle/>
                     <a:p>
-                      <a:pPr algn="ctr" indent="0" marL="0">
+                      <a:pPr marL="0" indent="0" algn="ctr">
                         <a:buNone/>
                       </a:pPr>
                       <a:r>
@@ -6998,7 +6759,7 @@
                       </a:endParaRPr>
                     </a:p>
                   </a:txBody>
-                  <a:tcPr marL="91440" marR="91440" marT="45720" marB="45720">
+                  <a:tcPr>
                     <a:lnL w="12700" cap="flat" cmpd="sng" algn="ctr">
                       <a:solidFill>
                         <a:srgbClr val="D0D8E4"/>
@@ -7040,6 +6801,11 @@
                     </a:solidFill>
                   </a:tcPr>
                 </a:tc>
+                <a:extLst>
+                  <a:ext uri="{0D108BD9-81ED-4DB2-BD59-A6C34878D82A}">
+                    <a16:rowId xmlns:a16="http://schemas.microsoft.com/office/drawing/2014/main" val="10003"/>
+                  </a:ext>
+                </a:extLst>
               </a:tr>
             </a:tbl>
           </a:graphicData>
@@ -7066,7 +6832,7 @@
           <a:bodyPr wrap="square" rtlCol="0" anchor="ctr"/>
           <a:lstStyle/>
           <a:p>
-            <a:pPr indent="0" marL="0">
+            <a:pPr marL="0" indent="0">
               <a:buNone/>
             </a:pPr>
             <a:r>
@@ -7100,6 +6866,7 @@
         <a:solidFill>
           <a:srgbClr val="FFFFFF"/>
         </a:solidFill>
+        <a:effectLst/>
       </p:bgPr>
     </p:bg>
     <p:spTree>
@@ -7137,7 +6904,7 @@
           <a:bodyPr wrap="square" rtlCol="0" anchor="ctr"/>
           <a:lstStyle/>
           <a:p>
-            <a:pPr algn="l" indent="0" marL="0">
+            <a:pPr marL="0" indent="0" algn="l">
               <a:buNone/>
             </a:pPr>
             <a:r>
@@ -7176,7 +6943,7 @@
           <a:bodyPr wrap="square" rtlCol="0" anchor="ctr"/>
           <a:lstStyle/>
           <a:p>
-            <a:pPr algn="r" indent="0" marL="0">
+            <a:pPr marL="0" indent="0" algn="r">
               <a:buNone/>
             </a:pPr>
             <a:r>
@@ -7240,7 +7007,7 @@
           <a:bodyPr wrap="square" lIns="0" tIns="0" rIns="0" bIns="0" rtlCol="0" anchor="ctr"/>
           <a:lstStyle/>
           <a:p>
-            <a:pPr algn="l" indent="0" marL="0">
+            <a:pPr marL="0" indent="0" algn="l">
               <a:buNone/>
             </a:pPr>
             <a:r>
@@ -7368,15 +7135,15 @@
       </p:sp>
       <p:pic>
         <p:nvPicPr>
-          <p:cNvPr id="8" name="Image 0" descr="/home/claude/assets/frontiers_comparison.jpg">    </p:cNvPr>
+          <p:cNvPr id="8" name="Image 0" descr="/home/claude/assets/frontiers_comparison.jpg"/>
           <p:cNvPicPr>
             <a:picLocks noChangeAspect="1"/>
           </p:cNvPicPr>
           <p:nvPr/>
         </p:nvPicPr>
         <p:blipFill>
-          <a:blip r:embed="rId1"/>
-          <a:srcRect l="0" r="0" t="0" b="0"/>
+          <a:blip r:embed="rId3"/>
+          <a:srcRect/>
           <a:stretch/>
         </p:blipFill>
         <p:spPr>
@@ -7410,7 +7177,7 @@
           <a:bodyPr wrap="square" rtlCol="0" anchor="ctr"/>
           <a:lstStyle/>
           <a:p>
-            <a:pPr algn="ctr" indent="0" marL="0">
+            <a:pPr marL="0" indent="0" algn="ctr">
               <a:buNone/>
             </a:pPr>
             <a:r>
@@ -7474,7 +7241,7 @@
           <a:bodyPr wrap="square" rtlCol="0" anchor="ctr"/>
           <a:lstStyle/>
           <a:p>
-            <a:pPr indent="0" marL="0">
+            <a:pPr marL="0" indent="0">
               <a:buNone/>
             </a:pPr>
             <a:r>
@@ -7508,6 +7275,7 @@
         <a:solidFill>
           <a:srgbClr val="1A2E4A"/>
         </a:solidFill>
+        <a:effectLst/>
       </p:bgPr>
     </p:bg>
     <p:spTree>
@@ -7545,7 +7313,7 @@
           <a:bodyPr wrap="square" rtlCol="0" anchor="ctr"/>
           <a:lstStyle/>
           <a:p>
-            <a:pPr algn="l" indent="0" marL="0">
+            <a:pPr marL="0" indent="0" algn="l">
               <a:buNone/>
             </a:pPr>
             <a:r>
@@ -7632,7 +7400,7 @@
           <a:bodyPr wrap="square" rtlCol="0" anchor="ctr"/>
           <a:lstStyle/>
           <a:p>
-            <a:pPr indent="0" marL="0">
+            <a:pPr marL="0" indent="0">
               <a:buNone/>
             </a:pPr>
             <a:r>
@@ -7696,7 +7464,7 @@
           <a:bodyPr wrap="square" rtlCol="0" anchor="ctr"/>
           <a:lstStyle/>
           <a:p>
-            <a:pPr indent="0" marL="0">
+            <a:pPr marL="0" indent="0">
               <a:buNone/>
             </a:pPr>
             <a:r>
@@ -7760,7 +7528,7 @@
           <a:bodyPr wrap="square" rtlCol="0" anchor="ctr"/>
           <a:lstStyle/>
           <a:p>
-            <a:pPr indent="0" marL="0">
+            <a:pPr marL="0" indent="0">
               <a:buNone/>
             </a:pPr>
             <a:r>
@@ -7824,7 +7592,7 @@
           <a:bodyPr wrap="square" rtlCol="0" anchor="ctr"/>
           <a:lstStyle/>
           <a:p>
-            <a:pPr indent="0" marL="0">
+            <a:pPr marL="0" indent="0">
               <a:buNone/>
             </a:pPr>
             <a:r>
@@ -7888,7 +7656,7 @@
           <a:bodyPr wrap="square" rtlCol="0" anchor="ctr"/>
           <a:lstStyle/>
           <a:p>
-            <a:pPr indent="0" marL="0">
+            <a:pPr marL="0" indent="0">
               <a:buNone/>
             </a:pPr>
             <a:r>
@@ -7950,7 +7718,7 @@
           <a:bodyPr wrap="square" rtlCol="0" anchor="ctr"/>
           <a:lstStyle/>
           <a:p>
-            <a:pPr algn="ctr" indent="0" marL="0">
+            <a:pPr marL="0" indent="0" algn="ctr">
               <a:buNone/>
             </a:pPr>
             <a:r>
@@ -7984,6 +7752,7 @@
         <a:solidFill>
           <a:srgbClr val="FFFFFF"/>
         </a:solidFill>
+        <a:effectLst/>
       </p:bgPr>
     </p:bg>
     <p:spTree>
@@ -8021,7 +7790,7 @@
           <a:bodyPr wrap="square" rtlCol="0" anchor="ctr"/>
           <a:lstStyle/>
           <a:p>
-            <a:pPr algn="l" indent="0" marL="0">
+            <a:pPr marL="0" indent="0" algn="l">
               <a:buNone/>
             </a:pPr>
             <a:r>
@@ -8060,7 +7829,7 @@
           <a:bodyPr wrap="square" rtlCol="0" anchor="ctr"/>
           <a:lstStyle/>
           <a:p>
-            <a:pPr algn="r" indent="0" marL="0">
+            <a:pPr marL="0" indent="0" algn="r">
               <a:buNone/>
             </a:pPr>
             <a:r>
@@ -8124,7 +7893,7 @@
           <a:bodyPr wrap="square" lIns="0" tIns="0" rIns="0" bIns="0" rtlCol="0" anchor="ctr"/>
           <a:lstStyle/>
           <a:p>
-            <a:pPr algn="l" indent="0" marL="0">
+            <a:pPr marL="0" indent="0" algn="l">
               <a:buNone/>
             </a:pPr>
             <a:r>
@@ -8236,7 +8005,7 @@
           <a:bodyPr wrap="square" rtlCol="0" anchor="ctr"/>
           <a:lstStyle/>
           <a:p>
-            <a:pPr indent="0" marL="0">
+            <a:pPr marL="0" indent="0">
               <a:buNone/>
             </a:pPr>
             <a:r>
@@ -8250,9 +8019,6 @@
               </a:rPr>
               <a:t>1. </a:t>
             </a:r>
-            <a:pPr indent="0" marL="0">
-              <a:buNone/>
-            </a:pPr>
             <a:r>
               <a:rPr lang="en-US" sz="1500" dirty="0">
                 <a:solidFill>
@@ -8339,7 +8105,7 @@
           <a:bodyPr wrap="square" rtlCol="0" anchor="ctr"/>
           <a:lstStyle/>
           <a:p>
-            <a:pPr indent="0" marL="0">
+            <a:pPr marL="0" indent="0">
               <a:buNone/>
             </a:pPr>
             <a:r>
@@ -8353,9 +8119,6 @@
               </a:rPr>
               <a:t>2. </a:t>
             </a:r>
-            <a:pPr indent="0" marL="0">
-              <a:buNone/>
-            </a:pPr>
             <a:r>
               <a:rPr lang="en-US" sz="1500" dirty="0">
                 <a:solidFill>
@@ -8442,7 +8205,7 @@
           <a:bodyPr wrap="square" rtlCol="0" anchor="ctr"/>
           <a:lstStyle/>
           <a:p>
-            <a:pPr indent="0" marL="0">
+            <a:pPr marL="0" indent="0">
               <a:buNone/>
             </a:pPr>
             <a:r>
@@ -8456,9 +8219,6 @@
               </a:rPr>
               <a:t>3. </a:t>
             </a:r>
-            <a:pPr indent="0" marL="0">
-              <a:buNone/>
-            </a:pPr>
             <a:r>
               <a:rPr lang="en-US" sz="1500" dirty="0">
                 <a:solidFill>
@@ -8545,7 +8305,7 @@
           <a:bodyPr wrap="square" rtlCol="0" anchor="ctr"/>
           <a:lstStyle/>
           <a:p>
-            <a:pPr indent="0" marL="0">
+            <a:pPr marL="0" indent="0">
               <a:buNone/>
             </a:pPr>
             <a:r>
@@ -8559,9 +8319,6 @@
               </a:rPr>
               <a:t>4. </a:t>
             </a:r>
-            <a:pPr indent="0" marL="0">
-              <a:buNone/>
-            </a:pPr>
             <a:r>
               <a:rPr lang="en-US" sz="1500" dirty="0">
                 <a:solidFill>
@@ -8648,7 +8405,7 @@
           <a:bodyPr wrap="square" rtlCol="0" anchor="ctr"/>
           <a:lstStyle/>
           <a:p>
-            <a:pPr indent="0" marL="0">
+            <a:pPr marL="0" indent="0">
               <a:buNone/>
             </a:pPr>
             <a:r>
@@ -8662,9 +8419,6 @@
               </a:rPr>
               <a:t>5. </a:t>
             </a:r>
-            <a:pPr indent="0" marL="0">
-              <a:buNone/>
-            </a:pPr>
             <a:r>
               <a:rPr lang="en-US" sz="1500" dirty="0">
                 <a:solidFill>
@@ -8751,7 +8505,7 @@
           <a:bodyPr wrap="square" rtlCol="0" anchor="ctr"/>
           <a:lstStyle/>
           <a:p>
-            <a:pPr indent="0" marL="0">
+            <a:pPr marL="0" indent="0">
               <a:buNone/>
             </a:pPr>
             <a:r>
@@ -8765,9 +8519,6 @@
               </a:rPr>
               <a:t>6. </a:t>
             </a:r>
-            <a:pPr indent="0" marL="0">
-              <a:buNone/>
-            </a:pPr>
             <a:r>
               <a:rPr lang="en-US" sz="1500" dirty="0">
                 <a:solidFill>
@@ -8854,7 +8605,7 @@
           <a:bodyPr wrap="square" rtlCol="0" anchor="ctr"/>
           <a:lstStyle/>
           <a:p>
-            <a:pPr indent="0" marL="0">
+            <a:pPr marL="0" indent="0">
               <a:buNone/>
             </a:pPr>
             <a:r>
@@ -8868,9 +8619,6 @@
               </a:rPr>
               <a:t>7. </a:t>
             </a:r>
-            <a:pPr indent="0" marL="0">
-              <a:buNone/>
-            </a:pPr>
             <a:r>
               <a:rPr lang="en-US" sz="1500" dirty="0">
                 <a:solidFill>
@@ -8902,6 +8650,7 @@
         <a:solidFill>
           <a:srgbClr val="FFFFFF"/>
         </a:solidFill>
+        <a:effectLst/>
       </p:bgPr>
     </p:bg>
     <p:spTree>
@@ -8939,7 +8688,7 @@
           <a:bodyPr wrap="square" rtlCol="0" anchor="ctr"/>
           <a:lstStyle/>
           <a:p>
-            <a:pPr algn="l" indent="0" marL="0">
+            <a:pPr marL="0" indent="0" algn="l">
               <a:buNone/>
             </a:pPr>
             <a:r>
@@ -8978,7 +8727,7 @@
           <a:bodyPr wrap="square" rtlCol="0" anchor="ctr"/>
           <a:lstStyle/>
           <a:p>
-            <a:pPr algn="r" indent="0" marL="0">
+            <a:pPr marL="0" indent="0" algn="r">
               <a:buNone/>
             </a:pPr>
             <a:r>
@@ -9042,7 +8791,7 @@
           <a:bodyPr wrap="square" lIns="0" tIns="0" rIns="0" bIns="0" rtlCol="0" anchor="ctr"/>
           <a:lstStyle/>
           <a:p>
-            <a:pPr algn="l" indent="0" marL="0">
+            <a:pPr marL="0" indent="0" algn="l">
               <a:buNone/>
             </a:pPr>
             <a:r>
@@ -9129,7 +8878,7 @@
           <a:bodyPr wrap="square" rtlCol="0" anchor="ctr"/>
           <a:lstStyle/>
           <a:p>
-            <a:pPr algn="ctr" indent="0" marL="0">
+            <a:pPr marL="0" indent="0" algn="ctr">
               <a:buNone/>
             </a:pPr>
             <a:r>
@@ -9146,7 +8895,7 @@
             <a:endParaRPr lang="en-US" sz="1600" dirty="0"/>
           </a:p>
           <a:p>
-            <a:pPr algn="ctr" indent="0" marL="0">
+            <a:pPr marL="0" indent="0" algn="ctr">
               <a:buNone/>
             </a:pPr>
             <a:r>
@@ -9286,6 +9035,7 @@
         <a:solidFill>
           <a:srgbClr val="FFFFFF"/>
         </a:solidFill>
+        <a:effectLst/>
       </p:bgPr>
     </p:bg>
     <p:spTree>
@@ -9323,7 +9073,7 @@
           <a:bodyPr wrap="square" rtlCol="0" anchor="ctr"/>
           <a:lstStyle/>
           <a:p>
-            <a:pPr algn="l" indent="0" marL="0">
+            <a:pPr marL="0" indent="0" algn="l">
               <a:buNone/>
             </a:pPr>
             <a:r>
@@ -9362,7 +9112,7 @@
           <a:bodyPr wrap="square" rtlCol="0" anchor="ctr"/>
           <a:lstStyle/>
           <a:p>
-            <a:pPr algn="r" indent="0" marL="0">
+            <a:pPr marL="0" indent="0" algn="r">
               <a:buNone/>
             </a:pPr>
             <a:r>
@@ -9426,7 +9176,7 @@
           <a:bodyPr wrap="square" lIns="0" tIns="0" rIns="0" bIns="0" rtlCol="0" anchor="ctr"/>
           <a:lstStyle/>
           <a:p>
-            <a:pPr algn="l" indent="0" marL="0">
+            <a:pPr marL="0" indent="0" algn="l">
               <a:buNone/>
             </a:pPr>
             <a:r>
@@ -9575,15 +9325,15 @@
       </p:sp>
       <p:pic>
         <p:nvPicPr>
-          <p:cNvPr id="8" name="Image 0" descr="/home/claude/assets/frontiers_picture.jpg">    </p:cNvPr>
+          <p:cNvPr id="8" name="Image 0" descr="/home/claude/assets/frontiers_picture.jpg"/>
           <p:cNvPicPr>
             <a:picLocks noChangeAspect="1"/>
           </p:cNvPicPr>
           <p:nvPr/>
         </p:nvPicPr>
         <p:blipFill>
-          <a:blip r:embed="rId1"/>
-          <a:srcRect l="0" r="0" t="0" b="0"/>
+          <a:blip r:embed="rId3"/>
+          <a:srcRect/>
           <a:stretch/>
         </p:blipFill>
         <p:spPr>
@@ -9617,7 +9367,7 @@
           <a:bodyPr wrap="square" rtlCol="0" anchor="ctr"/>
           <a:lstStyle/>
           <a:p>
-            <a:pPr algn="ctr" indent="0" marL="0">
+            <a:pPr marL="0" indent="0" algn="ctr">
               <a:buNone/>
             </a:pPr>
             <a:r>
@@ -9651,6 +9401,7 @@
         <a:solidFill>
           <a:srgbClr val="FFFFFF"/>
         </a:solidFill>
+        <a:effectLst/>
       </p:bgPr>
     </p:bg>
     <p:spTree>
@@ -9688,7 +9439,7 @@
           <a:bodyPr wrap="square" rtlCol="0" anchor="ctr"/>
           <a:lstStyle/>
           <a:p>
-            <a:pPr algn="l" indent="0" marL="0">
+            <a:pPr marL="0" indent="0" algn="l">
               <a:buNone/>
             </a:pPr>
             <a:r>
@@ -9727,7 +9478,7 @@
           <a:bodyPr wrap="square" rtlCol="0" anchor="ctr"/>
           <a:lstStyle/>
           <a:p>
-            <a:pPr algn="r" indent="0" marL="0">
+            <a:pPr marL="0" indent="0" algn="r">
               <a:buNone/>
             </a:pPr>
             <a:r>
@@ -9791,7 +9542,7 @@
           <a:bodyPr wrap="square" lIns="0" tIns="0" rIns="0" bIns="0" rtlCol="0" anchor="ctr"/>
           <a:lstStyle/>
           <a:p>
-            <a:pPr algn="l" indent="0" marL="0">
+            <a:pPr marL="0" indent="0" algn="l">
               <a:buNone/>
             </a:pPr>
             <a:r>
@@ -9940,15 +9691,15 @@
       </p:sp>
       <p:pic>
         <p:nvPicPr>
-          <p:cNvPr id="8" name="Image 0" descr="/home/claude/assets/frontiers_0.jpg">    </p:cNvPr>
+          <p:cNvPr id="8" name="Image 0" descr="/home/claude/assets/frontiers_0.jpg"/>
           <p:cNvPicPr>
             <a:picLocks noChangeAspect="1"/>
           </p:cNvPicPr>
           <p:nvPr/>
         </p:nvPicPr>
         <p:blipFill>
-          <a:blip r:embed="rId1"/>
-          <a:srcRect l="0" r="0" t="0" b="0"/>
+          <a:blip r:embed="rId3"/>
+          <a:srcRect/>
           <a:stretch/>
         </p:blipFill>
         <p:spPr>
@@ -9982,7 +9733,7 @@
           <a:bodyPr wrap="square" rtlCol="0" anchor="ctr"/>
           <a:lstStyle/>
           <a:p>
-            <a:pPr algn="ctr" indent="0" marL="0">
+            <a:pPr marL="0" indent="0" algn="ctr">
               <a:buNone/>
             </a:pPr>
             <a:r>
@@ -10046,7 +9797,7 @@
           <a:bodyPr wrap="square" rtlCol="0" anchor="ctr"/>
           <a:lstStyle/>
           <a:p>
-            <a:pPr indent="0" marL="0">
+            <a:pPr marL="0" indent="0">
               <a:buNone/>
             </a:pPr>
             <a:r>
@@ -10080,6 +9831,7 @@
         <a:solidFill>
           <a:srgbClr val="FFFFFF"/>
         </a:solidFill>
+        <a:effectLst/>
       </p:bgPr>
     </p:bg>
     <p:spTree>
@@ -10117,7 +9869,7 @@
           <a:bodyPr wrap="square" rtlCol="0" anchor="ctr"/>
           <a:lstStyle/>
           <a:p>
-            <a:pPr algn="l" indent="0" marL="0">
+            <a:pPr marL="0" indent="0" algn="l">
               <a:buNone/>
             </a:pPr>
             <a:r>
@@ -10156,7 +9908,7 @@
           <a:bodyPr wrap="square" rtlCol="0" anchor="ctr"/>
           <a:lstStyle/>
           <a:p>
-            <a:pPr algn="r" indent="0" marL="0">
+            <a:pPr marL="0" indent="0" algn="r">
               <a:buNone/>
             </a:pPr>
             <a:r>
@@ -10220,7 +9972,7 @@
           <a:bodyPr wrap="square" lIns="0" tIns="0" rIns="0" bIns="0" rtlCol="0" anchor="ctr"/>
           <a:lstStyle/>
           <a:p>
-            <a:pPr algn="l" indent="0" marL="0">
+            <a:pPr marL="0" indent="0" algn="l">
               <a:buNone/>
             </a:pPr>
             <a:r>
@@ -10332,7 +10084,7 @@
           <a:bodyPr wrap="square" rtlCol="0" anchor="ctr"/>
           <a:lstStyle/>
           <a:p>
-            <a:pPr indent="0" marL="0">
+            <a:pPr marL="0" indent="0">
               <a:buNone/>
             </a:pPr>
             <a:r>
@@ -10506,7 +10258,7 @@
           <a:bodyPr wrap="square" rtlCol="0" anchor="ctr"/>
           <a:lstStyle/>
           <a:p>
-            <a:pPr indent="0" marL="0">
+            <a:pPr marL="0" indent="0">
               <a:buNone/>
             </a:pPr>
             <a:r>
@@ -10655,7 +10407,7 @@
           <a:bodyPr wrap="square" rtlCol="0" anchor="ctr"/>
           <a:lstStyle/>
           <a:p>
-            <a:pPr algn="ctr" indent="0" marL="0">
+            <a:pPr marL="0" indent="0" algn="ctr">
               <a:buNone/>
             </a:pPr>
             <a:r>
@@ -10694,7 +10446,7 @@
           <a:bodyPr wrap="square" rtlCol="0" anchor="ctr"/>
           <a:lstStyle/>
           <a:p>
-            <a:pPr algn="ctr" indent="0" marL="0">
+            <a:pPr marL="0" indent="0" algn="ctr">
               <a:buNone/>
             </a:pPr>
             <a:r>
@@ -10733,7 +10485,7 @@
           <a:bodyPr wrap="square" rtlCol="0" anchor="t"/>
           <a:lstStyle/>
           <a:p>
-            <a:pPr algn="ctr" indent="0" marL="0">
+            <a:pPr marL="0" indent="0" algn="ctr">
               <a:buNone/>
             </a:pPr>
             <a:r>
@@ -10750,7 +10502,7 @@
             <a:endParaRPr lang="en-US" sz="1100" dirty="0"/>
           </a:p>
           <a:p>
-            <a:pPr algn="ctr" indent="0" marL="0">
+            <a:pPr marL="0" indent="0" algn="ctr">
               <a:buNone/>
             </a:pPr>
             <a:r>
@@ -10789,7 +10541,7 @@
           <a:bodyPr wrap="square" rtlCol="0" anchor="ctr"/>
           <a:lstStyle/>
           <a:p>
-            <a:pPr algn="ctr" indent="0" marL="0">
+            <a:pPr marL="0" indent="0" algn="ctr">
               <a:buNone/>
             </a:pPr>
             <a:r>
@@ -10828,7 +10580,7 @@
           <a:bodyPr wrap="square" rtlCol="0" anchor="t"/>
           <a:lstStyle/>
           <a:p>
-            <a:pPr algn="ctr" indent="0" marL="0">
+            <a:pPr marL="0" indent="0" algn="ctr">
               <a:buNone/>
             </a:pPr>
             <a:r>
@@ -10845,7 +10597,7 @@
             <a:endParaRPr lang="en-US" sz="1100" dirty="0"/>
           </a:p>
           <a:p>
-            <a:pPr algn="ctr" indent="0" marL="0">
+            <a:pPr marL="0" indent="0" algn="ctr">
               <a:buNone/>
             </a:pPr>
             <a:r>
@@ -10884,7 +10636,7 @@
           <a:bodyPr wrap="square" rtlCol="0" anchor="ctr"/>
           <a:lstStyle/>
           <a:p>
-            <a:pPr algn="ctr" indent="0" marL="0">
+            <a:pPr marL="0" indent="0" algn="ctr">
               <a:buNone/>
             </a:pPr>
             <a:r>
@@ -10923,7 +10675,7 @@
           <a:bodyPr wrap="square" rtlCol="0" anchor="t"/>
           <a:lstStyle/>
           <a:p>
-            <a:pPr algn="ctr" indent="0" marL="0">
+            <a:pPr marL="0" indent="0" algn="ctr">
               <a:buNone/>
             </a:pPr>
             <a:r>
@@ -10940,7 +10692,7 @@
             <a:endParaRPr lang="en-US" sz="1100" dirty="0"/>
           </a:p>
           <a:p>
-            <a:pPr algn="ctr" indent="0" marL="0">
+            <a:pPr marL="0" indent="0" algn="ctr">
               <a:buNone/>
             </a:pPr>
             <a:r>
@@ -10979,7 +10731,7 @@
           <a:bodyPr wrap="square" rtlCol="0" anchor="ctr"/>
           <a:lstStyle/>
           <a:p>
-            <a:pPr algn="ctr" indent="0" marL="0">
+            <a:pPr marL="0" indent="0" algn="ctr">
               <a:buNone/>
             </a:pPr>
             <a:r>
@@ -11018,7 +10770,7 @@
           <a:bodyPr wrap="square" rtlCol="0" anchor="t"/>
           <a:lstStyle/>
           <a:p>
-            <a:pPr algn="ctr" indent="0" marL="0">
+            <a:pPr marL="0" indent="0" algn="ctr">
               <a:buNone/>
             </a:pPr>
             <a:r>
@@ -11035,7 +10787,7 @@
             <a:endParaRPr lang="en-US" sz="1100" dirty="0"/>
           </a:p>
           <a:p>
-            <a:pPr algn="ctr" indent="0" marL="0">
+            <a:pPr marL="0" indent="0" algn="ctr">
               <a:buNone/>
             </a:pPr>
             <a:r>
@@ -11069,6 +10821,7 @@
         <a:solidFill>
           <a:srgbClr val="FFFFFF"/>
         </a:solidFill>
+        <a:effectLst/>
       </p:bgPr>
     </p:bg>
     <p:spTree>
@@ -11106,7 +10859,7 @@
           <a:bodyPr wrap="square" rtlCol="0" anchor="ctr"/>
           <a:lstStyle/>
           <a:p>
-            <a:pPr algn="l" indent="0" marL="0">
+            <a:pPr marL="0" indent="0" algn="l">
               <a:buNone/>
             </a:pPr>
             <a:r>
@@ -11145,7 +10898,7 @@
           <a:bodyPr wrap="square" rtlCol="0" anchor="ctr"/>
           <a:lstStyle/>
           <a:p>
-            <a:pPr algn="r" indent="0" marL="0">
+            <a:pPr marL="0" indent="0" algn="r">
               <a:buNone/>
             </a:pPr>
             <a:r>
@@ -11209,7 +10962,7 @@
           <a:bodyPr wrap="square" lIns="0" tIns="0" rIns="0" bIns="0" rtlCol="0" anchor="ctr"/>
           <a:lstStyle/>
           <a:p>
-            <a:pPr algn="l" indent="0" marL="0">
+            <a:pPr marL="0" indent="0" algn="l">
               <a:buNone/>
             </a:pPr>
             <a:r>
@@ -11271,7 +11024,7 @@
           <a:bodyPr wrap="square" rtlCol="0" anchor="ctr"/>
           <a:lstStyle/>
           <a:p>
-            <a:pPr indent="0" marL="0">
+            <a:pPr marL="0" indent="0">
               <a:buNone/>
             </a:pPr>
             <a:r>
@@ -11335,7 +11088,7 @@
           <a:bodyPr wrap="square" rtlCol="0" anchor="ctr"/>
           <a:lstStyle/>
           <a:p>
-            <a:pPr algn="ctr" indent="0" marL="0">
+            <a:pPr marL="0" indent="0" algn="ctr">
               <a:buNone/>
             </a:pPr>
             <a:r>
@@ -11352,7 +11105,7 @@
             <a:endParaRPr lang="en-US" sz="1200" dirty="0"/>
           </a:p>
           <a:p>
-            <a:pPr algn="ctr" indent="0" marL="0">
+            <a:pPr marL="0" indent="0" algn="ctr">
               <a:buNone/>
             </a:pPr>
             <a:r>
@@ -11439,7 +11192,7 @@
           <a:bodyPr wrap="square" rtlCol="0" anchor="ctr"/>
           <a:lstStyle/>
           <a:p>
-            <a:pPr algn="ctr" indent="0" marL="0">
+            <a:pPr marL="0" indent="0" algn="ctr">
               <a:buNone/>
             </a:pPr>
             <a:r>
@@ -11456,7 +11209,7 @@
             <a:endParaRPr lang="en-US" sz="1200" dirty="0"/>
           </a:p>
           <a:p>
-            <a:pPr algn="ctr" indent="0" marL="0">
+            <a:pPr marL="0" indent="0" algn="ctr">
               <a:buNone/>
             </a:pPr>
             <a:r>
@@ -11543,7 +11296,7 @@
           <a:bodyPr wrap="square" rtlCol="0" anchor="ctr"/>
           <a:lstStyle/>
           <a:p>
-            <a:pPr algn="ctr" indent="0" marL="0">
+            <a:pPr marL="0" indent="0" algn="ctr">
               <a:buNone/>
             </a:pPr>
             <a:r>
@@ -11560,7 +11313,7 @@
             <a:endParaRPr lang="en-US" sz="1200" dirty="0"/>
           </a:p>
           <a:p>
-            <a:pPr algn="ctr" indent="0" marL="0">
+            <a:pPr marL="0" indent="0" algn="ctr">
               <a:buNone/>
             </a:pPr>
             <a:r>
@@ -11647,7 +11400,7 @@
           <a:bodyPr wrap="square" rtlCol="0" anchor="ctr"/>
           <a:lstStyle/>
           <a:p>
-            <a:pPr algn="ctr" indent="0" marL="0">
+            <a:pPr marL="0" indent="0" algn="ctr">
               <a:buNone/>
             </a:pPr>
             <a:r>
@@ -11664,7 +11417,7 @@
             <a:endParaRPr lang="en-US" sz="1200" dirty="0"/>
           </a:p>
           <a:p>
-            <a:pPr algn="ctr" indent="0" marL="0">
+            <a:pPr marL="0" indent="0" algn="ctr">
               <a:buNone/>
             </a:pPr>
             <a:r>
@@ -11751,7 +11504,7 @@
           <a:bodyPr wrap="square" rtlCol="0" anchor="ctr"/>
           <a:lstStyle/>
           <a:p>
-            <a:pPr algn="ctr" indent="0" marL="0">
+            <a:pPr marL="0" indent="0" algn="ctr">
               <a:buNone/>
             </a:pPr>
             <a:r>
@@ -11813,7 +11566,7 @@
           <a:bodyPr wrap="square" rtlCol="0" anchor="ctr"/>
           <a:lstStyle/>
           <a:p>
-            <a:pPr algn="ctr" indent="0" marL="0">
+            <a:pPr marL="0" indent="0" algn="ctr">
               <a:buNone/>
             </a:pPr>
             <a:r>
@@ -11877,7 +11630,7 @@
           <a:bodyPr wrap="square" rtlCol="0" anchor="ctr"/>
           <a:lstStyle/>
           <a:p>
-            <a:pPr indent="0" marL="0">
+            <a:pPr marL="0" indent="0">
               <a:buNone/>
             </a:pPr>
             <a:r>
@@ -12005,7 +11758,7 @@
           <a:bodyPr wrap="square" rtlCol="0" anchor="ctr"/>
           <a:lstStyle/>
           <a:p>
-            <a:pPr indent="0" marL="0">
+            <a:pPr marL="0" indent="0">
               <a:buNone/>
             </a:pPr>
             <a:r>
@@ -12103,6 +11856,7 @@
         <a:solidFill>
           <a:srgbClr val="FFFFFF"/>
         </a:solidFill>
+        <a:effectLst/>
       </p:bgPr>
     </p:bg>
     <p:spTree>
@@ -12140,7 +11894,7 @@
           <a:bodyPr wrap="square" rtlCol="0" anchor="ctr"/>
           <a:lstStyle/>
           <a:p>
-            <a:pPr algn="l" indent="0" marL="0">
+            <a:pPr marL="0" indent="0" algn="l">
               <a:buNone/>
             </a:pPr>
             <a:r>
@@ -12179,7 +11933,7 @@
           <a:bodyPr wrap="square" rtlCol="0" anchor="ctr"/>
           <a:lstStyle/>
           <a:p>
-            <a:pPr algn="r" indent="0" marL="0">
+            <a:pPr marL="0" indent="0" algn="r">
               <a:buNone/>
             </a:pPr>
             <a:r>
@@ -12243,7 +11997,7 @@
           <a:bodyPr wrap="square" lIns="0" tIns="0" rIns="0" bIns="0" rtlCol="0" anchor="ctr"/>
           <a:lstStyle/>
           <a:p>
-            <a:pPr algn="l" indent="0" marL="0">
+            <a:pPr marL="0" indent="0" algn="l">
               <a:buNone/>
             </a:pPr>
             <a:r>
@@ -12392,15 +12146,15 @@
       </p:sp>
       <p:pic>
         <p:nvPicPr>
-          <p:cNvPr id="8" name="Image 0" descr="/home/claude/assets/exploration_env1_20x20.png">    </p:cNvPr>
+          <p:cNvPr id="8" name="Image 0" descr="/home/claude/assets/exploration_env1_20x20.png"/>
           <p:cNvPicPr>
             <a:picLocks noChangeAspect="1"/>
           </p:cNvPicPr>
           <p:nvPr/>
         </p:nvPicPr>
         <p:blipFill>
-          <a:blip r:embed="rId1"/>
-          <a:srcRect l="0" r="0" t="0" b="0"/>
+          <a:blip r:embed="rId3"/>
+          <a:srcRect/>
           <a:stretch/>
         </p:blipFill>
         <p:spPr>
@@ -12434,7 +12188,7 @@
           <a:bodyPr wrap="square" rtlCol="0" anchor="ctr"/>
           <a:lstStyle/>
           <a:p>
-            <a:pPr algn="ctr" indent="0" marL="0">
+            <a:pPr marL="0" indent="0" algn="ctr">
               <a:buNone/>
             </a:pPr>
             <a:r>
@@ -12468,6 +12222,7 @@
         <a:solidFill>
           <a:srgbClr val="FFFFFF"/>
         </a:solidFill>
+        <a:effectLst/>
       </p:bgPr>
     </p:bg>
     <p:spTree>
@@ -12505,7 +12260,7 @@
           <a:bodyPr wrap="square" rtlCol="0" anchor="ctr"/>
           <a:lstStyle/>
           <a:p>
-            <a:pPr algn="l" indent="0" marL="0">
+            <a:pPr marL="0" indent="0" algn="l">
               <a:buNone/>
             </a:pPr>
             <a:r>
@@ -12544,7 +12299,7 @@
           <a:bodyPr wrap="square" rtlCol="0" anchor="ctr"/>
           <a:lstStyle/>
           <a:p>
-            <a:pPr algn="r" indent="0" marL="0">
+            <a:pPr marL="0" indent="0" algn="r">
               <a:buNone/>
             </a:pPr>
             <a:r>
@@ -12608,7 +12363,7 @@
           <a:bodyPr wrap="square" lIns="0" tIns="0" rIns="0" bIns="0" rtlCol="0" anchor="ctr"/>
           <a:lstStyle/>
           <a:p>
-            <a:pPr algn="l" indent="0" marL="0">
+            <a:pPr marL="0" indent="0" algn="l">
               <a:buNone/>
             </a:pPr>
             <a:r>
@@ -12720,7 +12475,7 @@
           <a:bodyPr wrap="square" rtlCol="0" anchor="ctr"/>
           <a:lstStyle/>
           <a:p>
-            <a:pPr indent="0" marL="0">
+            <a:pPr marL="0" indent="0">
               <a:buNone/>
             </a:pPr>
             <a:r>
@@ -12915,7 +12670,7 @@
           <a:bodyPr wrap="square" rtlCol="0" anchor="ctr"/>
           <a:lstStyle/>
           <a:p>
-            <a:pPr indent="0" marL="0">
+            <a:pPr marL="0" indent="0">
               <a:buNone/>
             </a:pPr>
             <a:r>
@@ -13340,4 +13095,321 @@
     </a:ext>
   </a:extLst>
 </a:theme>
+</file>
+
+<file path=ppt/theme/theme2.xml><?xml version="1.0" encoding="utf-8"?>
+<a:theme xmlns:a="http://schemas.openxmlformats.org/drawingml/2006/main" name="Tema di Office">
+  <a:themeElements>
+    <a:clrScheme name="Office">
+      <a:dk1>
+        <a:sysClr val="windowText" lastClr="000000"/>
+      </a:dk1>
+      <a:lt1>
+        <a:sysClr val="window" lastClr="FFFFFF"/>
+      </a:lt1>
+      <a:dk2>
+        <a:srgbClr val="44546A"/>
+      </a:dk2>
+      <a:lt2>
+        <a:srgbClr val="E7E6E6"/>
+      </a:lt2>
+      <a:accent1>
+        <a:srgbClr val="4472C4"/>
+      </a:accent1>
+      <a:accent2>
+        <a:srgbClr val="ED7D31"/>
+      </a:accent2>
+      <a:accent3>
+        <a:srgbClr val="A5A5A5"/>
+      </a:accent3>
+      <a:accent4>
+        <a:srgbClr val="FFC000"/>
+      </a:accent4>
+      <a:accent5>
+        <a:srgbClr val="5B9BD5"/>
+      </a:accent5>
+      <a:accent6>
+        <a:srgbClr val="70AD47"/>
+      </a:accent6>
+      <a:hlink>
+        <a:srgbClr val="0563C1"/>
+      </a:hlink>
+      <a:folHlink>
+        <a:srgbClr val="954F72"/>
+      </a:folHlink>
+    </a:clrScheme>
+    <a:fontScheme name="Office">
+      <a:majorFont>
+        <a:latin typeface="Calibri Light" panose="020F0302020204030204"/>
+        <a:ea typeface=""/>
+        <a:cs typeface=""/>
+        <a:font script="Jpan" typeface="游ゴシック Light"/>
+        <a:font script="Hang" typeface="맑은 고딕"/>
+        <a:font script="Hans" typeface="等线 Light"/>
+        <a:font script="Hant" typeface="新細明體"/>
+        <a:font script="Arab" typeface="Times New Roman"/>
+        <a:font script="Hebr" typeface="Times New Roman"/>
+        <a:font script="Thai" typeface="Angsana New"/>
+        <a:font script="Ethi" typeface="Nyala"/>
+        <a:font script="Beng" typeface="Vrinda"/>
+        <a:font script="Gujr" typeface="Shruti"/>
+        <a:font script="Khmr" typeface="MoolBoran"/>
+        <a:font script="Knda" typeface="Tunga"/>
+        <a:font script="Guru" typeface="Raavi"/>
+        <a:font script="Cans" typeface="Euphemia"/>
+        <a:font script="Cher" typeface="Plantagenet Cherokee"/>
+        <a:font script="Yiii" typeface="Microsoft Yi Baiti"/>
+        <a:font script="Tibt" typeface="Microsoft Himalaya"/>
+        <a:font script="Thaa" typeface="MV Boli"/>
+        <a:font script="Deva" typeface="Mangal"/>
+        <a:font script="Telu" typeface="Gautami"/>
+        <a:font script="Taml" typeface="Latha"/>
+        <a:font script="Syrc" typeface="Estrangelo Edessa"/>
+        <a:font script="Orya" typeface="Kalinga"/>
+        <a:font script="Mlym" typeface="Kartika"/>
+        <a:font script="Laoo" typeface="DokChampa"/>
+        <a:font script="Sinh" typeface="Iskoola Pota"/>
+        <a:font script="Mong" typeface="Mongolian Baiti"/>
+        <a:font script="Viet" typeface="Times New Roman"/>
+        <a:font script="Uigh" typeface="Microsoft Uighur"/>
+        <a:font script="Geor" typeface="Sylfaen"/>
+        <a:font script="Armn" typeface="Arial"/>
+        <a:font script="Bugi" typeface="Leelawadee UI"/>
+        <a:font script="Bopo" typeface="Microsoft JhengHei"/>
+        <a:font script="Java" typeface="Javanese Text"/>
+        <a:font script="Lisu" typeface="Segoe UI"/>
+        <a:font script="Mymr" typeface="Myanmar Text"/>
+        <a:font script="Nkoo" typeface="Ebrima"/>
+        <a:font script="Olck" typeface="Nirmala UI"/>
+        <a:font script="Osma" typeface="Ebrima"/>
+        <a:font script="Phag" typeface="Phagspa"/>
+        <a:font script="Syrn" typeface="Estrangelo Edessa"/>
+        <a:font script="Syrj" typeface="Estrangelo Edessa"/>
+        <a:font script="Syre" typeface="Estrangelo Edessa"/>
+        <a:font script="Sora" typeface="Nirmala UI"/>
+        <a:font script="Tale" typeface="Microsoft Tai Le"/>
+        <a:font script="Talu" typeface="Microsoft New Tai Lue"/>
+        <a:font script="Tfng" typeface="Ebrima"/>
+      </a:majorFont>
+      <a:minorFont>
+        <a:latin typeface="Calibri" panose="020F0502020204030204"/>
+        <a:ea typeface=""/>
+        <a:cs typeface=""/>
+        <a:font script="Jpan" typeface="游ゴシック"/>
+        <a:font script="Hang" typeface="맑은 고딕"/>
+        <a:font script="Hans" typeface="等线"/>
+        <a:font script="Hant" typeface="新細明體"/>
+        <a:font script="Arab" typeface="Arial"/>
+        <a:font script="Hebr" typeface="Arial"/>
+        <a:font script="Thai" typeface="Cordia New"/>
+        <a:font script="Ethi" typeface="Nyala"/>
+        <a:font script="Beng" typeface="Vrinda"/>
+        <a:font script="Gujr" typeface="Shruti"/>
+        <a:font script="Khmr" typeface="DaunPenh"/>
+        <a:font script="Knda" typeface="Tunga"/>
+        <a:font script="Guru" typeface="Raavi"/>
+        <a:font script="Cans" typeface="Euphemia"/>
+        <a:font script="Cher" typeface="Plantagenet Cherokee"/>
+        <a:font script="Yiii" typeface="Microsoft Yi Baiti"/>
+        <a:font script="Tibt" typeface="Microsoft Himalaya"/>
+        <a:font script="Thaa" typeface="MV Boli"/>
+        <a:font script="Deva" typeface="Mangal"/>
+        <a:font script="Telu" typeface="Gautami"/>
+        <a:font script="Taml" typeface="Latha"/>
+        <a:font script="Syrc" typeface="Estrangelo Edessa"/>
+        <a:font script="Orya" typeface="Kalinga"/>
+        <a:font script="Mlym" typeface="Kartika"/>
+        <a:font script="Laoo" typeface="DokChampa"/>
+        <a:font script="Sinh" typeface="Iskoola Pota"/>
+        <a:font script="Mong" typeface="Mongolian Baiti"/>
+        <a:font script="Viet" typeface="Arial"/>
+        <a:font script="Uigh" typeface="Microsoft Uighur"/>
+        <a:font script="Geor" typeface="Sylfaen"/>
+        <a:font script="Armn" typeface="Arial"/>
+        <a:font script="Bugi" typeface="Leelawadee UI"/>
+        <a:font script="Bopo" typeface="Microsoft JhengHei"/>
+        <a:font script="Java" typeface="Javanese Text"/>
+        <a:font script="Lisu" typeface="Segoe UI"/>
+        <a:font script="Mymr" typeface="Myanmar Text"/>
+        <a:font script="Nkoo" typeface="Ebrima"/>
+        <a:font script="Olck" typeface="Nirmala UI"/>
+        <a:font script="Osma" typeface="Ebrima"/>
+        <a:font script="Phag" typeface="Phagspa"/>
+        <a:font script="Syrn" typeface="Estrangelo Edessa"/>
+        <a:font script="Syrj" typeface="Estrangelo Edessa"/>
+        <a:font script="Syre" typeface="Estrangelo Edessa"/>
+        <a:font script="Sora" typeface="Nirmala UI"/>
+        <a:font script="Tale" typeface="Microsoft Tai Le"/>
+        <a:font script="Talu" typeface="Microsoft New Tai Lue"/>
+        <a:font script="Tfng" typeface="Ebrima"/>
+      </a:minorFont>
+    </a:fontScheme>
+    <a:fmtScheme name="Office">
+      <a:fillStyleLst>
+        <a:solidFill>
+          <a:schemeClr val="phClr"/>
+        </a:solidFill>
+        <a:gradFill rotWithShape="1">
+          <a:gsLst>
+            <a:gs pos="0">
+              <a:schemeClr val="phClr">
+                <a:lumMod val="110000"/>
+                <a:satMod val="105000"/>
+                <a:tint val="67000"/>
+              </a:schemeClr>
+            </a:gs>
+            <a:gs pos="50000">
+              <a:schemeClr val="phClr">
+                <a:lumMod val="105000"/>
+                <a:satMod val="103000"/>
+                <a:tint val="73000"/>
+              </a:schemeClr>
+            </a:gs>
+            <a:gs pos="100000">
+              <a:schemeClr val="phClr">
+                <a:lumMod val="105000"/>
+                <a:satMod val="109000"/>
+                <a:tint val="81000"/>
+              </a:schemeClr>
+            </a:gs>
+          </a:gsLst>
+          <a:lin ang="5400000" scaled="0"/>
+        </a:gradFill>
+        <a:gradFill rotWithShape="1">
+          <a:gsLst>
+            <a:gs pos="0">
+              <a:schemeClr val="phClr">
+                <a:satMod val="103000"/>
+                <a:lumMod val="102000"/>
+                <a:tint val="94000"/>
+              </a:schemeClr>
+            </a:gs>
+            <a:gs pos="50000">
+              <a:schemeClr val="phClr">
+                <a:satMod val="110000"/>
+                <a:lumMod val="100000"/>
+                <a:shade val="100000"/>
+              </a:schemeClr>
+            </a:gs>
+            <a:gs pos="100000">
+              <a:schemeClr val="phClr">
+                <a:lumMod val="99000"/>
+                <a:satMod val="120000"/>
+                <a:shade val="78000"/>
+              </a:schemeClr>
+            </a:gs>
+          </a:gsLst>
+          <a:lin ang="5400000" scaled="0"/>
+        </a:gradFill>
+      </a:fillStyleLst>
+      <a:lnStyleLst>
+        <a:ln w="6350" cap="flat" cmpd="sng" algn="ctr">
+          <a:solidFill>
+            <a:schemeClr val="phClr"/>
+          </a:solidFill>
+          <a:prstDash val="solid"/>
+          <a:miter lim="800000"/>
+        </a:ln>
+        <a:ln w="12700" cap="flat" cmpd="sng" algn="ctr">
+          <a:solidFill>
+            <a:schemeClr val="phClr"/>
+          </a:solidFill>
+          <a:prstDash val="solid"/>
+          <a:miter lim="800000"/>
+        </a:ln>
+        <a:ln w="19050" cap="flat" cmpd="sng" algn="ctr">
+          <a:solidFill>
+            <a:schemeClr val="phClr"/>
+          </a:solidFill>
+          <a:prstDash val="solid"/>
+          <a:miter lim="800000"/>
+        </a:ln>
+      </a:lnStyleLst>
+      <a:effectStyleLst>
+        <a:effectStyle>
+          <a:effectLst/>
+        </a:effectStyle>
+        <a:effectStyle>
+          <a:effectLst/>
+        </a:effectStyle>
+        <a:effectStyle>
+          <a:effectLst>
+            <a:outerShdw blurRad="57150" dist="19050" dir="5400000" algn="ctr" rotWithShape="0">
+              <a:srgbClr val="000000">
+                <a:alpha val="63000"/>
+              </a:srgbClr>
+            </a:outerShdw>
+          </a:effectLst>
+        </a:effectStyle>
+      </a:effectStyleLst>
+      <a:bgFillStyleLst>
+        <a:solidFill>
+          <a:schemeClr val="phClr"/>
+        </a:solidFill>
+        <a:solidFill>
+          <a:schemeClr val="phClr">
+            <a:tint val="95000"/>
+            <a:satMod val="170000"/>
+          </a:schemeClr>
+        </a:solidFill>
+        <a:gradFill rotWithShape="1">
+          <a:gsLst>
+            <a:gs pos="0">
+              <a:schemeClr val="phClr">
+                <a:tint val="93000"/>
+                <a:satMod val="150000"/>
+                <a:shade val="98000"/>
+                <a:lumMod val="102000"/>
+              </a:schemeClr>
+            </a:gs>
+            <a:gs pos="50000">
+              <a:schemeClr val="phClr">
+                <a:tint val="98000"/>
+                <a:satMod val="130000"/>
+                <a:shade val="90000"/>
+                <a:lumMod val="103000"/>
+              </a:schemeClr>
+            </a:gs>
+            <a:gs pos="100000">
+              <a:schemeClr val="phClr">
+                <a:shade val="63000"/>
+                <a:satMod val="120000"/>
+              </a:schemeClr>
+            </a:gs>
+          </a:gsLst>
+          <a:lin ang="5400000" scaled="0"/>
+        </a:gradFill>
+      </a:bgFillStyleLst>
+    </a:fmtScheme>
+  </a:themeElements>
+  <a:objectDefaults/>
+  <a:extraClrSchemeLst/>
+  <a:extLst>
+    <a:ext uri="{05A4C25C-085E-4340-85A3-A5531E510DB2}">
+      <thm15:themeFamily xmlns:thm15="http://schemas.microsoft.com/office/thememl/2012/main" name="Office Theme" id="{62F939B6-93AF-4DB8-9C6B-D6C7DFDC589F}" vid="{4A3C46E8-61CC-4603-A589-7422A47A8E4A}"/>
+    </a:ext>
+  </a:extLst>
+</a:theme>
+</file>
+
+<file path=ppt/webextensions/taskpanes.xml><?xml version="1.0" encoding="utf-8"?>
+<wetp:taskpanes xmlns:wetp="http://schemas.microsoft.com/office/webextensions/taskpanes/2010/11">
+  <wetp:taskpane dockstate="right" visibility="0" width="438" row="0">
+    <wetp:webextensionref xmlns:r="http://schemas.openxmlformats.org/officeDocument/2006/relationships" r:id="rId1"/>
+  </wetp:taskpane>
+</wetp:taskpanes>
+</file>
+
+<file path=ppt/webextensions/webextension1.xml><?xml version="1.0" encoding="utf-8"?>
+<we:webextension xmlns:we="http://schemas.microsoft.com/office/webextensions/webextension/2010/11" id="{3F41429A-0E20-4A37-B7F9-5B30E28FAAB5}">
+  <we:reference id="wa200010001" version="1.0.0.1" store="it-IT" storeType="OMEX"/>
+  <we:alternateReferences>
+    <we:reference id="WA200010001" version="1.0.0.1" store="WA200010001" storeType="OMEX"/>
+  </we:alternateReferences>
+  <we:properties>
+    <we:property name="claude.fileId" value="&quot;a0536ab6-2f2e-4d83-9a69-81edefdca971&quot;"/>
+  </we:properties>
+  <we:bindings/>
+  <we:snapshot xmlns:r="http://schemas.openxmlformats.org/officeDocument/2006/relationships"/>
+</we:webextension>
 </file>
--- a/presentation_draft.pptx
+++ b/presentation_draft.pptx
@@ -5,7 +5,7 @@
     <p:sldMasterId id="2147483648" r:id="rId1"/>
   </p:sldMasterIdLst>
   <p:notesMasterIdLst>
-    <p:notesMasterId r:id="rId19"/>
+    <p:notesMasterId r:id="rId20"/>
   </p:notesMasterIdLst>
   <p:sldIdLst>
     <p:sldId id="256" r:id="rId2"/>
@@ -25,6 +25,7 @@
     <p:sldId id="270" r:id="rId16"/>
     <p:sldId id="271" r:id="rId17"/>
     <p:sldId id="272" r:id="rId18"/>
+    <p:sldId id="273" r:id="rId19"/>
   </p:sldIdLst>
   <p:sldSz cx="9144000" cy="5143500" type="screen16x9"/>
   <p:notesSz cx="5143500" cy="9144000"/>
@@ -1000,6 +1001,114 @@
     <p:extLst>
       <p:ext uri="{BB962C8B-B14F-4D97-AF65-F5344CB8AC3E}">
         <p14:creationId xmlns:p14="http://schemas.microsoft.com/office/powerpoint/2010/main" val="1024086991"/>
+      </p:ext>
+    </p:extLst>
+  </p:cSld>
+  <p:clrMapOvr>
+    <a:masterClrMapping/>
+  </p:clrMapOvr>
+</p:notes>
+</file>
+
+<file path=ppt/notesSlides/notesSlide18.xml><?xml version="1.0" encoding="utf-8"?>
+<p:notes xmlns:a="http://schemas.openxmlformats.org/drawingml/2006/main" xmlns:r="http://schemas.openxmlformats.org/officeDocument/2006/relationships" xmlns:p="http://schemas.openxmlformats.org/presentationml/2006/main">
+  <p:cSld>
+    <p:spTree>
+      <p:nvGrpSpPr>
+        <p:cNvPr id="1" name="">
+          <a:extLst>
+            <a:ext uri="{FF2B5EF4-FFF2-40B4-BE49-F238E27FC236}">
+              <a16:creationId xmlns:a16="http://schemas.microsoft.com/office/drawing/2014/main" id="{26A44A4C-F480-9F77-23EC-D3A15925690E}"/>
+            </a:ext>
+          </a:extLst>
+        </p:cNvPr>
+        <p:cNvGrpSpPr/>
+        <p:nvPr/>
+      </p:nvGrpSpPr>
+      <p:grpSpPr>
+        <a:xfrm>
+          <a:off x="0" y="0"/>
+          <a:ext cx="0" cy="0"/>
+          <a:chOff x="0" y="0"/>
+          <a:chExt cx="0" cy="0"/>
+        </a:xfrm>
+      </p:grpSpPr>
+      <p:sp>
+        <p:nvSpPr>
+          <p:cNvPr id="2" name="Slide Image Placeholder 1">
+            <a:extLst>
+              <a:ext uri="{FF2B5EF4-FFF2-40B4-BE49-F238E27FC236}">
+                <a16:creationId xmlns:a16="http://schemas.microsoft.com/office/drawing/2014/main" id="{7A379671-CC85-6E11-F041-81C696F9C050}"/>
+              </a:ext>
+            </a:extLst>
+          </p:cNvPr>
+          <p:cNvSpPr>
+            <a:spLocks noGrp="1" noRot="1" noChangeAspect="1"/>
+          </p:cNvSpPr>
+          <p:nvPr>
+            <p:ph type="sldImg"/>
+          </p:nvPr>
+        </p:nvSpPr>
+        <p:spPr/>
+      </p:sp>
+      <p:sp>
+        <p:nvSpPr>
+          <p:cNvPr id="3" name="Notes Placeholder 2">
+            <a:extLst>
+              <a:ext uri="{FF2B5EF4-FFF2-40B4-BE49-F238E27FC236}">
+                <a16:creationId xmlns:a16="http://schemas.microsoft.com/office/drawing/2014/main" id="{05FE5C13-A3B5-20DC-F429-54DA5CF69464}"/>
+              </a:ext>
+            </a:extLst>
+          </p:cNvPr>
+          <p:cNvSpPr>
+            <a:spLocks noGrp="1"/>
+          </p:cNvSpPr>
+          <p:nvPr>
+            <p:ph type="body" idx="1"/>
+          </p:nvPr>
+        </p:nvSpPr>
+        <p:spPr/>
+        <p:txBody>
+          <a:bodyPr/>
+          <a:lstStyle/>
+          <a:p>
+            <a:endParaRPr lang="en-US" dirty="0"/>
+          </a:p>
+        </p:txBody>
+      </p:sp>
+      <p:sp>
+        <p:nvSpPr>
+          <p:cNvPr id="4" name="Slide Number Placeholder 3">
+            <a:extLst>
+              <a:ext uri="{FF2B5EF4-FFF2-40B4-BE49-F238E27FC236}">
+                <a16:creationId xmlns:a16="http://schemas.microsoft.com/office/drawing/2014/main" id="{78E88C91-73E1-1C0D-90E5-A9AEB073DE06}"/>
+              </a:ext>
+            </a:extLst>
+          </p:cNvPr>
+          <p:cNvSpPr>
+            <a:spLocks noGrp="1"/>
+          </p:cNvSpPr>
+          <p:nvPr>
+            <p:ph type="sldNum" sz="quarter" idx="10"/>
+          </p:nvPr>
+        </p:nvSpPr>
+        <p:spPr/>
+        <p:txBody>
+          <a:bodyPr/>
+          <a:lstStyle/>
+          <a:p>
+            <a:fld id="{F7021451-1387-4CA6-816F-3879F97B5CBC}" type="slidenum">
+              <a:rPr lang="en-US"/>
+              <a:t>18</a:t>
+            </a:fld>
+            <a:endParaRPr lang="en-US"/>
+          </a:p>
+        </p:txBody>
+      </p:sp>
+    </p:spTree>
+    <p:extLst>
+      <p:ext uri="{BB962C8B-B14F-4D97-AF65-F5344CB8AC3E}">
+        <p14:creationId xmlns:p14="http://schemas.microsoft.com/office/powerpoint/2010/main" val="3264828871"/>
       </p:ext>
     </p:extLst>
   </p:cSld>
@@ -5097,7 +5206,7 @@
         </p:nvGraphicFramePr>
         <p:xfrm>
           <a:off x="320040" y="1298448"/>
-          <a:ext cx="8503920" cy="3200400"/>
+          <a:ext cx="8503920" cy="2560320"/>
         </p:xfrm>
         <a:graphic>
           <a:graphicData uri="http://schemas.openxmlformats.org/drawingml/2006/table">
@@ -7744,6 +7853,570 @@
 </p:sld>
 </file>
 
+<file path=ppt/slides/slide18.xml><?xml version="1.0" encoding="utf-8"?>
+<p:sld xmlns:a="http://schemas.openxmlformats.org/drawingml/2006/main" xmlns:r="http://schemas.openxmlformats.org/officeDocument/2006/relationships" xmlns:p="http://schemas.openxmlformats.org/presentationml/2006/main">
+  <p:cSld>
+    <p:spTree>
+      <p:nvGrpSpPr>
+        <p:cNvPr id="1" name="">
+          <a:extLst>
+            <a:ext uri="{FF2B5EF4-FFF2-40B4-BE49-F238E27FC236}">
+              <a16:creationId xmlns:a16="http://schemas.microsoft.com/office/drawing/2014/main" id="{2205A361-1298-5AD4-0919-BDE18F4DC778}"/>
+            </a:ext>
+          </a:extLst>
+        </p:cNvPr>
+        <p:cNvGrpSpPr/>
+        <p:nvPr/>
+      </p:nvGrpSpPr>
+      <p:grpSpPr>
+        <a:xfrm>
+          <a:off x="0" y="0"/>
+          <a:ext cx="0" cy="0"/>
+          <a:chOff x="0" y="0"/>
+          <a:chExt cx="0" cy="0"/>
+        </a:xfrm>
+      </p:grpSpPr>
+      <p:sp>
+        <p:nvSpPr>
+          <p:cNvPr id="2" name="Text 0">
+            <a:extLst>
+              <a:ext uri="{FF2B5EF4-FFF2-40B4-BE49-F238E27FC236}">
+                <a16:creationId xmlns:a16="http://schemas.microsoft.com/office/drawing/2014/main" id="{59FCDCC7-AF0C-BD5D-F8D3-E980C39B7AA0}"/>
+              </a:ext>
+            </a:extLst>
+          </p:cNvPr>
+          <p:cNvSpPr/>
+          <p:nvPr/>
+        </p:nvSpPr>
+        <p:spPr>
+          <a:xfrm>
+            <a:off x="457200" y="228600"/>
+            <a:ext cx="8229600" cy="548640"/>
+          </a:xfrm>
+          <a:prstGeom prst="rect">
+            <a:avLst/>
+          </a:prstGeom>
+          <a:noFill/>
+          <a:ln/>
+        </p:spPr>
+        <p:txBody>
+          <a:bodyPr wrap="square" rtlCol="0" anchor="ctr"/>
+          <a:lstStyle/>
+          <a:p>
+            <a:pPr marL="0" indent="0" algn="l">
+              <a:buNone/>
+            </a:pPr>
+            <a:r>
+              <a:rPr lang="en-US" sz="3200" b="1" dirty="0">
+                <a:solidFill>
+                  <a:srgbClr val="FFFFFF"/>
+                </a:solidFill>
+                <a:latin typeface="Calibri" pitchFamily="34" charset="0"/>
+                <a:ea typeface="Calibri" pitchFamily="34" charset="-122"/>
+                <a:cs typeface="Calibri" pitchFamily="34" charset="-120"/>
+              </a:rPr>
+              <a:t>Conclusions</a:t>
+            </a:r>
+            <a:endParaRPr lang="en-US" sz="3200" dirty="0"/>
+          </a:p>
+        </p:txBody>
+      </p:sp>
+      <p:sp>
+        <p:nvSpPr>
+          <p:cNvPr id="3" name="Shape 1">
+            <a:extLst>
+              <a:ext uri="{FF2B5EF4-FFF2-40B4-BE49-F238E27FC236}">
+                <a16:creationId xmlns:a16="http://schemas.microsoft.com/office/drawing/2014/main" id="{5DD1A691-E8BE-2D6F-6ECC-57F22A8E669F}"/>
+              </a:ext>
+            </a:extLst>
+          </p:cNvPr>
+          <p:cNvSpPr/>
+          <p:nvPr/>
+        </p:nvSpPr>
+        <p:spPr>
+          <a:xfrm>
+            <a:off x="457200" y="841248"/>
+            <a:ext cx="8229600" cy="0"/>
+          </a:xfrm>
+          <a:prstGeom prst="line">
+            <a:avLst/>
+          </a:prstGeom>
+          <a:noFill/>
+          <a:ln w="25400">
+            <a:solidFill>
+              <a:srgbClr val="C8472C"/>
+            </a:solidFill>
+            <a:prstDash val="solid"/>
+          </a:ln>
+        </p:spPr>
+      </p:sp>
+      <p:sp>
+        <p:nvSpPr>
+          <p:cNvPr id="4" name="Shape 2">
+            <a:extLst>
+              <a:ext uri="{FF2B5EF4-FFF2-40B4-BE49-F238E27FC236}">
+                <a16:creationId xmlns:a16="http://schemas.microsoft.com/office/drawing/2014/main" id="{611A8095-D03A-2161-2712-30513E2BE325}"/>
+              </a:ext>
+            </a:extLst>
+          </p:cNvPr>
+          <p:cNvSpPr/>
+          <p:nvPr/>
+        </p:nvSpPr>
+        <p:spPr>
+          <a:xfrm>
+            <a:off x="411480" y="987552"/>
+            <a:ext cx="256032" cy="256032"/>
+          </a:xfrm>
+          <a:prstGeom prst="ellipse">
+            <a:avLst/>
+          </a:prstGeom>
+          <a:solidFill>
+            <a:srgbClr val="C8472C"/>
+          </a:solidFill>
+          <a:ln w="12700">
+            <a:solidFill>
+              <a:srgbClr val="C8472C"/>
+            </a:solidFill>
+            <a:prstDash val="solid"/>
+          </a:ln>
+        </p:spPr>
+      </p:sp>
+      <p:sp>
+        <p:nvSpPr>
+          <p:cNvPr id="5" name="Text 3">
+            <a:extLst>
+              <a:ext uri="{FF2B5EF4-FFF2-40B4-BE49-F238E27FC236}">
+                <a16:creationId xmlns:a16="http://schemas.microsoft.com/office/drawing/2014/main" id="{C84966EF-96BF-E51B-03FD-8F407B257619}"/>
+              </a:ext>
+            </a:extLst>
+          </p:cNvPr>
+          <p:cNvSpPr/>
+          <p:nvPr/>
+        </p:nvSpPr>
+        <p:spPr>
+          <a:xfrm>
+            <a:off x="804672" y="969264"/>
+            <a:ext cx="8001000" cy="384048"/>
+          </a:xfrm>
+          <a:prstGeom prst="rect">
+            <a:avLst/>
+          </a:prstGeom>
+          <a:noFill/>
+          <a:ln/>
+        </p:spPr>
+        <p:txBody>
+          <a:bodyPr wrap="square" rtlCol="0" anchor="ctr"/>
+          <a:lstStyle/>
+          <a:p>
+            <a:pPr marL="0" indent="0">
+              <a:buNone/>
+            </a:pPr>
+            <a:r>
+              <a:rPr lang="en-US" sz="1300" dirty="0">
+                <a:solidFill>
+                  <a:srgbClr val="FFFFFF"/>
+                </a:solidFill>
+                <a:latin typeface="Calibri" pitchFamily="34" charset="0"/>
+                <a:ea typeface="Calibri" pitchFamily="34" charset="-122"/>
+                <a:cs typeface="Calibri" pitchFamily="34" charset="-120"/>
+              </a:rPr>
+              <a:t>A DQN agent was successfully integrated as the decision-making module in a modular frontier-based exploration pipeline</a:t>
+            </a:r>
+            <a:endParaRPr lang="en-US" sz="1300" dirty="0"/>
+          </a:p>
+        </p:txBody>
+      </p:sp>
+      <p:sp>
+        <p:nvSpPr>
+          <p:cNvPr id="6" name="Shape 4">
+            <a:extLst>
+              <a:ext uri="{FF2B5EF4-FFF2-40B4-BE49-F238E27FC236}">
+                <a16:creationId xmlns:a16="http://schemas.microsoft.com/office/drawing/2014/main" id="{EF265EC9-0851-3E7B-0747-6F05F87154C7}"/>
+              </a:ext>
+            </a:extLst>
+          </p:cNvPr>
+          <p:cNvSpPr/>
+          <p:nvPr/>
+        </p:nvSpPr>
+        <p:spPr>
+          <a:xfrm>
+            <a:off x="411480" y="1746504"/>
+            <a:ext cx="256032" cy="256032"/>
+          </a:xfrm>
+          <a:prstGeom prst="ellipse">
+            <a:avLst/>
+          </a:prstGeom>
+          <a:solidFill>
+            <a:srgbClr val="C8472C"/>
+          </a:solidFill>
+          <a:ln w="12700">
+            <a:solidFill>
+              <a:srgbClr val="C8472C"/>
+            </a:solidFill>
+            <a:prstDash val="solid"/>
+          </a:ln>
+        </p:spPr>
+      </p:sp>
+      <p:sp>
+        <p:nvSpPr>
+          <p:cNvPr id="7" name="Text 5">
+            <a:extLst>
+              <a:ext uri="{FF2B5EF4-FFF2-40B4-BE49-F238E27FC236}">
+                <a16:creationId xmlns:a16="http://schemas.microsoft.com/office/drawing/2014/main" id="{E0778CC6-CBE4-A49A-77D6-61E79B7928FB}"/>
+              </a:ext>
+            </a:extLst>
+          </p:cNvPr>
+          <p:cNvSpPr/>
+          <p:nvPr/>
+        </p:nvSpPr>
+        <p:spPr>
+          <a:xfrm>
+            <a:off x="804672" y="1728216"/>
+            <a:ext cx="8001000" cy="384048"/>
+          </a:xfrm>
+          <a:prstGeom prst="rect">
+            <a:avLst/>
+          </a:prstGeom>
+          <a:noFill/>
+          <a:ln/>
+        </p:spPr>
+        <p:txBody>
+          <a:bodyPr wrap="square" rtlCol="0" anchor="ctr"/>
+          <a:lstStyle/>
+          <a:p>
+            <a:pPr marL="0" indent="0">
+              <a:buNone/>
+            </a:pPr>
+            <a:r>
+              <a:rPr lang="en-US" sz="1300" dirty="0">
+                <a:solidFill>
+                  <a:srgbClr val="FFFFFF"/>
+                </a:solidFill>
+                <a:latin typeface="Calibri" pitchFamily="34" charset="0"/>
+                <a:ea typeface="Calibri" pitchFamily="34" charset="-122"/>
+                <a:cs typeface="Calibri" pitchFamily="34" charset="-120"/>
+              </a:rPr>
+              <a:t>Reward hacking revealed that observation ordering and penalty magnitude critically shape the learned policy</a:t>
+            </a:r>
+            <a:endParaRPr lang="en-US" sz="1300" dirty="0"/>
+          </a:p>
+        </p:txBody>
+      </p:sp>
+      <p:sp>
+        <p:nvSpPr>
+          <p:cNvPr id="8" name="Shape 6">
+            <a:extLst>
+              <a:ext uri="{FF2B5EF4-FFF2-40B4-BE49-F238E27FC236}">
+                <a16:creationId xmlns:a16="http://schemas.microsoft.com/office/drawing/2014/main" id="{6E0AF75A-8462-A13C-97ED-2AB9A14C5961}"/>
+              </a:ext>
+            </a:extLst>
+          </p:cNvPr>
+          <p:cNvSpPr/>
+          <p:nvPr/>
+        </p:nvSpPr>
+        <p:spPr>
+          <a:xfrm>
+            <a:off x="411480" y="2505456"/>
+            <a:ext cx="256032" cy="256032"/>
+          </a:xfrm>
+          <a:prstGeom prst="ellipse">
+            <a:avLst/>
+          </a:prstGeom>
+          <a:solidFill>
+            <a:srgbClr val="C8472C"/>
+          </a:solidFill>
+          <a:ln w="12700">
+            <a:solidFill>
+              <a:srgbClr val="C8472C"/>
+            </a:solidFill>
+            <a:prstDash val="solid"/>
+          </a:ln>
+        </p:spPr>
+      </p:sp>
+      <p:sp>
+        <p:nvSpPr>
+          <p:cNvPr id="9" name="Text 7">
+            <a:extLst>
+              <a:ext uri="{FF2B5EF4-FFF2-40B4-BE49-F238E27FC236}">
+                <a16:creationId xmlns:a16="http://schemas.microsoft.com/office/drawing/2014/main" id="{C30BB152-9B8F-7B41-1D01-EFA0134D9AF2}"/>
+              </a:ext>
+            </a:extLst>
+          </p:cNvPr>
+          <p:cNvSpPr/>
+          <p:nvPr/>
+        </p:nvSpPr>
+        <p:spPr>
+          <a:xfrm>
+            <a:off x="804672" y="2487168"/>
+            <a:ext cx="8001000" cy="384048"/>
+          </a:xfrm>
+          <a:prstGeom prst="rect">
+            <a:avLst/>
+          </a:prstGeom>
+          <a:noFill/>
+          <a:ln/>
+        </p:spPr>
+        <p:txBody>
+          <a:bodyPr wrap="square" rtlCol="0" anchor="ctr"/>
+          <a:lstStyle/>
+          <a:p>
+            <a:pPr marL="0" indent="0">
+              <a:buNone/>
+            </a:pPr>
+            <a:r>
+              <a:rPr lang="en-US" sz="1300" dirty="0">
+                <a:solidFill>
+                  <a:srgbClr val="FFFFFF"/>
+                </a:solidFill>
+                <a:latin typeface="Calibri" pitchFamily="34" charset="0"/>
+                <a:ea typeface="Calibri" pitchFamily="34" charset="-122"/>
+                <a:cs typeface="Calibri" pitchFamily="34" charset="-120"/>
+              </a:rPr>
+              <a:t>Removing sorted observations and softening the padding penalty yielded the first non-degenerate policy</a:t>
+            </a:r>
+            <a:endParaRPr lang="en-US" sz="1300" dirty="0"/>
+          </a:p>
+        </p:txBody>
+      </p:sp>
+      <p:sp>
+        <p:nvSpPr>
+          <p:cNvPr id="10" name="Shape 8">
+            <a:extLst>
+              <a:ext uri="{FF2B5EF4-FFF2-40B4-BE49-F238E27FC236}">
+                <a16:creationId xmlns:a16="http://schemas.microsoft.com/office/drawing/2014/main" id="{1B83BAFC-B50B-1EC8-B3D7-FADA157AF2C5}"/>
+              </a:ext>
+            </a:extLst>
+          </p:cNvPr>
+          <p:cNvSpPr/>
+          <p:nvPr/>
+        </p:nvSpPr>
+        <p:spPr>
+          <a:xfrm>
+            <a:off x="411480" y="3264408"/>
+            <a:ext cx="256032" cy="256032"/>
+          </a:xfrm>
+          <a:prstGeom prst="ellipse">
+            <a:avLst/>
+          </a:prstGeom>
+          <a:solidFill>
+            <a:srgbClr val="C8472C"/>
+          </a:solidFill>
+          <a:ln w="12700">
+            <a:solidFill>
+              <a:srgbClr val="C8472C"/>
+            </a:solidFill>
+            <a:prstDash val="solid"/>
+          </a:ln>
+        </p:spPr>
+      </p:sp>
+      <p:sp>
+        <p:nvSpPr>
+          <p:cNvPr id="11" name="Text 9">
+            <a:extLst>
+              <a:ext uri="{FF2B5EF4-FFF2-40B4-BE49-F238E27FC236}">
+                <a16:creationId xmlns:a16="http://schemas.microsoft.com/office/drawing/2014/main" id="{9518284A-0ECA-C870-64BD-BB7BA09EF05E}"/>
+              </a:ext>
+            </a:extLst>
+          </p:cNvPr>
+          <p:cNvSpPr/>
+          <p:nvPr/>
+        </p:nvSpPr>
+        <p:spPr>
+          <a:xfrm>
+            <a:off x="804672" y="3246120"/>
+            <a:ext cx="8001000" cy="384048"/>
+          </a:xfrm>
+          <a:prstGeom prst="rect">
+            <a:avLst/>
+          </a:prstGeom>
+          <a:noFill/>
+          <a:ln/>
+        </p:spPr>
+        <p:txBody>
+          <a:bodyPr wrap="square" rtlCol="0" anchor="ctr"/>
+          <a:lstStyle/>
+          <a:p>
+            <a:pPr marL="0" indent="0">
+              <a:buNone/>
+            </a:pPr>
+            <a:r>
+              <a:rPr lang="en-US" sz="1300" dirty="0">
+                <a:solidFill>
+                  <a:srgbClr val="FFFFFF"/>
+                </a:solidFill>
+                <a:latin typeface="Calibri" pitchFamily="34" charset="0"/>
+                <a:ea typeface="Calibri" pitchFamily="34" charset="-122"/>
+                <a:cs typeface="Calibri" pitchFamily="34" charset="-120"/>
+              </a:rPr>
+              <a:t>Model 2 demonstrates convergent training with stable loss — a proof-of-concept for learned frontier selection</a:t>
+            </a:r>
+            <a:endParaRPr lang="en-US" sz="1300" dirty="0"/>
+          </a:p>
+        </p:txBody>
+      </p:sp>
+      <p:sp>
+        <p:nvSpPr>
+          <p:cNvPr id="12" name="Shape 10">
+            <a:extLst>
+              <a:ext uri="{FF2B5EF4-FFF2-40B4-BE49-F238E27FC236}">
+                <a16:creationId xmlns:a16="http://schemas.microsoft.com/office/drawing/2014/main" id="{08C7006B-D1C0-98E2-135B-767EA1F85D2A}"/>
+              </a:ext>
+            </a:extLst>
+          </p:cNvPr>
+          <p:cNvSpPr/>
+          <p:nvPr/>
+        </p:nvSpPr>
+        <p:spPr>
+          <a:xfrm>
+            <a:off x="411480" y="4023360"/>
+            <a:ext cx="256032" cy="256032"/>
+          </a:xfrm>
+          <a:prstGeom prst="ellipse">
+            <a:avLst/>
+          </a:prstGeom>
+          <a:solidFill>
+            <a:srgbClr val="C8472C"/>
+          </a:solidFill>
+          <a:ln w="12700">
+            <a:solidFill>
+              <a:srgbClr val="C8472C"/>
+            </a:solidFill>
+            <a:prstDash val="solid"/>
+          </a:ln>
+        </p:spPr>
+      </p:sp>
+      <p:sp>
+        <p:nvSpPr>
+          <p:cNvPr id="13" name="Text 11">
+            <a:extLst>
+              <a:ext uri="{FF2B5EF4-FFF2-40B4-BE49-F238E27FC236}">
+                <a16:creationId xmlns:a16="http://schemas.microsoft.com/office/drawing/2014/main" id="{AC8271B1-E1FB-A587-37E3-587D180ED04A}"/>
+              </a:ext>
+            </a:extLst>
+          </p:cNvPr>
+          <p:cNvSpPr/>
+          <p:nvPr/>
+        </p:nvSpPr>
+        <p:spPr>
+          <a:xfrm>
+            <a:off x="804672" y="4005072"/>
+            <a:ext cx="8001000" cy="384048"/>
+          </a:xfrm>
+          <a:prstGeom prst="rect">
+            <a:avLst/>
+          </a:prstGeom>
+          <a:noFill/>
+          <a:ln/>
+        </p:spPr>
+        <p:txBody>
+          <a:bodyPr wrap="square" rtlCol="0" anchor="ctr"/>
+          <a:lstStyle/>
+          <a:p>
+            <a:pPr marL="0" indent="0">
+              <a:buNone/>
+            </a:pPr>
+            <a:r>
+              <a:rPr lang="en-US" sz="1300" dirty="0">
+                <a:solidFill>
+                  <a:srgbClr val="FFFFFF"/>
+                </a:solidFill>
+                <a:latin typeface="Calibri" pitchFamily="34" charset="0"/>
+                <a:ea typeface="Calibri" pitchFamily="34" charset="-122"/>
+                <a:cs typeface="Calibri" pitchFamily="34" charset="-120"/>
+              </a:rPr>
+              <a:t>Future work: transfer to real robots, multi-agent settings, dynamic and 3D environments</a:t>
+            </a:r>
+            <a:endParaRPr lang="en-US" sz="1300" dirty="0"/>
+          </a:p>
+        </p:txBody>
+      </p:sp>
+      <p:sp>
+        <p:nvSpPr>
+          <p:cNvPr id="14" name="Shape 12">
+            <a:extLst>
+              <a:ext uri="{FF2B5EF4-FFF2-40B4-BE49-F238E27FC236}">
+                <a16:creationId xmlns:a16="http://schemas.microsoft.com/office/drawing/2014/main" id="{C7520149-61A3-6D81-04FE-BDC68D26EF5F}"/>
+              </a:ext>
+            </a:extLst>
+          </p:cNvPr>
+          <p:cNvSpPr/>
+          <p:nvPr/>
+        </p:nvSpPr>
+        <p:spPr>
+          <a:xfrm>
+            <a:off x="457200" y="4773168"/>
+            <a:ext cx="8229600" cy="0"/>
+          </a:xfrm>
+          <a:prstGeom prst="line">
+            <a:avLst/>
+          </a:prstGeom>
+          <a:noFill/>
+          <a:ln w="19050">
+            <a:solidFill>
+              <a:srgbClr val="C8472C"/>
+            </a:solidFill>
+            <a:prstDash val="solid"/>
+          </a:ln>
+        </p:spPr>
+      </p:sp>
+      <p:sp>
+        <p:nvSpPr>
+          <p:cNvPr id="15" name="Text 13">
+            <a:extLst>
+              <a:ext uri="{FF2B5EF4-FFF2-40B4-BE49-F238E27FC236}">
+                <a16:creationId xmlns:a16="http://schemas.microsoft.com/office/drawing/2014/main" id="{65A3BAA8-F025-3D40-B9E0-8730A930931A}"/>
+              </a:ext>
+            </a:extLst>
+          </p:cNvPr>
+          <p:cNvSpPr/>
+          <p:nvPr/>
+        </p:nvSpPr>
+        <p:spPr>
+          <a:xfrm>
+            <a:off x="457200" y="4809744"/>
+            <a:ext cx="8229600" cy="256032"/>
+          </a:xfrm>
+          <a:prstGeom prst="rect">
+            <a:avLst/>
+          </a:prstGeom>
+          <a:noFill/>
+          <a:ln/>
+        </p:spPr>
+        <p:txBody>
+          <a:bodyPr wrap="square" rtlCol="0" anchor="ctr"/>
+          <a:lstStyle/>
+          <a:p>
+            <a:pPr marL="0" indent="0" algn="ctr">
+              <a:buNone/>
+            </a:pPr>
+            <a:r>
+              <a:rPr lang="en-US" sz="1000" dirty="0">
+                <a:solidFill>
+                  <a:srgbClr val="9DB8D4"/>
+                </a:solidFill>
+                <a:latin typeface="Calibri" pitchFamily="34" charset="0"/>
+                <a:ea typeface="Calibri" pitchFamily="34" charset="-122"/>
+                <a:cs typeface="Calibri" pitchFamily="34" charset="-120"/>
+              </a:rPr>
+              <a:t>Paolo Spallanzani  ·  Università degli Studi di Modena e Reggio Emilia  ·  A.A. 2024/2025</a:t>
+            </a:r>
+            <a:endParaRPr lang="en-US" sz="1000" dirty="0"/>
+          </a:p>
+        </p:txBody>
+      </p:sp>
+    </p:spTree>
+    <p:extLst>
+      <p:ext uri="{BB962C8B-B14F-4D97-AF65-F5344CB8AC3E}">
+        <p14:creationId xmlns:p14="http://schemas.microsoft.com/office/powerpoint/2010/main" val="4137795899"/>
+      </p:ext>
+    </p:extLst>
+  </p:cSld>
+  <p:clrMapOvr>
+    <a:masterClrMapping/>
+  </p:clrMapOvr>
+</p:sld>
+</file>
+
 <file path=ppt/slides/slide2.xml><?xml version="1.0" encoding="utf-8"?>
 <p:sld xmlns:a="http://schemas.openxmlformats.org/drawingml/2006/main" xmlns:r="http://schemas.openxmlformats.org/officeDocument/2006/relationships" xmlns:p="http://schemas.openxmlformats.org/presentationml/2006/main">
   <p:cSld name="Slide 2">
@@ -8847,11 +9520,13 @@
             <a:avLst/>
           </a:prstGeom>
           <a:solidFill>
-            <a:srgbClr val="1A2E4A"/>
+            <a:srgbClr val="D6E4F0"/>
           </a:solidFill>
           <a:ln w="12700">
             <a:solidFill>
-              <a:srgbClr val="1A2E4A"/>
+              <a:schemeClr val="accent1">
+                <a:lumMod val="50000"/>
+              </a:schemeClr>
             </a:solidFill>
             <a:prstDash val="solid"/>
           </a:ln>
@@ -8883,34 +9558,14 @@
             </a:pPr>
             <a:r>
               <a:rPr lang="en-US" sz="1600" b="1" i="1" dirty="0">
-                <a:solidFill>
-                  <a:srgbClr val="FFFFFF"/>
-                </a:solidFill>
-                <a:latin typeface="Calibri" pitchFamily="34" charset="0"/>
-                <a:ea typeface="Calibri" pitchFamily="34" charset="-122"/>
-                <a:cs typeface="Calibri" pitchFamily="34" charset="-120"/>
-              </a:rPr>
-              <a:t>Can Deep Reinforcement Learning replace classical heuristics</a:t>
+                <a:latin typeface="Calibri" pitchFamily="34" charset="0"/>
+                <a:ea typeface="Calibri" pitchFamily="34" charset="-122"/>
+                <a:cs typeface="Calibri" pitchFamily="34" charset="-120"/>
+              </a:rPr>
+              <a:t>Can Deep Reinforcement Learning (DRL) be applied to autonomous exploration?</a:t>
             </a:r>
             <a:endParaRPr lang="en-US" sz="1600" dirty="0"/>
           </a:p>
-          <a:p>
-            <a:pPr marL="0" indent="0" algn="ctr">
-              <a:buNone/>
-            </a:pPr>
-            <a:r>
-              <a:rPr lang="en-US" sz="1600" b="1" i="1" dirty="0">
-                <a:solidFill>
-                  <a:srgbClr val="FFFFFF"/>
-                </a:solidFill>
-                <a:latin typeface="Calibri" pitchFamily="34" charset="0"/>
-                <a:ea typeface="Calibri" pitchFamily="34" charset="-122"/>
-                <a:cs typeface="Calibri" pitchFamily="34" charset="-120"/>
-              </a:rPr>
-              <a:t>for frontier cluster selection in autonomous exploration?</a:t>
-            </a:r>
-            <a:endParaRPr lang="en-US" sz="1600" dirty="0"/>
-          </a:p>
         </p:txBody>
       </p:sp>
       <p:sp>
@@ -8922,7 +9577,7 @@
         <p:spPr>
           <a:xfrm>
             <a:off x="457200" y="2011680"/>
-            <a:ext cx="8229600" cy="2880360"/>
+            <a:ext cx="8229600" cy="1464491"/>
           </a:xfrm>
           <a:prstGeom prst="rect">
             <a:avLst/>
@@ -8942,7 +9597,7 @@
               <a:buChar char="•"/>
             </a:pPr>
             <a:r>
-              <a:rPr lang="en-US" sz="1400" dirty="0">
+              <a:rPr lang="en-US" dirty="0">
                 <a:solidFill>
                   <a:srgbClr val="1A1A1A"/>
                 </a:solidFill>
@@ -8950,9 +9605,9 @@
                 <a:ea typeface="Calibri" pitchFamily="34" charset="-122"/>
                 <a:cs typeface="Calibri" pitchFamily="34" charset="-120"/>
               </a:rPr>
-              <a:t>Autonomous exploration = systematic coverage of an unknown environment without human input</a:t>
-            </a:r>
-            <a:endParaRPr lang="en-US" sz="1400" dirty="0"/>
+              <a:t>Autonomous exploration is complex task</a:t>
+            </a:r>
+            <a:endParaRPr lang="en-US" dirty="0"/>
           </a:p>
           <a:p>
             <a:pPr marL="190500" indent="-190500">
@@ -8963,7 +9618,7 @@
               <a:buChar char="•"/>
             </a:pPr>
             <a:r>
-              <a:rPr lang="en-US" sz="1400" dirty="0">
+              <a:rPr lang="en-US" dirty="0">
                 <a:solidFill>
                   <a:srgbClr val="1A1A1A"/>
                 </a:solidFill>
@@ -8971,9 +9626,9 @@
                 <a:ea typeface="Calibri" pitchFamily="34" charset="-122"/>
                 <a:cs typeface="Calibri" pitchFamily="34" charset="-120"/>
               </a:rPr>
-              <a:t>Classical frontier methods use fixed heuristics (nearest, largest) — simple but not adaptive</a:t>
-            </a:r>
-            <a:endParaRPr lang="en-US" sz="1400" dirty="0"/>
+              <a:t>Classical analytical methods exist but present some limitations</a:t>
+            </a:r>
+            <a:endParaRPr lang="en-US" dirty="0"/>
           </a:p>
           <a:p>
             <a:pPr marL="190500" indent="-190500">
@@ -8984,7 +9639,7 @@
               <a:buChar char="•"/>
             </a:pPr>
             <a:r>
-              <a:rPr lang="en-US" sz="1400" dirty="0">
+              <a:rPr lang="en-US" dirty="0">
                 <a:solidFill>
                   <a:srgbClr val="1A1A1A"/>
                 </a:solidFill>
@@ -8992,9 +9647,9 @@
                 <a:ea typeface="Calibri" pitchFamily="34" charset="-122"/>
                 <a:cs typeface="Calibri" pitchFamily="34" charset="-120"/>
               </a:rPr>
-              <a:t>DRL learns a policy from experience — potentially more flexible and environment-aware</a:t>
-            </a:r>
-            <a:endParaRPr lang="en-US" sz="1400" dirty="0"/>
+              <a:t>Learning-based methods can provide more adaptive models</a:t>
+            </a:r>
+            <a:endParaRPr lang="en-US" dirty="0"/>
           </a:p>
           <a:p>
             <a:pPr marL="190500" indent="-190500">
@@ -9005,7 +9660,7 @@
               <a:buChar char="•"/>
             </a:pPr>
             <a:r>
-              <a:rPr lang="en-US" sz="1400" dirty="0">
+              <a:rPr lang="en-US" dirty="0">
                 <a:solidFill>
                   <a:srgbClr val="1A1A1A"/>
                 </a:solidFill>
@@ -9015,9 +9670,42 @@
               </a:rPr>
               <a:t>Goal: validate DRL as a drop-in decision-maker inside a modular exploration pipeline</a:t>
             </a:r>
-            <a:endParaRPr lang="en-US" sz="1400" dirty="0"/>
-          </a:p>
-        </p:txBody>
+            <a:endParaRPr lang="en-US" dirty="0"/>
+          </a:p>
+        </p:txBody>
+      </p:sp>
+      <p:sp>
+        <p:nvSpPr>
+          <p:cNvPr id="10" name="Shape 5">
+            <a:extLst>
+              <a:ext uri="{FF2B5EF4-FFF2-40B4-BE49-F238E27FC236}">
+                <a16:creationId xmlns:a16="http://schemas.microsoft.com/office/drawing/2014/main" id="{20922800-AC85-8C8E-D387-FB1501F05660}"/>
+              </a:ext>
+            </a:extLst>
+          </p:cNvPr>
+          <p:cNvSpPr/>
+          <p:nvPr/>
+        </p:nvSpPr>
+        <p:spPr>
+          <a:xfrm>
+            <a:off x="384048" y="3476171"/>
+            <a:ext cx="8412480" cy="960120"/>
+          </a:xfrm>
+          <a:prstGeom prst="rect">
+            <a:avLst/>
+          </a:prstGeom>
+          <a:solidFill>
+            <a:srgbClr val="D6E4F0"/>
+          </a:solidFill>
+          <a:ln w="12700">
+            <a:solidFill>
+              <a:schemeClr val="accent1">
+                <a:lumMod val="50000"/>
+              </a:schemeClr>
+            </a:solidFill>
+            <a:prstDash val="solid"/>
+          </a:ln>
+        </p:spPr>
       </p:sp>
     </p:spTree>
   </p:cSld>
@@ -9077,7 +9765,7 @@
               <a:buNone/>
             </a:pPr>
             <a:r>
-              <a:rPr lang="en-US" sz="900" dirty="0">
+              <a:rPr lang="en-US" sz="900" u="sng" dirty="0">
                 <a:solidFill>
                   <a:srgbClr val="BBBBBB"/>
                 </a:solidFill>
@@ -9087,7 +9775,7 @@
               </a:rPr>
               <a:t>Paolo Spallanzani  ·  Deep RL in Frontier-Based Autonomous Exploration</a:t>
             </a:r>
-            <a:endParaRPr lang="en-US" sz="900" dirty="0"/>
+            <a:endParaRPr lang="en-US" sz="900" u="sng" dirty="0"/>
           </a:p>
         </p:txBody>
       </p:sp>

--- a/presentation_draft.pptx
+++ b/presentation_draft.pptx
@@ -3182,45 +3182,6 @@
       </p:grpSpPr>
       <p:sp>
         <p:nvSpPr>
-          <p:cNvPr id="2" name="Text 0"/>
-          <p:cNvSpPr/>
-          <p:nvPr/>
-        </p:nvSpPr>
-        <p:spPr>
-          <a:xfrm>
-            <a:off x="320040" y="4846320"/>
-            <a:ext cx="7772400" cy="201168"/>
-          </a:xfrm>
-          <a:prstGeom prst="rect">
-            <a:avLst/>
-          </a:prstGeom>
-          <a:noFill/>
-          <a:ln/>
-        </p:spPr>
-        <p:txBody>
-          <a:bodyPr wrap="square" rtlCol="0" anchor="ctr"/>
-          <a:lstStyle/>
-          <a:p>
-            <a:pPr marL="0" indent="0" algn="l">
-              <a:buNone/>
-            </a:pPr>
-            <a:r>
-              <a:rPr lang="en-US" sz="900" dirty="0">
-                <a:solidFill>
-                  <a:srgbClr val="BBBBBB"/>
-                </a:solidFill>
-                <a:latin typeface="Calibri" pitchFamily="34" charset="0"/>
-                <a:ea typeface="Calibri" pitchFamily="34" charset="-122"/>
-                <a:cs typeface="Calibri" pitchFamily="34" charset="-120"/>
-              </a:rPr>
-              <a:t>Paolo Spallanzani  ·  Deep RL in Frontier-Based Autonomous Exploration</a:t>
-            </a:r>
-            <a:endParaRPr lang="en-US" sz="900" dirty="0"/>
-          </a:p>
-        </p:txBody>
-      </p:sp>
-      <p:sp>
-        <p:nvSpPr>
           <p:cNvPr id="3" name="Text 1"/>
           <p:cNvSpPr/>
           <p:nvPr/>
@@ -3353,8 +3314,8 @@
         </p:nvSpPr>
         <p:spPr>
           <a:xfrm>
-            <a:off x="365760" y="914400"/>
-            <a:ext cx="4206240" cy="2377440"/>
+            <a:off x="320041" y="914400"/>
+            <a:ext cx="4346786" cy="2377440"/>
           </a:xfrm>
           <a:prstGeom prst="rect">
             <a:avLst/>
@@ -3382,8 +3343,59 @@
                 <a:ea typeface="Calibri" pitchFamily="34" charset="-122"/>
                 <a:cs typeface="Calibri" pitchFamily="34" charset="-120"/>
               </a:rPr>
-              <a:t>Phase 1 — Config search: reward × observation set → best config per reward</a:t>
-            </a:r>
+              <a:t>Phase 1 — Configuration search: </a:t>
+            </a:r>
+            <a:br>
+              <a:rPr lang="en-US" sz="1400" dirty="0">
+                <a:solidFill>
+                  <a:srgbClr val="1A1A1A"/>
+                </a:solidFill>
+                <a:latin typeface="Calibri" pitchFamily="34" charset="0"/>
+                <a:ea typeface="Calibri" pitchFamily="34" charset="-122"/>
+                <a:cs typeface="Calibri" pitchFamily="34" charset="-120"/>
+              </a:rPr>
+            </a:br>
+            <a:r>
+              <a:rPr lang="en-US" sz="1300" dirty="0">
+                <a:solidFill>
+                  <a:srgbClr val="1A1A1A"/>
+                </a:solidFill>
+                <a:latin typeface="Calibri" pitchFamily="34" charset="0"/>
+                <a:ea typeface="Calibri" pitchFamily="34" charset="-122"/>
+                <a:cs typeface="Calibri" pitchFamily="34" charset="-120"/>
+              </a:rPr>
+              <a:t>reward × observation set </a:t>
+            </a:r>
+            <a:r>
+              <a:rPr lang="en-US" sz="1300" b="1" dirty="0">
+                <a:solidFill>
+                  <a:srgbClr val="C00000"/>
+                </a:solidFill>
+                <a:latin typeface="Calibri" pitchFamily="34" charset="0"/>
+                <a:ea typeface="Calibri" pitchFamily="34" charset="-122"/>
+                <a:cs typeface="Calibri" pitchFamily="34" charset="-120"/>
+              </a:rPr>
+              <a:t>→</a:t>
+            </a:r>
+            <a:r>
+              <a:rPr lang="en-US" sz="1300" dirty="0">
+                <a:solidFill>
+                  <a:srgbClr val="1A1A1A"/>
+                </a:solidFill>
+                <a:latin typeface="Calibri" pitchFamily="34" charset="0"/>
+                <a:ea typeface="Calibri" pitchFamily="34" charset="-122"/>
+                <a:cs typeface="Calibri" pitchFamily="34" charset="-120"/>
+              </a:rPr>
+              <a:t> best configuration per reward</a:t>
+            </a:r>
+          </a:p>
+          <a:p>
+            <a:pPr>
+              <a:spcAft>
+                <a:spcPts val="500"/>
+              </a:spcAft>
+              <a:buSzPct val="100000"/>
+            </a:pPr>
             <a:endParaRPr lang="en-US" sz="1400" dirty="0"/>
           </a:p>
           <a:p>
@@ -3403,9 +3415,49 @@
                 <a:ea typeface="Calibri" pitchFamily="34" charset="-122"/>
                 <a:cs typeface="Calibri" pitchFamily="34" charset="-120"/>
               </a:rPr>
-              <a:t>Phase 2 — Hyperparameter optimization: lr, batch size, target update interval</a:t>
-            </a:r>
-            <a:endParaRPr lang="en-US" sz="1400" dirty="0"/>
+              <a:t>Phase 2 — Hyperparameter optimization: </a:t>
+            </a:r>
+            <a:br>
+              <a:rPr lang="en-US" sz="1400" dirty="0">
+                <a:solidFill>
+                  <a:srgbClr val="1A1A1A"/>
+                </a:solidFill>
+                <a:latin typeface="Calibri" pitchFamily="34" charset="0"/>
+                <a:ea typeface="Calibri" pitchFamily="34" charset="-122"/>
+                <a:cs typeface="Calibri" pitchFamily="34" charset="-120"/>
+              </a:rPr>
+            </a:br>
+            <a:r>
+              <a:rPr lang="en-US" sz="1300" b="1" dirty="0">
+                <a:solidFill>
+                  <a:srgbClr val="C00000"/>
+                </a:solidFill>
+                <a:latin typeface="Calibri" pitchFamily="34" charset="0"/>
+                <a:ea typeface="Calibri" pitchFamily="34" charset="-122"/>
+                <a:cs typeface="Calibri" pitchFamily="34" charset="-120"/>
+              </a:rPr>
+              <a:t>→</a:t>
+            </a:r>
+            <a:r>
+              <a:rPr lang="en-US" sz="1300" dirty="0">
+                <a:solidFill>
+                  <a:srgbClr val="1A1A1A"/>
+                </a:solidFill>
+                <a:latin typeface="Calibri" pitchFamily="34" charset="0"/>
+                <a:ea typeface="Calibri" pitchFamily="34" charset="-122"/>
+                <a:cs typeface="Calibri" pitchFamily="34" charset="-120"/>
+              </a:rPr>
+              <a:t> converged to a single optimal hyperparameter set</a:t>
+            </a:r>
+          </a:p>
+          <a:p>
+            <a:pPr>
+              <a:spcAft>
+                <a:spcPts val="500"/>
+              </a:spcAft>
+              <a:buSzPct val="100000"/>
+            </a:pPr>
+            <a:endParaRPr lang="en-US" sz="1300" dirty="0"/>
           </a:p>
           <a:p>
             <a:pPr marL="190500" indent="-190500">
@@ -3424,9 +3476,52 @@
                 <a:ea typeface="Calibri" pitchFamily="34" charset="-122"/>
                 <a:cs typeface="Calibri" pitchFamily="34" charset="-120"/>
               </a:rPr>
-              <a:t>Phase 3 — Training budget: 500k / 750k / 1M steps comparison</a:t>
-            </a:r>
-            <a:endParaRPr lang="en-US" sz="1400" dirty="0"/>
+              <a:t>Phase 3 — Training budget: </a:t>
+            </a:r>
+            <a:br>
+              <a:rPr lang="en-US" sz="1400" dirty="0">
+                <a:solidFill>
+                  <a:srgbClr val="1A1A1A"/>
+                </a:solidFill>
+                <a:latin typeface="Calibri" pitchFamily="34" charset="0"/>
+                <a:ea typeface="Calibri" pitchFamily="34" charset="-122"/>
+                <a:cs typeface="Calibri" pitchFamily="34" charset="-120"/>
+              </a:rPr>
+            </a:br>
+            <a:r>
+              <a:rPr lang="en-US" sz="1300" dirty="0">
+                <a:solidFill>
+                  <a:srgbClr val="1A1A1A"/>
+                </a:solidFill>
+                <a:latin typeface="Calibri" pitchFamily="34" charset="0"/>
+                <a:ea typeface="Calibri" pitchFamily="34" charset="-122"/>
+                <a:cs typeface="Calibri" pitchFamily="34" charset="-120"/>
+              </a:rPr>
+              <a:t>500k / 750k / 1M time steps </a:t>
+            </a:r>
+            <a:r>
+              <a:rPr lang="en-US" sz="1300" b="1" dirty="0">
+                <a:solidFill>
+                  <a:srgbClr val="C00000"/>
+                </a:solidFill>
+                <a:latin typeface="Calibri" pitchFamily="34" charset="0"/>
+                <a:ea typeface="Calibri" pitchFamily="34" charset="-122"/>
+                <a:cs typeface="Calibri" pitchFamily="34" charset="-120"/>
+              </a:rPr>
+              <a:t>→</a:t>
+            </a:r>
+            <a:r>
+              <a:rPr lang="en-US" sz="1300" dirty="0">
+                <a:solidFill>
+                  <a:srgbClr val="1A1A1A"/>
+                </a:solidFill>
+                <a:latin typeface="Calibri" pitchFamily="34" charset="0"/>
+                <a:ea typeface="Calibri" pitchFamily="34" charset="-122"/>
+                <a:cs typeface="Calibri" pitchFamily="34" charset="-120"/>
+              </a:rPr>
+              <a:t> 2 best models selected</a:t>
+            </a:r>
+            <a:endParaRPr lang="en-US" sz="1300" dirty="0"/>
           </a:p>
         </p:txBody>
       </p:sp>
@@ -3445,8 +3540,8 @@
         </p:blipFill>
         <p:spPr>
           <a:xfrm>
-            <a:off x="4663440" y="896112"/>
-            <a:ext cx="4251960" cy="4023360"/>
+            <a:off x="4537814" y="797559"/>
+            <a:ext cx="4377586" cy="4142232"/>
           </a:xfrm>
           <a:prstGeom prst="rect">
             <a:avLst/>
@@ -3462,7 +3557,7 @@
         <p:spPr>
           <a:xfrm>
             <a:off x="365760" y="3364992"/>
-            <a:ext cx="4206240" cy="1444752"/>
+            <a:ext cx="4206240" cy="1207008"/>
           </a:xfrm>
           <a:prstGeom prst="rect">
             <a:avLst/>
@@ -3486,7 +3581,7 @@
         </p:nvSpPr>
         <p:spPr>
           <a:xfrm>
-            <a:off x="502920" y="3438144"/>
+            <a:off x="502920" y="3337560"/>
             <a:ext cx="3977640" cy="1261872"/>
           </a:xfrm>
           <a:prstGeom prst="rect">
@@ -3511,7 +3606,7 @@
                 <a:ea typeface="Calibri" pitchFamily="34" charset="-122"/>
                 <a:cs typeface="Calibri" pitchFamily="34" charset="-120"/>
               </a:rPr>
-              <a:t>Baseline: greedy distance policy (always selects the nearest frontier centroid). Evaluation over 20 independent test episodes per map size.</a:t>
+              <a:t>Baseline: greedy distance policy (always selects the nearest frontier centroid). Evaluation over 100 independent test episodes per map size.</a:t>
             </a:r>
             <a:endParaRPr lang="en-US" sz="1200" dirty="0"/>
           </a:p>
@@ -3821,7 +3916,7 @@
         </p:nvSpPr>
         <p:spPr>
           <a:xfrm>
-            <a:off x="320040" y="3785616"/>
+            <a:off x="320040" y="3677248"/>
             <a:ext cx="5212080" cy="228600"/>
           </a:xfrm>
           <a:prstGeom prst="rect">
@@ -3883,7 +3978,7 @@
         </p:nvSpPr>
         <p:spPr>
           <a:xfrm>
-            <a:off x="5623560" y="3785616"/>
+            <a:off x="5623560" y="3677248"/>
             <a:ext cx="3200400" cy="228600"/>
           </a:xfrm>
           <a:prstGeom prst="rect">
@@ -3914,70 +4009,460 @@
           </a:p>
         </p:txBody>
       </p:sp>
-      <p:sp>
-        <p:nvSpPr>
-          <p:cNvPr id="13" name="Shape 9"/>
-          <p:cNvSpPr/>
-          <p:nvPr/>
-        </p:nvSpPr>
-        <p:spPr>
-          <a:xfrm>
-            <a:off x="320040" y="4069080"/>
-            <a:ext cx="8503920" cy="713232"/>
-          </a:xfrm>
-          <a:prstGeom prst="rect">
-            <a:avLst/>
-          </a:prstGeom>
-          <a:solidFill>
-            <a:srgbClr val="FFF3F3"/>
-          </a:solidFill>
-          <a:ln w="12700">
-            <a:solidFill>
-              <a:srgbClr val="C8472C"/>
-            </a:solidFill>
-            <a:prstDash val="solid"/>
-          </a:ln>
-        </p:spPr>
-      </p:sp>
-      <p:sp>
-        <p:nvSpPr>
-          <p:cNvPr id="14" name="Text 10"/>
-          <p:cNvSpPr/>
-          <p:nvPr/>
-        </p:nvSpPr>
-        <p:spPr>
-          <a:xfrm>
-            <a:off x="502920" y="4114800"/>
-            <a:ext cx="8229600" cy="621792"/>
-          </a:xfrm>
-          <a:prstGeom prst="rect">
-            <a:avLst/>
-          </a:prstGeom>
-          <a:noFill/>
-          <a:ln/>
-        </p:spPr>
-        <p:txBody>
-          <a:bodyPr wrap="square" rtlCol="0" anchor="ctr"/>
-          <a:lstStyle/>
-          <a:p>
-            <a:pPr marL="0" indent="0">
-              <a:buNone/>
-            </a:pPr>
-            <a:r>
-              <a:rPr lang="en-US" sz="1200" b="1" dirty="0">
-                <a:solidFill>
-                  <a:srgbClr val="C8472C"/>
-                </a:solidFill>
-                <a:latin typeface="Calibri" pitchFamily="34" charset="0"/>
-                <a:ea typeface="Calibri" pitchFamily="34" charset="-122"/>
-                <a:cs typeface="Calibri" pitchFamily="34" charset="-120"/>
-              </a:rPr>
-              <a:t>⚠  Reward hacking: agent always selects action 0. Root cause — sorted observations make the padding penalty trivially exploitable.</a:t>
-            </a:r>
-            <a:endParaRPr lang="en-US" sz="1200" dirty="0"/>
-          </a:p>
-        </p:txBody>
-      </p:sp>
+      <p:graphicFrame>
+        <p:nvGraphicFramePr>
+          <p:cNvPr id="15" name="Tabella 14">
+            <a:extLst>
+              <a:ext uri="{FF2B5EF4-FFF2-40B4-BE49-F238E27FC236}">
+                <a16:creationId xmlns:a16="http://schemas.microsoft.com/office/drawing/2014/main" id="{945D122D-FE56-F66D-9E60-75297FD91088}"/>
+              </a:ext>
+            </a:extLst>
+          </p:cNvPr>
+          <p:cNvGraphicFramePr>
+            <a:graphicFrameLocks noGrp="1"/>
+          </p:cNvGraphicFramePr>
+          <p:nvPr>
+            <p:extLst>
+              <p:ext uri="{D42A27DB-BD31-4B8C-83A1-F6EECF244321}">
+                <p14:modId xmlns:p14="http://schemas.microsoft.com/office/powerpoint/2010/main" val="4134257202"/>
+              </p:ext>
+            </p:extLst>
+          </p:nvPr>
+        </p:nvGraphicFramePr>
+        <p:xfrm>
+          <a:off x="352044" y="4005244"/>
+          <a:ext cx="4219956" cy="548640"/>
+        </p:xfrm>
+        <a:graphic>
+          <a:graphicData uri="http://schemas.openxmlformats.org/drawingml/2006/table">
+            <a:tbl>
+              <a:tblPr firstRow="1" bandRow="1">
+                <a:tableStyleId>{5C22544A-7EE6-4342-B048-85BDC9FD1C3A}</a:tableStyleId>
+              </a:tblPr>
+              <a:tblGrid>
+                <a:gridCol w="1406652">
+                  <a:extLst>
+                    <a:ext uri="{9D8B030D-6E8A-4147-A177-3AD203B41FA5}">
+                      <a16:colId xmlns:a16="http://schemas.microsoft.com/office/drawing/2014/main" val="2279340693"/>
+                    </a:ext>
+                  </a:extLst>
+                </a:gridCol>
+                <a:gridCol w="1406652">
+                  <a:extLst>
+                    <a:ext uri="{9D8B030D-6E8A-4147-A177-3AD203B41FA5}">
+                      <a16:colId xmlns:a16="http://schemas.microsoft.com/office/drawing/2014/main" val="2914056647"/>
+                    </a:ext>
+                  </a:extLst>
+                </a:gridCol>
+                <a:gridCol w="1406652">
+                  <a:extLst>
+                    <a:ext uri="{9D8B030D-6E8A-4147-A177-3AD203B41FA5}">
+                      <a16:colId xmlns:a16="http://schemas.microsoft.com/office/drawing/2014/main" val="2011988342"/>
+                    </a:ext>
+                  </a:extLst>
+                </a:gridCol>
+              </a:tblGrid>
+              <a:tr h="237744">
+                <a:tc>
+                  <a:txBody>
+                    <a:bodyPr/>
+                    <a:lstStyle/>
+                    <a:p>
+                      <a:pPr marL="0" marR="0" lvl="0" indent="0" algn="l" defTabSz="914400" rtl="0" eaLnBrk="1" fontAlgn="auto" latinLnBrk="0" hangingPunct="1">
+                        <a:lnSpc>
+                          <a:spcPct val="100000"/>
+                        </a:lnSpc>
+                        <a:spcBef>
+                          <a:spcPts val="0"/>
+                        </a:spcBef>
+                        <a:spcAft>
+                          <a:spcPts val="0"/>
+                        </a:spcAft>
+                        <a:buClrTx/>
+                        <a:buSzTx/>
+                        <a:buFontTx/>
+                        <a:buNone/>
+                        <a:tabLst/>
+                        <a:defRPr/>
+                      </a:pPr>
+                      <a:r>
+                        <a:rPr lang="it-IT" sz="1200" dirty="0">
+                          <a:solidFill>
+                            <a:schemeClr val="tx1"/>
+                          </a:solidFill>
+                        </a:rPr>
+                        <a:t>Evaluation </a:t>
+                      </a:r>
+                      <a:r>
+                        <a:rPr lang="it-IT" sz="1200" dirty="0" err="1">
+                          <a:solidFill>
+                            <a:schemeClr val="tx1"/>
+                          </a:solidFill>
+                        </a:rPr>
+                        <a:t>reward</a:t>
+                      </a:r>
+                      <a:endParaRPr lang="it-IT" sz="1200" dirty="0">
+                        <a:solidFill>
+                          <a:schemeClr val="tx1"/>
+                        </a:solidFill>
+                      </a:endParaRPr>
+                    </a:p>
+                  </a:txBody>
+                  <a:tcPr>
+                    <a:solidFill>
+                      <a:srgbClr val="D6E4F0"/>
+                    </a:solidFill>
+                  </a:tcPr>
+                </a:tc>
+                <a:tc>
+                  <a:txBody>
+                    <a:bodyPr/>
+                    <a:lstStyle/>
+                    <a:p>
+                      <a:r>
+                        <a:rPr lang="it-IT" sz="1200" dirty="0">
+                          <a:solidFill>
+                            <a:schemeClr val="tx1"/>
+                          </a:solidFill>
+                        </a:rPr>
+                        <a:t>Mean</a:t>
+                      </a:r>
+                    </a:p>
+                  </a:txBody>
+                  <a:tcPr>
+                    <a:solidFill>
+                      <a:srgbClr val="D6E4F0"/>
+                    </a:solidFill>
+                  </a:tcPr>
+                </a:tc>
+                <a:tc>
+                  <a:txBody>
+                    <a:bodyPr/>
+                    <a:lstStyle/>
+                    <a:p>
+                      <a:r>
+                        <a:rPr lang="it-IT" sz="1200" dirty="0" err="1">
+                          <a:solidFill>
+                            <a:schemeClr val="tx1"/>
+                          </a:solidFill>
+                        </a:rPr>
+                        <a:t>Std</a:t>
+                      </a:r>
+                      <a:r>
+                        <a:rPr lang="it-IT" sz="1200" dirty="0">
+                          <a:solidFill>
+                            <a:schemeClr val="tx1"/>
+                          </a:solidFill>
+                        </a:rPr>
+                        <a:t>. Dev.</a:t>
+                      </a:r>
+                    </a:p>
+                  </a:txBody>
+                  <a:tcPr>
+                    <a:solidFill>
+                      <a:srgbClr val="D6E4F0"/>
+                    </a:solidFill>
+                  </a:tcPr>
+                </a:tc>
+                <a:extLst>
+                  <a:ext uri="{0D108BD9-81ED-4DB2-BD59-A6C34878D82A}">
+                    <a16:rowId xmlns:a16="http://schemas.microsoft.com/office/drawing/2014/main" val="4258591342"/>
+                  </a:ext>
+                </a:extLst>
+              </a:tr>
+              <a:tr h="237744">
+                <a:tc>
+                  <a:txBody>
+                    <a:bodyPr/>
+                    <a:lstStyle/>
+                    <a:p>
+                      <a:endParaRPr lang="it-IT" sz="1200" dirty="0">
+                        <a:solidFill>
+                          <a:schemeClr val="tx1"/>
+                        </a:solidFill>
+                      </a:endParaRPr>
+                    </a:p>
+                  </a:txBody>
+                  <a:tcPr>
+                    <a:noFill/>
+                  </a:tcPr>
+                </a:tc>
+                <a:tc>
+                  <a:txBody>
+                    <a:bodyPr/>
+                    <a:lstStyle/>
+                    <a:p>
+                      <a:endParaRPr lang="it-IT" sz="1200" dirty="0">
+                        <a:solidFill>
+                          <a:schemeClr val="tx1"/>
+                        </a:solidFill>
+                      </a:endParaRPr>
+                    </a:p>
+                  </a:txBody>
+                  <a:tcPr>
+                    <a:noFill/>
+                  </a:tcPr>
+                </a:tc>
+                <a:tc>
+                  <a:txBody>
+                    <a:bodyPr/>
+                    <a:lstStyle/>
+                    <a:p>
+                      <a:endParaRPr lang="it-IT" sz="1200" dirty="0">
+                        <a:solidFill>
+                          <a:schemeClr val="tx1"/>
+                        </a:solidFill>
+                      </a:endParaRPr>
+                    </a:p>
+                  </a:txBody>
+                  <a:tcPr>
+                    <a:noFill/>
+                  </a:tcPr>
+                </a:tc>
+                <a:extLst>
+                  <a:ext uri="{0D108BD9-81ED-4DB2-BD59-A6C34878D82A}">
+                    <a16:rowId xmlns:a16="http://schemas.microsoft.com/office/drawing/2014/main" val="599868980"/>
+                  </a:ext>
+                </a:extLst>
+              </a:tr>
+            </a:tbl>
+          </a:graphicData>
+        </a:graphic>
+      </p:graphicFrame>
+      <p:graphicFrame>
+        <p:nvGraphicFramePr>
+          <p:cNvPr id="16" name="Tabella 15">
+            <a:extLst>
+              <a:ext uri="{FF2B5EF4-FFF2-40B4-BE49-F238E27FC236}">
+                <a16:creationId xmlns:a16="http://schemas.microsoft.com/office/drawing/2014/main" id="{CCE04E66-40C1-8541-5EBD-A14D9983EEF3}"/>
+              </a:ext>
+            </a:extLst>
+          </p:cNvPr>
+          <p:cNvGraphicFramePr>
+            <a:graphicFrameLocks noGrp="1"/>
+          </p:cNvGraphicFramePr>
+          <p:nvPr>
+            <p:extLst>
+              <p:ext uri="{D42A27DB-BD31-4B8C-83A1-F6EECF244321}">
+                <p14:modId xmlns:p14="http://schemas.microsoft.com/office/powerpoint/2010/main" val="3928463427"/>
+              </p:ext>
+            </p:extLst>
+          </p:nvPr>
+        </p:nvGraphicFramePr>
+        <p:xfrm>
+          <a:off x="5623560" y="3674531"/>
+          <a:ext cx="3200400" cy="822960"/>
+        </p:xfrm>
+        <a:graphic>
+          <a:graphicData uri="http://schemas.openxmlformats.org/drawingml/2006/table">
+            <a:tbl>
+              <a:tblPr firstRow="1" bandRow="1">
+                <a:tableStyleId>{5C22544A-7EE6-4342-B048-85BDC9FD1C3A}</a:tableStyleId>
+              </a:tblPr>
+              <a:tblGrid>
+                <a:gridCol w="1600200">
+                  <a:extLst>
+                    <a:ext uri="{9D8B030D-6E8A-4147-A177-3AD203B41FA5}">
+                      <a16:colId xmlns:a16="http://schemas.microsoft.com/office/drawing/2014/main" val="3778225683"/>
+                    </a:ext>
+                  </a:extLst>
+                </a:gridCol>
+                <a:gridCol w="1600200">
+                  <a:extLst>
+                    <a:ext uri="{9D8B030D-6E8A-4147-A177-3AD203B41FA5}">
+                      <a16:colId xmlns:a16="http://schemas.microsoft.com/office/drawing/2014/main" val="1372306556"/>
+                    </a:ext>
+                  </a:extLst>
+                </a:gridCol>
+              </a:tblGrid>
+              <a:tr h="226906">
+                <a:tc gridSpan="2">
+                  <a:txBody>
+                    <a:bodyPr/>
+                    <a:lstStyle/>
+                    <a:p>
+                      <a:pPr marL="0" marR="0" lvl="0" indent="0" algn="l" defTabSz="914400" rtl="0" eaLnBrk="1" fontAlgn="auto" latinLnBrk="0" hangingPunct="1">
+                        <a:lnSpc>
+                          <a:spcPct val="100000"/>
+                        </a:lnSpc>
+                        <a:spcBef>
+                          <a:spcPts val="0"/>
+                        </a:spcBef>
+                        <a:spcAft>
+                          <a:spcPts val="0"/>
+                        </a:spcAft>
+                        <a:buClrTx/>
+                        <a:buSzTx/>
+                        <a:buFontTx/>
+                        <a:buNone/>
+                        <a:tabLst/>
+                        <a:defRPr/>
+                      </a:pPr>
+                      <a:r>
+                        <a:rPr lang="it-IT" sz="1200" dirty="0">
+                          <a:solidFill>
+                            <a:schemeClr val="tx1"/>
+                          </a:solidFill>
+                        </a:rPr>
+                        <a:t>Evaluation</a:t>
+                      </a:r>
+                    </a:p>
+                  </a:txBody>
+                  <a:tcPr>
+                    <a:lnT w="12700" cap="flat" cmpd="sng" algn="ctr">
+                      <a:solidFill>
+                        <a:schemeClr val="tx1"/>
+                      </a:solidFill>
+                      <a:prstDash val="solid"/>
+                      <a:round/>
+                      <a:headEnd type="none" w="med" len="med"/>
+                      <a:tailEnd type="none" w="med" len="med"/>
+                    </a:lnT>
+                    <a:lnB w="12700" cap="flat" cmpd="sng" algn="ctr">
+                      <a:solidFill>
+                        <a:schemeClr val="tx1"/>
+                      </a:solidFill>
+                      <a:prstDash val="solid"/>
+                      <a:round/>
+                      <a:headEnd type="none" w="med" len="med"/>
+                      <a:tailEnd type="none" w="med" len="med"/>
+                    </a:lnB>
+                    <a:solidFill>
+                      <a:srgbClr val="D6E4F0"/>
+                    </a:solidFill>
+                  </a:tcPr>
+                </a:tc>
+                <a:tc hMerge="1">
+                  <a:txBody>
+                    <a:bodyPr/>
+                    <a:lstStyle/>
+                    <a:p>
+                      <a:endParaRPr lang="it-IT" sz="1200" dirty="0"/>
+                    </a:p>
+                  </a:txBody>
+                  <a:tcPr>
+                    <a:solidFill>
+                      <a:srgbClr val="D6E4F0"/>
+                    </a:solidFill>
+                  </a:tcPr>
+                </a:tc>
+                <a:extLst>
+                  <a:ext uri="{0D108BD9-81ED-4DB2-BD59-A6C34878D82A}">
+                    <a16:rowId xmlns:a16="http://schemas.microsoft.com/office/drawing/2014/main" val="788575100"/>
+                  </a:ext>
+                </a:extLst>
+              </a:tr>
+              <a:tr h="226906">
+                <a:tc>
+                  <a:txBody>
+                    <a:bodyPr/>
+                    <a:lstStyle/>
+                    <a:p>
+                      <a:r>
+                        <a:rPr lang="it-IT" sz="1200" dirty="0">
+                          <a:solidFill>
+                            <a:schemeClr val="tx1"/>
+                          </a:solidFill>
+                        </a:rPr>
+                        <a:t>Mean </a:t>
+                      </a:r>
+                      <a:r>
+                        <a:rPr lang="it-IT" sz="1200" dirty="0" err="1">
+                          <a:solidFill>
+                            <a:schemeClr val="tx1"/>
+                          </a:solidFill>
+                        </a:rPr>
+                        <a:t>Reward</a:t>
+                      </a:r>
+                      <a:endParaRPr lang="it-IT" sz="1200" dirty="0"/>
+                    </a:p>
+                  </a:txBody>
+                  <a:tcPr>
+                    <a:lnT w="12700" cap="flat" cmpd="sng" algn="ctr">
+                      <a:solidFill>
+                        <a:schemeClr val="tx1"/>
+                      </a:solidFill>
+                      <a:prstDash val="solid"/>
+                      <a:round/>
+                      <a:headEnd type="none" w="med" len="med"/>
+                      <a:tailEnd type="none" w="med" len="med"/>
+                    </a:lnT>
+                    <a:noFill/>
+                  </a:tcPr>
+                </a:tc>
+                <a:tc>
+                  <a:txBody>
+                    <a:bodyPr/>
+                    <a:lstStyle/>
+                    <a:p>
+                      <a:r>
+                        <a:rPr lang="it-IT" sz="1200" dirty="0" err="1"/>
+                        <a:t>Std</a:t>
+                      </a:r>
+                      <a:r>
+                        <a:rPr lang="it-IT" sz="1200" dirty="0"/>
+                        <a:t>. Dev</a:t>
+                      </a:r>
+                    </a:p>
+                  </a:txBody>
+                  <a:tcPr>
+                    <a:lnT w="12700" cap="flat" cmpd="sng" algn="ctr">
+                      <a:solidFill>
+                        <a:schemeClr val="tx1"/>
+                      </a:solidFill>
+                      <a:prstDash val="solid"/>
+                      <a:round/>
+                      <a:headEnd type="none" w="med" len="med"/>
+                      <a:tailEnd type="none" w="med" len="med"/>
+                    </a:lnT>
+                    <a:noFill/>
+                  </a:tcPr>
+                </a:tc>
+                <a:extLst>
+                  <a:ext uri="{0D108BD9-81ED-4DB2-BD59-A6C34878D82A}">
+                    <a16:rowId xmlns:a16="http://schemas.microsoft.com/office/drawing/2014/main" val="2962184145"/>
+                  </a:ext>
+                </a:extLst>
+              </a:tr>
+              <a:tr h="226906">
+                <a:tc>
+                  <a:txBody>
+                    <a:bodyPr/>
+                    <a:lstStyle/>
+                    <a:p>
+                      <a:endParaRPr lang="it-IT" sz="1200" dirty="0"/>
+                    </a:p>
+                  </a:txBody>
+                  <a:tcPr>
+                    <a:solidFill>
+                      <a:srgbClr val="D6E4F0"/>
+                    </a:solidFill>
+                  </a:tcPr>
+                </a:tc>
+                <a:tc>
+                  <a:txBody>
+                    <a:bodyPr/>
+                    <a:lstStyle/>
+                    <a:p>
+                      <a:endParaRPr lang="it-IT" sz="1200" dirty="0"/>
+                    </a:p>
+                  </a:txBody>
+                  <a:tcPr>
+                    <a:solidFill>
+                      <a:srgbClr val="D6E4F0"/>
+                    </a:solidFill>
+                  </a:tcPr>
+                </a:tc>
+                <a:extLst>
+                  <a:ext uri="{0D108BD9-81ED-4DB2-BD59-A6C34878D82A}">
+                    <a16:rowId xmlns:a16="http://schemas.microsoft.com/office/drawing/2014/main" val="3660624183"/>
+                  </a:ext>
+                </a:extLst>
+              </a:tr>
+            </a:tbl>
+          </a:graphicData>
+        </a:graphic>
+      </p:graphicFrame>
     </p:spTree>
   </p:cSld>
   <p:clrMapOvr>
@@ -13202,6 +13687,25 @@
           <a:bodyPr wrap="square" rtlCol="0" anchor="t"/>
           <a:lstStyle/>
           <a:p>
+            <a:pPr>
+              <a:spcAft>
+                <a:spcPts val="500"/>
+              </a:spcAft>
+              <a:buSzPct val="100000"/>
+            </a:pPr>
+            <a:r>
+              <a:rPr lang="en-US" sz="1300" dirty="0">
+                <a:solidFill>
+                  <a:srgbClr val="1A1A1A"/>
+                </a:solidFill>
+                <a:latin typeface="Calibri" pitchFamily="34" charset="0"/>
+                <a:ea typeface="Calibri" pitchFamily="34" charset="-122"/>
+                <a:cs typeface="Calibri" pitchFamily="34" charset="-120"/>
+              </a:rPr>
+              <a:t>Configurable setup:</a:t>
+            </a:r>
+          </a:p>
+          <a:p>
             <a:pPr marL="190500" indent="-190500">
               <a:spcAft>
                 <a:spcPts val="500"/>
@@ -13218,7 +13722,70 @@
                 <a:ea typeface="Calibri" pitchFamily="34" charset="-122"/>
                 <a:cs typeface="Calibri" pitchFamily="34" charset="-120"/>
               </a:rPr>
-              <a:t>Per-cluster feature vector: distance, size, angle, coordinates</a:t>
+              <a:t>Per-cluster frontiers information vector: </a:t>
+            </a:r>
+          </a:p>
+          <a:p>
+            <a:pPr marL="742950" lvl="1" indent="-285750">
+              <a:spcAft>
+                <a:spcPts val="500"/>
+              </a:spcAft>
+              <a:buSzPct val="70000"/>
+              <a:buFont typeface="Courier New" panose="02070309020205020404" pitchFamily="49" charset="0"/>
+              <a:buChar char="o"/>
+            </a:pPr>
+            <a:r>
+              <a:rPr lang="en-US" sz="1300" dirty="0">
+                <a:solidFill>
+                  <a:srgbClr val="1A1A1A"/>
+                </a:solidFill>
+                <a:latin typeface="Calibri" pitchFamily="34" charset="0"/>
+                <a:ea typeface="Calibri" pitchFamily="34" charset="-122"/>
+                <a:cs typeface="Calibri" pitchFamily="34" charset="-120"/>
+              </a:rPr>
+              <a:t>centroids position</a:t>
+            </a:r>
+          </a:p>
+          <a:p>
+            <a:pPr marL="742950" lvl="1" indent="-285750">
+              <a:spcAft>
+                <a:spcPts val="500"/>
+              </a:spcAft>
+              <a:buSzPct val="70000"/>
+              <a:buFont typeface="Courier New" panose="02070309020205020404" pitchFamily="49" charset="0"/>
+              <a:buChar char="o"/>
+            </a:pPr>
+            <a:r>
+              <a:rPr lang="en-US" sz="1300" dirty="0">
+                <a:solidFill>
+                  <a:srgbClr val="1A1A1A"/>
+                </a:solidFill>
+                <a:latin typeface="Calibri" pitchFamily="34" charset="0"/>
+                <a:ea typeface="Calibri" pitchFamily="34" charset="-122"/>
+                <a:cs typeface="Calibri" pitchFamily="34" charset="-120"/>
+              </a:rPr>
+              <a:t>information gain</a:t>
+            </a:r>
+          </a:p>
+          <a:p>
+            <a:pPr marL="742950" lvl="1" indent="-285750">
+              <a:spcAft>
+                <a:spcPts val="500"/>
+              </a:spcAft>
+              <a:buSzPct val="70000"/>
+              <a:buFont typeface="Courier New" panose="02070309020205020404" pitchFamily="49" charset="0"/>
+              <a:buChar char="o"/>
+            </a:pPr>
+            <a:r>
+              <a:rPr lang="en-US" sz="1300" dirty="0">
+                <a:solidFill>
+                  <a:srgbClr val="1A1A1A"/>
+                </a:solidFill>
+                <a:latin typeface="Calibri" pitchFamily="34" charset="0"/>
+                <a:ea typeface="Calibri" pitchFamily="34" charset="-122"/>
+                <a:cs typeface="Calibri" pitchFamily="34" charset="-120"/>
+              </a:rPr>
+              <a:t>distance</a:t>
             </a:r>
             <a:endParaRPr lang="en-US" sz="1300" dirty="0"/>
           </a:p>
@@ -13231,6 +13798,20 @@
               <a:buChar char="•"/>
             </a:pPr>
             <a:r>
+              <a:rPr lang="en-US" sz="1300" dirty="0"/>
+              <a:t>Agent position (optional)</a:t>
+            </a:r>
+          </a:p>
+          <a:p>
+            <a:pPr marL="190500" indent="-190500">
+              <a:spcAft>
+                <a:spcPts val="500"/>
+              </a:spcAft>
+              <a:buSzPct val="100000"/>
+              <a:buFontTx/>
+              <a:buChar char="•"/>
+            </a:pPr>
+            <a:r>
               <a:rPr lang="en-US" sz="1300" dirty="0">
                 <a:solidFill>
                   <a:srgbClr val="1A1A1A"/>
@@ -13251,38 +13832,6 @@
               <a:buSzPct val="100000"/>
               <a:buChar char="•"/>
             </a:pPr>
-            <a:r>
-              <a:rPr lang="en-US" sz="1300" dirty="0">
-                <a:solidFill>
-                  <a:srgbClr val="1A1A1A"/>
-                </a:solidFill>
-                <a:latin typeface="Calibri" pitchFamily="34" charset="0"/>
-                <a:ea typeface="Calibri" pitchFamily="34" charset="-122"/>
-                <a:cs typeface="Calibri" pitchFamily="34" charset="-120"/>
-              </a:rPr>
-              <a:t>Relative (agent-centered) or absolute coordinates tested</a:t>
-            </a:r>
-            <a:endParaRPr lang="en-US" sz="1300" dirty="0"/>
-          </a:p>
-          <a:p>
-            <a:pPr marL="190500" indent="-190500">
-              <a:spcAft>
-                <a:spcPts val="500"/>
-              </a:spcAft>
-              <a:buSzPct val="100000"/>
-              <a:buChar char="•"/>
-            </a:pPr>
-            <a:r>
-              <a:rPr lang="en-US" sz="1300" dirty="0">
-                <a:solidFill>
-                  <a:srgbClr val="1A1A1A"/>
-                </a:solidFill>
-                <a:latin typeface="Calibri" pitchFamily="34" charset="0"/>
-                <a:ea typeface="Calibri" pitchFamily="34" charset="-122"/>
-                <a:cs typeface="Calibri" pitchFamily="34" charset="-120"/>
-              </a:rPr>
-              <a:t>Observations in random order — no sorting applied</a:t>
-            </a:r>
             <a:endParaRPr lang="en-US" sz="1300" dirty="0"/>
           </a:p>
         </p:txBody>

--- a/presentation_draft.pptx
+++ b/presentation_draft.pptx
@@ -5473,84 +5473,6 @@
       </p:grpSpPr>
       <p:sp>
         <p:nvSpPr>
-          <p:cNvPr id="2" name="Text 0"/>
-          <p:cNvSpPr/>
-          <p:nvPr/>
-        </p:nvSpPr>
-        <p:spPr>
-          <a:xfrm>
-            <a:off x="320040" y="4846320"/>
-            <a:ext cx="7772400" cy="201168"/>
-          </a:xfrm>
-          <a:prstGeom prst="rect">
-            <a:avLst/>
-          </a:prstGeom>
-          <a:noFill/>
-          <a:ln/>
-        </p:spPr>
-        <p:txBody>
-          <a:bodyPr wrap="square" rtlCol="0" anchor="ctr"/>
-          <a:lstStyle/>
-          <a:p>
-            <a:pPr marL="0" indent="0" algn="l">
-              <a:buNone/>
-            </a:pPr>
-            <a:r>
-              <a:rPr lang="en-US" sz="900" dirty="0">
-                <a:solidFill>
-                  <a:srgbClr val="BBBBBB"/>
-                </a:solidFill>
-                <a:latin typeface="Calibri" pitchFamily="34" charset="0"/>
-                <a:ea typeface="Calibri" pitchFamily="34" charset="-122"/>
-                <a:cs typeface="Calibri" pitchFamily="34" charset="-120"/>
-              </a:rPr>
-              <a:t>Paolo Spallanzani  ·  Deep RL in Frontier-Based Autonomous Exploration</a:t>
-            </a:r>
-            <a:endParaRPr lang="en-US" sz="900" dirty="0"/>
-          </a:p>
-        </p:txBody>
-      </p:sp>
-      <p:sp>
-        <p:nvSpPr>
-          <p:cNvPr id="3" name="Text 1"/>
-          <p:cNvSpPr/>
-          <p:nvPr/>
-        </p:nvSpPr>
-        <p:spPr>
-          <a:xfrm>
-            <a:off x="8412480" y="4846320"/>
-            <a:ext cx="457200" cy="201168"/>
-          </a:xfrm>
-          <a:prstGeom prst="rect">
-            <a:avLst/>
-          </a:prstGeom>
-          <a:noFill/>
-          <a:ln/>
-        </p:spPr>
-        <p:txBody>
-          <a:bodyPr wrap="square" rtlCol="0" anchor="ctr"/>
-          <a:lstStyle/>
-          <a:p>
-            <a:pPr marL="0" indent="0" algn="r">
-              <a:buNone/>
-            </a:pPr>
-            <a:r>
-              <a:rPr lang="en-US" sz="900" dirty="0">
-                <a:solidFill>
-                  <a:srgbClr val="BBBBBB"/>
-                </a:solidFill>
-                <a:latin typeface="Calibri" pitchFamily="34" charset="0"/>
-                <a:ea typeface="Calibri" pitchFamily="34" charset="-122"/>
-                <a:cs typeface="Calibri" pitchFamily="34" charset="-120"/>
-              </a:rPr>
-              <a:t>15 / 17</a:t>
-            </a:r>
-            <a:endParaRPr lang="en-US" sz="900" dirty="0"/>
-          </a:p>
-        </p:txBody>
-      </p:sp>
-      <p:sp>
-        <p:nvSpPr>
           <p:cNvPr id="4" name="Shape 2"/>
           <p:cNvSpPr/>
           <p:nvPr/>
@@ -5657,9 +5579,6 @@
           <a:bodyPr wrap="square" rtlCol="0" anchor="ctr"/>
           <a:lstStyle/>
           <a:p>
-            <a:pPr marL="0" indent="0">
-              <a:buNone/>
-            </a:pPr>
             <a:r>
               <a:rPr lang="en-US" sz="1200" i="1" dirty="0">
                 <a:solidFill>
@@ -5669,7 +5588,7 @@
                 <a:ea typeface="Calibri" pitchFamily="34" charset="-122"/>
                 <a:cs typeface="Calibri" pitchFamily="34" charset="-120"/>
               </a:rPr>
-              <a:t>Evaluation on 20 test episodes per map size. Metric: mean exploration coverage (%) at episode end.</a:t>
+              <a:t>Evaluation on 100 test episodes per map size. Metric: mean episode reward at episode end (coverage 90%).</a:t>
             </a:r>
             <a:endParaRPr lang="en-US" sz="1200" dirty="0"/>
           </a:p>
@@ -5684,14 +5603,14 @@
           <p:nvPr>
             <p:extLst>
               <p:ext uri="{D42A27DB-BD31-4B8C-83A1-F6EECF244321}">
-                <p14:modId xmlns:p14="http://schemas.microsoft.com/office/powerpoint/2010/main" val="1579011935"/>
+                <p14:modId xmlns:p14="http://schemas.microsoft.com/office/powerpoint/2010/main" val="3714783785"/>
               </p:ext>
             </p:extLst>
           </p:nvPr>
         </p:nvGraphicFramePr>
         <p:xfrm>
           <a:off x="320040" y="1298448"/>
-          <a:ext cx="8503920" cy="2560320"/>
+          <a:ext cx="8503920" cy="3200400"/>
         </p:xfrm>
         <a:graphic>
           <a:graphicData uri="http://schemas.openxmlformats.org/drawingml/2006/table">
@@ -6174,7 +6093,7 @@
                           <a:ea typeface="Calibri" pitchFamily="34" charset="-122"/>
                           <a:cs typeface="Calibri" pitchFamily="34" charset="-120"/>
                         </a:rPr>
-                        <a:t>Greedy (baseline)</a:t>
+                        <a:t>Greedy min distance</a:t>
                       </a:r>
                       <a:endParaRPr lang="en-US" sz="1300" dirty="0">
                         <a:latin typeface="Calibri" charset="0"/>
@@ -6589,6 +6508,437 @@
                           <a:ea typeface="Calibri" pitchFamily="34" charset="-122"/>
                           <a:cs typeface="Calibri" pitchFamily="34" charset="-120"/>
                         </a:rPr>
+                        <a:t>Greedy max</a:t>
+                      </a:r>
+                    </a:p>
+                    <a:p>
+                      <a:pPr marL="0" indent="0" algn="ctr">
+                        <a:buNone/>
+                      </a:pPr>
+                      <a:r>
+                        <a:rPr lang="en-US" sz="1300" dirty="0">
+                          <a:solidFill>
+                            <a:srgbClr val="000000"/>
+                          </a:solidFill>
+                          <a:latin typeface="Calibri" pitchFamily="34" charset="0"/>
+                          <a:ea typeface="Calibri" pitchFamily="34" charset="-122"/>
+                          <a:cs typeface="Calibri" pitchFamily="34" charset="-120"/>
+                        </a:rPr>
+                        <a:t>Information gain</a:t>
+                      </a:r>
+                      <a:endParaRPr lang="en-US" sz="1300" dirty="0">
+                        <a:latin typeface="Calibri" charset="0"/>
+                        <a:ea typeface="Calibri" charset="0"/>
+                        <a:cs typeface="Calibri" charset="0"/>
+                      </a:endParaRPr>
+                    </a:p>
+                  </a:txBody>
+                  <a:tcPr>
+                    <a:lnL w="12700" cap="flat" cmpd="sng" algn="ctr">
+                      <a:solidFill>
+                        <a:srgbClr val="D0D8E4"/>
+                      </a:solidFill>
+                      <a:prstDash val="solid"/>
+                      <a:round/>
+                      <a:headEnd type="none" w="med" len="med"/>
+                      <a:tailEnd type="none" w="med" len="med"/>
+                    </a:lnL>
+                    <a:lnR w="12700" cap="flat" cmpd="sng" algn="ctr">
+                      <a:solidFill>
+                        <a:srgbClr val="D0D8E4"/>
+                      </a:solidFill>
+                      <a:prstDash val="solid"/>
+                      <a:round/>
+                      <a:headEnd type="none" w="med" len="med"/>
+                      <a:tailEnd type="none" w="med" len="med"/>
+                    </a:lnR>
+                    <a:lnT w="12700" cap="flat" cmpd="sng" algn="ctr">
+                      <a:solidFill>
+                        <a:srgbClr val="D0D8E4"/>
+                      </a:solidFill>
+                      <a:prstDash val="solid"/>
+                      <a:round/>
+                      <a:headEnd type="none" w="med" len="med"/>
+                      <a:tailEnd type="none" w="med" len="med"/>
+                    </a:lnT>
+                    <a:lnB w="12700" cap="flat" cmpd="sng" algn="ctr">
+                      <a:solidFill>
+                        <a:srgbClr val="D0D8E4"/>
+                      </a:solidFill>
+                      <a:prstDash val="solid"/>
+                      <a:round/>
+                      <a:headEnd type="none" w="med" len="med"/>
+                      <a:tailEnd type="none" w="med" len="med"/>
+                    </a:lnB>
+                    <a:solidFill>
+                      <a:srgbClr val="EEF4FB"/>
+                    </a:solidFill>
+                  </a:tcPr>
+                </a:tc>
+                <a:tc>
+                  <a:txBody>
+                    <a:bodyPr/>
+                    <a:lstStyle/>
+                    <a:p>
+                      <a:pPr marL="0" indent="0" algn="ctr">
+                        <a:buNone/>
+                      </a:pPr>
+                      <a:r>
+                        <a:rPr lang="en-US" sz="1300" dirty="0">
+                          <a:solidFill>
+                            <a:srgbClr val="000000"/>
+                          </a:solidFill>
+                          <a:latin typeface="Calibri" pitchFamily="34" charset="0"/>
+                          <a:ea typeface="Calibri" pitchFamily="34" charset="-122"/>
+                          <a:cs typeface="Calibri" pitchFamily="34" charset="-120"/>
+                        </a:rPr>
+                        <a:t>—</a:t>
+                      </a:r>
+                      <a:endParaRPr lang="en-US" sz="1300" dirty="0">
+                        <a:latin typeface="Calibri" charset="0"/>
+                        <a:ea typeface="Calibri" charset="0"/>
+                        <a:cs typeface="Calibri" charset="0"/>
+                      </a:endParaRPr>
+                    </a:p>
+                  </a:txBody>
+                  <a:tcPr>
+                    <a:lnL w="12700" cap="flat" cmpd="sng" algn="ctr">
+                      <a:solidFill>
+                        <a:srgbClr val="D0D8E4"/>
+                      </a:solidFill>
+                      <a:prstDash val="solid"/>
+                      <a:round/>
+                      <a:headEnd type="none" w="med" len="med"/>
+                      <a:tailEnd type="none" w="med" len="med"/>
+                    </a:lnL>
+                    <a:lnR w="12700" cap="flat" cmpd="sng" algn="ctr">
+                      <a:solidFill>
+                        <a:srgbClr val="D0D8E4"/>
+                      </a:solidFill>
+                      <a:prstDash val="solid"/>
+                      <a:round/>
+                      <a:headEnd type="none" w="med" len="med"/>
+                      <a:tailEnd type="none" w="med" len="med"/>
+                    </a:lnR>
+                    <a:lnT w="12700" cap="flat" cmpd="sng" algn="ctr">
+                      <a:solidFill>
+                        <a:srgbClr val="D0D8E4"/>
+                      </a:solidFill>
+                      <a:prstDash val="solid"/>
+                      <a:round/>
+                      <a:headEnd type="none" w="med" len="med"/>
+                      <a:tailEnd type="none" w="med" len="med"/>
+                    </a:lnT>
+                    <a:lnB w="12700" cap="flat" cmpd="sng" algn="ctr">
+                      <a:solidFill>
+                        <a:srgbClr val="D0D8E4"/>
+                      </a:solidFill>
+                      <a:prstDash val="solid"/>
+                      <a:round/>
+                      <a:headEnd type="none" w="med" len="med"/>
+                      <a:tailEnd type="none" w="med" len="med"/>
+                    </a:lnB>
+                    <a:solidFill>
+                      <a:srgbClr val="EEF4FB"/>
+                    </a:solidFill>
+                  </a:tcPr>
+                </a:tc>
+                <a:tc>
+                  <a:txBody>
+                    <a:bodyPr/>
+                    <a:lstStyle/>
+                    <a:p>
+                      <a:pPr marL="0" indent="0" algn="ctr">
+                        <a:buNone/>
+                      </a:pPr>
+                      <a:r>
+                        <a:rPr lang="en-US" sz="1300" dirty="0">
+                          <a:solidFill>
+                            <a:srgbClr val="000000"/>
+                          </a:solidFill>
+                          <a:latin typeface="Calibri" pitchFamily="34" charset="0"/>
+                          <a:ea typeface="Calibri" pitchFamily="34" charset="-122"/>
+                          <a:cs typeface="Calibri" pitchFamily="34" charset="-120"/>
+                        </a:rPr>
+                        <a:t>—</a:t>
+                      </a:r>
+                      <a:endParaRPr lang="en-US" sz="1300" dirty="0">
+                        <a:latin typeface="Calibri" charset="0"/>
+                        <a:ea typeface="Calibri" charset="0"/>
+                        <a:cs typeface="Calibri" charset="0"/>
+                      </a:endParaRPr>
+                    </a:p>
+                  </a:txBody>
+                  <a:tcPr>
+                    <a:lnL w="12700" cap="flat" cmpd="sng" algn="ctr">
+                      <a:solidFill>
+                        <a:srgbClr val="D0D8E4"/>
+                      </a:solidFill>
+                      <a:prstDash val="solid"/>
+                      <a:round/>
+                      <a:headEnd type="none" w="med" len="med"/>
+                      <a:tailEnd type="none" w="med" len="med"/>
+                    </a:lnL>
+                    <a:lnR w="12700" cap="flat" cmpd="sng" algn="ctr">
+                      <a:solidFill>
+                        <a:srgbClr val="D0D8E4"/>
+                      </a:solidFill>
+                      <a:prstDash val="solid"/>
+                      <a:round/>
+                      <a:headEnd type="none" w="med" len="med"/>
+                      <a:tailEnd type="none" w="med" len="med"/>
+                    </a:lnR>
+                    <a:lnT w="12700" cap="flat" cmpd="sng" algn="ctr">
+                      <a:solidFill>
+                        <a:srgbClr val="D0D8E4"/>
+                      </a:solidFill>
+                      <a:prstDash val="solid"/>
+                      <a:round/>
+                      <a:headEnd type="none" w="med" len="med"/>
+                      <a:tailEnd type="none" w="med" len="med"/>
+                    </a:lnT>
+                    <a:lnB w="12700" cap="flat" cmpd="sng" algn="ctr">
+                      <a:solidFill>
+                        <a:srgbClr val="D0D8E4"/>
+                      </a:solidFill>
+                      <a:prstDash val="solid"/>
+                      <a:round/>
+                      <a:headEnd type="none" w="med" len="med"/>
+                      <a:tailEnd type="none" w="med" len="med"/>
+                    </a:lnB>
+                    <a:solidFill>
+                      <a:srgbClr val="EEF4FB"/>
+                    </a:solidFill>
+                  </a:tcPr>
+                </a:tc>
+                <a:tc>
+                  <a:txBody>
+                    <a:bodyPr/>
+                    <a:lstStyle/>
+                    <a:p>
+                      <a:pPr marL="0" indent="0" algn="ctr">
+                        <a:buNone/>
+                      </a:pPr>
+                      <a:r>
+                        <a:rPr lang="en-US" sz="1300" dirty="0">
+                          <a:solidFill>
+                            <a:srgbClr val="000000"/>
+                          </a:solidFill>
+                          <a:latin typeface="Calibri" pitchFamily="34" charset="0"/>
+                          <a:ea typeface="Calibri" pitchFamily="34" charset="-122"/>
+                          <a:cs typeface="Calibri" pitchFamily="34" charset="-120"/>
+                        </a:rPr>
+                        <a:t>—</a:t>
+                      </a:r>
+                      <a:endParaRPr lang="en-US" sz="1300" dirty="0">
+                        <a:latin typeface="Calibri" charset="0"/>
+                        <a:ea typeface="Calibri" charset="0"/>
+                        <a:cs typeface="Calibri" charset="0"/>
+                      </a:endParaRPr>
+                    </a:p>
+                  </a:txBody>
+                  <a:tcPr>
+                    <a:lnL w="12700" cap="flat" cmpd="sng" algn="ctr">
+                      <a:solidFill>
+                        <a:srgbClr val="D0D8E4"/>
+                      </a:solidFill>
+                      <a:prstDash val="solid"/>
+                      <a:round/>
+                      <a:headEnd type="none" w="med" len="med"/>
+                      <a:tailEnd type="none" w="med" len="med"/>
+                    </a:lnL>
+                    <a:lnR w="12700" cap="flat" cmpd="sng" algn="ctr">
+                      <a:solidFill>
+                        <a:srgbClr val="D0D8E4"/>
+                      </a:solidFill>
+                      <a:prstDash val="solid"/>
+                      <a:round/>
+                      <a:headEnd type="none" w="med" len="med"/>
+                      <a:tailEnd type="none" w="med" len="med"/>
+                    </a:lnR>
+                    <a:lnT w="12700" cap="flat" cmpd="sng" algn="ctr">
+                      <a:solidFill>
+                        <a:srgbClr val="D0D8E4"/>
+                      </a:solidFill>
+                      <a:prstDash val="solid"/>
+                      <a:round/>
+                      <a:headEnd type="none" w="med" len="med"/>
+                      <a:tailEnd type="none" w="med" len="med"/>
+                    </a:lnT>
+                    <a:lnB w="12700" cap="flat" cmpd="sng" algn="ctr">
+                      <a:solidFill>
+                        <a:srgbClr val="D0D8E4"/>
+                      </a:solidFill>
+                      <a:prstDash val="solid"/>
+                      <a:round/>
+                      <a:headEnd type="none" w="med" len="med"/>
+                      <a:tailEnd type="none" w="med" len="med"/>
+                    </a:lnB>
+                    <a:solidFill>
+                      <a:srgbClr val="EEF4FB"/>
+                    </a:solidFill>
+                  </a:tcPr>
+                </a:tc>
+                <a:tc>
+                  <a:txBody>
+                    <a:bodyPr/>
+                    <a:lstStyle/>
+                    <a:p>
+                      <a:pPr marL="0" indent="0" algn="ctr">
+                        <a:buNone/>
+                      </a:pPr>
+                      <a:r>
+                        <a:rPr lang="en-US" sz="1300" dirty="0">
+                          <a:solidFill>
+                            <a:srgbClr val="000000"/>
+                          </a:solidFill>
+                          <a:latin typeface="Calibri" pitchFamily="34" charset="0"/>
+                          <a:ea typeface="Calibri" pitchFamily="34" charset="-122"/>
+                          <a:cs typeface="Calibri" pitchFamily="34" charset="-120"/>
+                        </a:rPr>
+                        <a:t>—</a:t>
+                      </a:r>
+                      <a:endParaRPr lang="en-US" sz="1300" dirty="0">
+                        <a:latin typeface="Calibri" charset="0"/>
+                        <a:ea typeface="Calibri" charset="0"/>
+                        <a:cs typeface="Calibri" charset="0"/>
+                      </a:endParaRPr>
+                    </a:p>
+                  </a:txBody>
+                  <a:tcPr>
+                    <a:lnL w="12700" cap="flat" cmpd="sng" algn="ctr">
+                      <a:solidFill>
+                        <a:srgbClr val="D0D8E4"/>
+                      </a:solidFill>
+                      <a:prstDash val="solid"/>
+                      <a:round/>
+                      <a:headEnd type="none" w="med" len="med"/>
+                      <a:tailEnd type="none" w="med" len="med"/>
+                    </a:lnL>
+                    <a:lnR w="12700" cap="flat" cmpd="sng" algn="ctr">
+                      <a:solidFill>
+                        <a:srgbClr val="D0D8E4"/>
+                      </a:solidFill>
+                      <a:prstDash val="solid"/>
+                      <a:round/>
+                      <a:headEnd type="none" w="med" len="med"/>
+                      <a:tailEnd type="none" w="med" len="med"/>
+                    </a:lnR>
+                    <a:lnT w="12700" cap="flat" cmpd="sng" algn="ctr">
+                      <a:solidFill>
+                        <a:srgbClr val="D0D8E4"/>
+                      </a:solidFill>
+                      <a:prstDash val="solid"/>
+                      <a:round/>
+                      <a:headEnd type="none" w="med" len="med"/>
+                      <a:tailEnd type="none" w="med" len="med"/>
+                    </a:lnT>
+                    <a:lnB w="12700" cap="flat" cmpd="sng" algn="ctr">
+                      <a:solidFill>
+                        <a:srgbClr val="D0D8E4"/>
+                      </a:solidFill>
+                      <a:prstDash val="solid"/>
+                      <a:round/>
+                      <a:headEnd type="none" w="med" len="med"/>
+                      <a:tailEnd type="none" w="med" len="med"/>
+                    </a:lnB>
+                    <a:solidFill>
+                      <a:srgbClr val="EEF4FB"/>
+                    </a:solidFill>
+                  </a:tcPr>
+                </a:tc>
+                <a:tc>
+                  <a:txBody>
+                    <a:bodyPr/>
+                    <a:lstStyle/>
+                    <a:p>
+                      <a:pPr marL="0" indent="0" algn="ctr">
+                        <a:buNone/>
+                      </a:pPr>
+                      <a:r>
+                        <a:rPr lang="en-US" sz="1300" dirty="0">
+                          <a:solidFill>
+                            <a:srgbClr val="000000"/>
+                          </a:solidFill>
+                          <a:latin typeface="Calibri" pitchFamily="34" charset="0"/>
+                          <a:ea typeface="Calibri" pitchFamily="34" charset="-122"/>
+                          <a:cs typeface="Calibri" pitchFamily="34" charset="-120"/>
+                        </a:rPr>
+                        <a:t>Nearest frontier</a:t>
+                      </a:r>
+                      <a:endParaRPr lang="en-US" sz="1300" dirty="0">
+                        <a:latin typeface="Calibri" charset="0"/>
+                        <a:ea typeface="Calibri" charset="0"/>
+                        <a:cs typeface="Calibri" charset="0"/>
+                      </a:endParaRPr>
+                    </a:p>
+                  </a:txBody>
+                  <a:tcPr>
+                    <a:lnL w="12700" cap="flat" cmpd="sng" algn="ctr">
+                      <a:solidFill>
+                        <a:srgbClr val="D0D8E4"/>
+                      </a:solidFill>
+                      <a:prstDash val="solid"/>
+                      <a:round/>
+                      <a:headEnd type="none" w="med" len="med"/>
+                      <a:tailEnd type="none" w="med" len="med"/>
+                    </a:lnL>
+                    <a:lnR w="12700" cap="flat" cmpd="sng" algn="ctr">
+                      <a:solidFill>
+                        <a:srgbClr val="D0D8E4"/>
+                      </a:solidFill>
+                      <a:prstDash val="solid"/>
+                      <a:round/>
+                      <a:headEnd type="none" w="med" len="med"/>
+                      <a:tailEnd type="none" w="med" len="med"/>
+                    </a:lnR>
+                    <a:lnT w="12700" cap="flat" cmpd="sng" algn="ctr">
+                      <a:solidFill>
+                        <a:srgbClr val="D0D8E4"/>
+                      </a:solidFill>
+                      <a:prstDash val="solid"/>
+                      <a:round/>
+                      <a:headEnd type="none" w="med" len="med"/>
+                      <a:tailEnd type="none" w="med" len="med"/>
+                    </a:lnT>
+                    <a:lnB w="12700" cap="flat" cmpd="sng" algn="ctr">
+                      <a:solidFill>
+                        <a:srgbClr val="D0D8E4"/>
+                      </a:solidFill>
+                      <a:prstDash val="solid"/>
+                      <a:round/>
+                      <a:headEnd type="none" w="med" len="med"/>
+                      <a:tailEnd type="none" w="med" len="med"/>
+                    </a:lnB>
+                    <a:solidFill>
+                      <a:srgbClr val="EEF4FB"/>
+                    </a:solidFill>
+                  </a:tcPr>
+                </a:tc>
+                <a:extLst>
+                  <a:ext uri="{0D108BD9-81ED-4DB2-BD59-A6C34878D82A}">
+                    <a16:rowId xmlns:a16="http://schemas.microsoft.com/office/drawing/2014/main" val="168243651"/>
+                  </a:ext>
+                </a:extLst>
+              </a:tr>
+              <a:tr h="640080">
+                <a:tc>
+                  <a:txBody>
+                    <a:bodyPr/>
+                    <a:lstStyle/>
+                    <a:p>
+                      <a:pPr marL="0" indent="0" algn="ctr">
+                        <a:buNone/>
+                      </a:pPr>
+                      <a:r>
+                        <a:rPr lang="en-US" sz="1300" dirty="0">
+                          <a:solidFill>
+                            <a:srgbClr val="000000"/>
+                          </a:solidFill>
+                          <a:latin typeface="Calibri" pitchFamily="34" charset="0"/>
+                          <a:ea typeface="Calibri" pitchFamily="34" charset="-122"/>
+                          <a:cs typeface="Calibri" pitchFamily="34" charset="-120"/>
+                        </a:rPr>
                         <a:t>Model 1</a:t>
                       </a:r>
                       <a:endParaRPr lang="en-US" sz="1300" dirty="0">
@@ -6650,20 +7000,12 @@
                       </a:pPr>
                       <a:r>
                         <a:rPr lang="en-US" sz="1300" dirty="0">
-                          <a:solidFill>
-                            <a:srgbClr val="000000"/>
-                          </a:solidFill>
-                          <a:latin typeface="Calibri" pitchFamily="34" charset="0"/>
-                          <a:ea typeface="Calibri" pitchFamily="34" charset="-122"/>
-                          <a:cs typeface="Calibri" pitchFamily="34" charset="-120"/>
+                          <a:latin typeface="Calibri" charset="0"/>
+                          <a:ea typeface="Calibri" charset="0"/>
+                          <a:cs typeface="Calibri" charset="0"/>
                         </a:rPr>
-                        <a:t>Relative</a:t>
+                        <a:t>1</a:t>
                       </a:r>
-                      <a:endParaRPr lang="en-US" sz="1300" dirty="0">
-                        <a:latin typeface="Calibri" charset="0"/>
-                        <a:ea typeface="Calibri" charset="0"/>
-                        <a:cs typeface="Calibri" charset="0"/>
-                      </a:endParaRPr>
                     </a:p>
                   </a:txBody>
                   <a:tcPr>
@@ -6725,7 +7067,7 @@
                           <a:ea typeface="Calibri" pitchFamily="34" charset="-122"/>
                           <a:cs typeface="Calibri" pitchFamily="34" charset="-120"/>
                         </a:rPr>
-                        <a:t>Sorted</a:t>
+                        <a:t>Relative - Sorted</a:t>
                       </a:r>
                       <a:endParaRPr lang="en-US" sz="1300" dirty="0">
                         <a:latin typeface="Calibri" charset="0"/>
@@ -7065,20 +7407,12 @@
                       </a:pPr>
                       <a:r>
                         <a:rPr lang="en-US" sz="1300" dirty="0">
-                          <a:solidFill>
-                            <a:srgbClr val="000000"/>
-                          </a:solidFill>
-                          <a:latin typeface="Calibri" pitchFamily="34" charset="0"/>
-                          <a:ea typeface="Calibri" pitchFamily="34" charset="-122"/>
-                          <a:cs typeface="Calibri" pitchFamily="34" charset="-120"/>
+                          <a:latin typeface="Calibri" charset="0"/>
+                          <a:ea typeface="Calibri" charset="0"/>
+                          <a:cs typeface="Calibri" charset="0"/>
                         </a:rPr>
-                        <a:t>Absolute</a:t>
+                        <a:t>2</a:t>
                       </a:r>
-                      <a:endParaRPr lang="en-US" sz="1300" dirty="0">
-                        <a:latin typeface="Calibri" charset="0"/>
-                        <a:ea typeface="Calibri" charset="0"/>
-                        <a:cs typeface="Calibri" charset="0"/>
-                      </a:endParaRPr>
                     </a:p>
                   </a:txBody>
                   <a:tcPr>
@@ -7127,6 +7461,22 @@
                   <a:txBody>
                     <a:bodyPr/>
                     <a:lstStyle/>
+                    <a:p>
+                      <a:pPr marL="0" indent="0" algn="ctr">
+                        <a:buNone/>
+                      </a:pPr>
+                      <a:r>
+                        <a:rPr lang="en-US" sz="1300" dirty="0">
+                          <a:solidFill>
+                            <a:srgbClr val="000000"/>
+                          </a:solidFill>
+                          <a:latin typeface="Calibri" pitchFamily="34" charset="0"/>
+                          <a:ea typeface="Calibri" pitchFamily="34" charset="-122"/>
+                          <a:cs typeface="Calibri" pitchFamily="34" charset="-120"/>
+                        </a:rPr>
+                        <a:t>Absolute + Agent</a:t>
+                      </a:r>
+                    </a:p>
                     <a:p>
                       <a:pPr marL="0" indent="0" algn="ctr">
                         <a:buNone/>
@@ -7405,45 +7755,6 @@
           </a:graphicData>
         </a:graphic>
       </p:graphicFrame>
-      <p:sp>
-        <p:nvSpPr>
-          <p:cNvPr id="9" name="Text 6"/>
-          <p:cNvSpPr/>
-          <p:nvPr/>
-        </p:nvSpPr>
-        <p:spPr>
-          <a:xfrm>
-            <a:off x="457200" y="4572000"/>
-            <a:ext cx="8229600" cy="228600"/>
-          </a:xfrm>
-          <a:prstGeom prst="rect">
-            <a:avLst/>
-          </a:prstGeom>
-          <a:noFill/>
-          <a:ln/>
-        </p:spPr>
-        <p:txBody>
-          <a:bodyPr wrap="square" rtlCol="0" anchor="ctr"/>
-          <a:lstStyle/>
-          <a:p>
-            <a:pPr marL="0" indent="0">
-              <a:buNone/>
-            </a:pPr>
-            <a:r>
-              <a:rPr lang="en-US" sz="1000" i="1" dirty="0">
-                <a:solidFill>
-                  <a:srgbClr val="AAAAAA"/>
-                </a:solidFill>
-                <a:latin typeface="Calibri" pitchFamily="34" charset="0"/>
-                <a:ea typeface="Calibri" pitchFamily="34" charset="-122"/>
-                <a:cs typeface="Calibri" pitchFamily="34" charset="-120"/>
-              </a:rPr>
-              <a:t>Full numerical results, coverage curves and statistical comparisons are reported in the thesis.</a:t>
-            </a:r>
-            <a:endParaRPr lang="en-US" sz="1000" dirty="0"/>
-          </a:p>
-        </p:txBody>
-      </p:sp>
     </p:spTree>
   </p:cSld>
   <p:clrMapOvr>
@@ -8393,9 +8704,6 @@
             </a:pPr>
             <a:r>
               <a:rPr lang="en-US" sz="3200" b="1" dirty="0">
-                <a:solidFill>
-                  <a:srgbClr val="FFFFFF"/>
-                </a:solidFill>
                 <a:latin typeface="Calibri" pitchFamily="34" charset="0"/>
                 <a:ea typeface="Calibri" pitchFamily="34" charset="-122"/>
                 <a:cs typeface="Calibri" pitchFamily="34" charset="-120"/>
@@ -8498,9 +8806,6 @@
             </a:pPr>
             <a:r>
               <a:rPr lang="en-US" sz="1300" dirty="0">
-                <a:solidFill>
-                  <a:srgbClr val="FFFFFF"/>
-                </a:solidFill>
                 <a:latin typeface="Calibri" pitchFamily="34" charset="0"/>
                 <a:ea typeface="Calibri" pitchFamily="34" charset="-122"/>
                 <a:cs typeface="Calibri" pitchFamily="34" charset="-120"/>
@@ -8574,9 +8879,6 @@
             </a:pPr>
             <a:r>
               <a:rPr lang="en-US" sz="1300" dirty="0">
-                <a:solidFill>
-                  <a:srgbClr val="FFFFFF"/>
-                </a:solidFill>
                 <a:latin typeface="Calibri" pitchFamily="34" charset="0"/>
                 <a:ea typeface="Calibri" pitchFamily="34" charset="-122"/>
                 <a:cs typeface="Calibri" pitchFamily="34" charset="-120"/>
@@ -8650,9 +8952,6 @@
             </a:pPr>
             <a:r>
               <a:rPr lang="en-US" sz="1300" dirty="0">
-                <a:solidFill>
-                  <a:srgbClr val="FFFFFF"/>
-                </a:solidFill>
                 <a:latin typeface="Calibri" pitchFamily="34" charset="0"/>
                 <a:ea typeface="Calibri" pitchFamily="34" charset="-122"/>
                 <a:cs typeface="Calibri" pitchFamily="34" charset="-120"/>
@@ -8726,9 +9025,6 @@
             </a:pPr>
             <a:r>
               <a:rPr lang="en-US" sz="1300" dirty="0">
-                <a:solidFill>
-                  <a:srgbClr val="FFFFFF"/>
-                </a:solidFill>
                 <a:latin typeface="Calibri" pitchFamily="34" charset="0"/>
                 <a:ea typeface="Calibri" pitchFamily="34" charset="-122"/>
                 <a:cs typeface="Calibri" pitchFamily="34" charset="-120"/>
@@ -8802,9 +9098,6 @@
             </a:pPr>
             <a:r>
               <a:rPr lang="en-US" sz="1300" dirty="0">
-                <a:solidFill>
-                  <a:srgbClr val="FFFFFF"/>
-                </a:solidFill>
                 <a:latin typeface="Calibri" pitchFamily="34" charset="0"/>
                 <a:ea typeface="Calibri" pitchFamily="34" charset="-122"/>
                 <a:cs typeface="Calibri" pitchFamily="34" charset="-120"/>
@@ -8876,9 +9169,6 @@
             </a:pPr>
             <a:r>
               <a:rPr lang="en-US" sz="1000" dirty="0">
-                <a:solidFill>
-                  <a:srgbClr val="9DB8D4"/>
-                </a:solidFill>
                 <a:latin typeface="Calibri" pitchFamily="34" charset="0"/>
                 <a:ea typeface="Calibri" pitchFamily="34" charset="-122"/>
                 <a:cs typeface="Calibri" pitchFamily="34" charset="-120"/>
